--- a/Documents/Phase 2/ProjectPhase2.pptx
+++ b/Documents/Phase 2/ProjectPhase2.pptx
@@ -716,7 +716,7 @@
   <p:cSld>
     <p:spTree>
       <p:nvGrpSpPr>
-        <p:cNvPr id="130" name="Shape 130"/>
+        <p:cNvPr id="131" name="Shape 131"/>
         <p:cNvGrpSpPr/>
         <p:nvPr/>
       </p:nvGrpSpPr>
@@ -730,7 +730,7 @@
       </p:grpSpPr>
       <p:sp>
         <p:nvSpPr>
-          <p:cNvPr id="131" name="Google Shape;131;p:notes"/>
+          <p:cNvPr id="132" name="Google Shape;132;p:notes"/>
           <p:cNvSpPr/>
           <p:nvPr>
             <p:ph idx="2" type="sldImg"/>
@@ -765,7 +765,7 @@
       </p:sp>
       <p:sp>
         <p:nvSpPr>
-          <p:cNvPr id="132" name="Google Shape;132;p:notes"/>
+          <p:cNvPr id="133" name="Google Shape;133;p:notes"/>
           <p:cNvSpPr txBox="1"/>
           <p:nvPr>
             <p:ph idx="1" type="body"/>
@@ -914,7 +914,7 @@
   <p:cSld>
     <p:spTree>
       <p:nvGrpSpPr>
-        <p:cNvPr id="136" name="Shape 136"/>
+        <p:cNvPr id="137" name="Shape 137"/>
         <p:cNvGrpSpPr/>
         <p:nvPr/>
       </p:nvGrpSpPr>
@@ -928,7 +928,7 @@
       </p:grpSpPr>
       <p:sp>
         <p:nvSpPr>
-          <p:cNvPr id="137" name="Google Shape;137;g3693ecb6da3_0_60:notes"/>
+          <p:cNvPr id="138" name="Google Shape;138;g3693ecb6da3_0_60:notes"/>
           <p:cNvSpPr/>
           <p:nvPr>
             <p:ph idx="2" type="sldImg"/>
@@ -963,7 +963,7 @@
       </p:sp>
       <p:sp>
         <p:nvSpPr>
-          <p:cNvPr id="138" name="Google Shape;138;g3693ecb6da3_0_60:notes"/>
+          <p:cNvPr id="139" name="Google Shape;139;g3693ecb6da3_0_60:notes"/>
           <p:cNvSpPr txBox="1"/>
           <p:nvPr>
             <p:ph idx="1" type="body"/>
@@ -1013,7 +1013,7 @@
   <p:cSld>
     <p:spTree>
       <p:nvGrpSpPr>
-        <p:cNvPr id="142" name="Shape 142"/>
+        <p:cNvPr id="143" name="Shape 143"/>
         <p:cNvGrpSpPr/>
         <p:nvPr/>
       </p:nvGrpSpPr>
@@ -1027,7 +1027,7 @@
       </p:grpSpPr>
       <p:sp>
         <p:nvSpPr>
-          <p:cNvPr id="143" name="Google Shape;143;g3698b5456d1_1_10:notes"/>
+          <p:cNvPr id="144" name="Google Shape;144;g3698b5456d1_1_10:notes"/>
           <p:cNvSpPr/>
           <p:nvPr>
             <p:ph idx="2" type="sldImg"/>
@@ -1062,7 +1062,7 @@
       </p:sp>
       <p:sp>
         <p:nvSpPr>
-          <p:cNvPr id="144" name="Google Shape;144;g3698b5456d1_1_10:notes"/>
+          <p:cNvPr id="145" name="Google Shape;145;g3698b5456d1_1_10:notes"/>
           <p:cNvSpPr txBox="1"/>
           <p:nvPr>
             <p:ph idx="1" type="body"/>
@@ -1112,7 +1112,7 @@
   <p:cSld>
     <p:spTree>
       <p:nvGrpSpPr>
-        <p:cNvPr id="149" name="Shape 149"/>
+        <p:cNvPr id="150" name="Shape 150"/>
         <p:cNvGrpSpPr/>
         <p:nvPr/>
       </p:nvGrpSpPr>
@@ -1126,7 +1126,7 @@
       </p:grpSpPr>
       <p:sp>
         <p:nvSpPr>
-          <p:cNvPr id="150" name="Google Shape;150;g3698b5456d1_0_15:notes"/>
+          <p:cNvPr id="151" name="Google Shape;151;g3698b5456d1_0_15:notes"/>
           <p:cNvSpPr/>
           <p:nvPr>
             <p:ph idx="2" type="sldImg"/>
@@ -1161,7 +1161,7 @@
       </p:sp>
       <p:sp>
         <p:nvSpPr>
-          <p:cNvPr id="151" name="Google Shape;151;g3698b5456d1_0_15:notes"/>
+          <p:cNvPr id="152" name="Google Shape;152;g3698b5456d1_0_15:notes"/>
           <p:cNvSpPr txBox="1"/>
           <p:nvPr>
             <p:ph idx="1" type="body"/>
@@ -1211,7 +1211,7 @@
   <p:cSld>
     <p:spTree>
       <p:nvGrpSpPr>
-        <p:cNvPr id="155" name="Shape 155"/>
+        <p:cNvPr id="156" name="Shape 156"/>
         <p:cNvGrpSpPr/>
         <p:nvPr/>
       </p:nvGrpSpPr>
@@ -1225,7 +1225,7 @@
       </p:grpSpPr>
       <p:sp>
         <p:nvSpPr>
-          <p:cNvPr id="156" name="Google Shape;156;g36a50dade9c_1_0:notes"/>
+          <p:cNvPr id="157" name="Google Shape;157;g36a50dade9c_1_0:notes"/>
           <p:cNvSpPr/>
           <p:nvPr>
             <p:ph idx="2" type="sldImg"/>
@@ -1260,7 +1260,7 @@
       </p:sp>
       <p:sp>
         <p:nvSpPr>
-          <p:cNvPr id="157" name="Google Shape;157;g36a50dade9c_1_0:notes"/>
+          <p:cNvPr id="158" name="Google Shape;158;g36a50dade9c_1_0:notes"/>
           <p:cNvSpPr txBox="1"/>
           <p:nvPr>
             <p:ph idx="1" type="body"/>
@@ -1310,7 +1310,7 @@
   <p:cSld>
     <p:spTree>
       <p:nvGrpSpPr>
-        <p:cNvPr id="161" name="Shape 161"/>
+        <p:cNvPr id="162" name="Shape 162"/>
         <p:cNvGrpSpPr/>
         <p:nvPr/>
       </p:nvGrpSpPr>
@@ -1324,7 +1324,7 @@
       </p:grpSpPr>
       <p:sp>
         <p:nvSpPr>
-          <p:cNvPr id="162" name="Google Shape;162;g3698b5456d1_1_35:notes"/>
+          <p:cNvPr id="163" name="Google Shape;163;g3698b5456d1_1_35:notes"/>
           <p:cNvSpPr/>
           <p:nvPr>
             <p:ph idx="2" type="sldImg"/>
@@ -1359,7 +1359,7 @@
       </p:sp>
       <p:sp>
         <p:nvSpPr>
-          <p:cNvPr id="163" name="Google Shape;163;g3698b5456d1_1_35:notes"/>
+          <p:cNvPr id="164" name="Google Shape;164;g3698b5456d1_1_35:notes"/>
           <p:cNvSpPr txBox="1"/>
           <p:nvPr>
             <p:ph idx="1" type="body"/>
@@ -1409,7 +1409,7 @@
   <p:cSld>
     <p:spTree>
       <p:nvGrpSpPr>
-        <p:cNvPr id="169" name="Shape 169"/>
+        <p:cNvPr id="170" name="Shape 170"/>
         <p:cNvGrpSpPr/>
         <p:nvPr/>
       </p:nvGrpSpPr>
@@ -1423,7 +1423,7 @@
       </p:grpSpPr>
       <p:sp>
         <p:nvSpPr>
-          <p:cNvPr id="170" name="Google Shape;170;g3698b5456d1_1_5:notes"/>
+          <p:cNvPr id="171" name="Google Shape;171;g3698b5456d1_1_5:notes"/>
           <p:cNvSpPr/>
           <p:nvPr>
             <p:ph idx="2" type="sldImg"/>
@@ -1458,7 +1458,7 @@
       </p:sp>
       <p:sp>
         <p:nvSpPr>
-          <p:cNvPr id="171" name="Google Shape;171;g3698b5456d1_1_5:notes"/>
+          <p:cNvPr id="172" name="Google Shape;172;g3698b5456d1_1_5:notes"/>
           <p:cNvSpPr txBox="1"/>
           <p:nvPr>
             <p:ph idx="1" type="body"/>
@@ -1508,7 +1508,7 @@
   <p:cSld>
     <p:spTree>
       <p:nvGrpSpPr>
-        <p:cNvPr id="175" name="Shape 175"/>
+        <p:cNvPr id="176" name="Shape 176"/>
         <p:cNvGrpSpPr/>
         <p:nvPr/>
       </p:nvGrpSpPr>
@@ -1522,7 +1522,7 @@
       </p:grpSpPr>
       <p:sp>
         <p:nvSpPr>
-          <p:cNvPr id="176" name="Google Shape;176;g3698b5456d1_1_0:notes"/>
+          <p:cNvPr id="177" name="Google Shape;177;g3698b5456d1_1_0:notes"/>
           <p:cNvSpPr/>
           <p:nvPr>
             <p:ph idx="2" type="sldImg"/>
@@ -1557,7 +1557,7 @@
       </p:sp>
       <p:sp>
         <p:nvSpPr>
-          <p:cNvPr id="177" name="Google Shape;177;g3698b5456d1_1_0:notes"/>
+          <p:cNvPr id="178" name="Google Shape;178;g3698b5456d1_1_0:notes"/>
           <p:cNvSpPr txBox="1"/>
           <p:nvPr>
             <p:ph idx="1" type="body"/>
@@ -1607,7 +1607,7 @@
   <p:cSld>
     <p:spTree>
       <p:nvGrpSpPr>
-        <p:cNvPr id="181" name="Shape 181"/>
+        <p:cNvPr id="182" name="Shape 182"/>
         <p:cNvGrpSpPr/>
         <p:nvPr/>
       </p:nvGrpSpPr>
@@ -1621,7 +1621,7 @@
       </p:grpSpPr>
       <p:sp>
         <p:nvSpPr>
-          <p:cNvPr id="182" name="Google Shape;182;g3698b5456d1_1_45:notes"/>
+          <p:cNvPr id="183" name="Google Shape;183;g3698b5456d1_1_45:notes"/>
           <p:cNvSpPr/>
           <p:nvPr>
             <p:ph idx="2" type="sldImg"/>
@@ -1656,7 +1656,7 @@
       </p:sp>
       <p:sp>
         <p:nvSpPr>
-          <p:cNvPr id="183" name="Google Shape;183;g3698b5456d1_1_45:notes"/>
+          <p:cNvPr id="184" name="Google Shape;184;g3698b5456d1_1_45:notes"/>
           <p:cNvSpPr txBox="1"/>
           <p:nvPr>
             <p:ph idx="1" type="body"/>
@@ -1704,6 +1704,13 @@
 <file path=ppt/slideLayouts/slideLayout1.xml><?xml version="1.0" encoding="utf-8"?>
 <p:sldLayout xmlns:a="http://schemas.openxmlformats.org/drawingml/2006/main" xmlns:r="http://schemas.openxmlformats.org/officeDocument/2006/relationships" xmlns:mc="http://schemas.openxmlformats.org/markup-compatibility/2006" xmlns:mv="urn:schemas-microsoft-com:mac:vml" xmlns:p="http://schemas.openxmlformats.org/presentationml/2006/main" xmlns:c="http://schemas.openxmlformats.org/drawingml/2006/chart" xmlns:dgm="http://schemas.openxmlformats.org/drawingml/2006/diagram" xmlns:o="urn:schemas-microsoft-com:office:office" xmlns:v="urn:schemas-microsoft-com:vml" xmlns:pvml="urn:schemas-microsoft-com:office:powerpoint" xmlns:com="http://schemas.openxmlformats.org/drawingml/2006/compatibility" xmlns:p14="http://schemas.microsoft.com/office/powerpoint/2010/main" xmlns:p15="http://schemas.microsoft.com/office/powerpoint/2012/main" xmlns:ahyp="http://schemas.microsoft.com/office/drawing/2018/hyperlinkcolor" matchingName="Title slide" type="title">
   <p:cSld name="TITLE">
+    <p:bg>
+      <p:bgPr>
+        <a:solidFill>
+          <a:srgbClr val="FAFAFA"/>
+        </a:solidFill>
+      </p:bgPr>
+    </p:bg>
     <p:spTree>
       <p:nvGrpSpPr>
         <p:cNvPr id="9" name="Shape 9"/>
@@ -1721,6 +1728,60 @@
       <p:sp>
         <p:nvSpPr>
           <p:cNvPr id="10" name="Google Shape;10;p2"/>
+          <p:cNvSpPr/>
+          <p:nvPr/>
+        </p:nvSpPr>
+        <p:spPr>
+          <a:xfrm>
+            <a:off x="0" y="-19750"/>
+            <a:ext cx="9144000" cy="2359500"/>
+          </a:xfrm>
+          <a:prstGeom prst="rect">
+            <a:avLst/>
+          </a:prstGeom>
+          <a:solidFill>
+            <a:srgbClr val="41973E"/>
+          </a:solidFill>
+          <a:ln cap="flat" cmpd="sng" w="9525">
+            <a:solidFill>
+              <a:schemeClr val="dk2"/>
+            </a:solidFill>
+            <a:prstDash val="solid"/>
+            <a:round/>
+            <a:headEnd len="sm" w="sm" type="none"/>
+            <a:tailEnd len="sm" w="sm" type="none"/>
+          </a:ln>
+        </p:spPr>
+        <p:txBody>
+          <a:bodyPr anchorCtr="0" anchor="ctr" bIns="91425" lIns="91425" spcFirstLastPara="1" rIns="91425" wrap="square" tIns="91425">
+            <a:noAutofit/>
+          </a:bodyPr>
+          <a:lstStyle/>
+          <a:p>
+            <a:pPr indent="0" lvl="0" marL="0" rtl="0" algn="ctr">
+              <a:spcBef>
+                <a:spcPts val="0"/>
+              </a:spcBef>
+              <a:spcAft>
+                <a:spcPts val="0"/>
+              </a:spcAft>
+              <a:buNone/>
+            </a:pPr>
+            <a:r>
+              <a:t/>
+            </a:r>
+            <a:endParaRPr>
+              <a:latin typeface="Lato"/>
+              <a:ea typeface="Lato"/>
+              <a:cs typeface="Lato"/>
+              <a:sym typeface="Lato"/>
+            </a:endParaRPr>
+          </a:p>
+        </p:txBody>
+      </p:sp>
+      <p:sp>
+        <p:nvSpPr>
+          <p:cNvPr id="11" name="Google Shape;11;p2"/>
           <p:cNvSpPr/>
           <p:nvPr/>
         </p:nvSpPr>
@@ -1765,208 +1826,9 @@
           </a:p>
         </p:txBody>
       </p:sp>
-      <p:grpSp>
-        <p:nvGrpSpPr>
-          <p:cNvPr id="11" name="Google Shape;11;p2"/>
-          <p:cNvGrpSpPr/>
-          <p:nvPr/>
-        </p:nvGrpSpPr>
-        <p:grpSpPr>
-          <a:xfrm>
-            <a:off x="0" y="490"/>
-            <a:ext cx="5153705" cy="5134399"/>
-            <a:chOff x="0" y="75"/>
-            <a:chExt cx="5153705" cy="5152950"/>
-          </a:xfrm>
-        </p:grpSpPr>
-        <p:sp>
-          <p:nvSpPr>
-            <p:cNvPr id="12" name="Google Shape;12;p2"/>
-            <p:cNvSpPr/>
-            <p:nvPr/>
-          </p:nvSpPr>
-          <p:spPr>
-            <a:xfrm rot="-5400000">
-              <a:off x="455" y="-225"/>
-              <a:ext cx="5152800" cy="5153700"/>
-            </a:xfrm>
-            <a:prstGeom prst="diagStripe">
-              <a:avLst>
-                <a:gd fmla="val 50000" name="adj"/>
-              </a:avLst>
-            </a:prstGeom>
-            <a:solidFill>
-              <a:schemeClr val="lt1">
-                <a:alpha val="3030"/>
-              </a:schemeClr>
-            </a:solidFill>
-            <a:ln>
-              <a:noFill/>
-            </a:ln>
-          </p:spPr>
-          <p:txBody>
-            <a:bodyPr anchorCtr="0" anchor="ctr" bIns="91425" lIns="91425" spcFirstLastPara="1" rIns="91425" wrap="square" tIns="91425">
-              <a:noAutofit/>
-            </a:bodyPr>
-            <a:lstStyle/>
-            <a:p>
-              <a:pPr indent="0" lvl="0" marL="0" rtl="0" algn="l">
-                <a:spcBef>
-                  <a:spcPts val="0"/>
-                </a:spcBef>
-                <a:spcAft>
-                  <a:spcPts val="0"/>
-                </a:spcAft>
-                <a:buNone/>
-              </a:pPr>
-              <a:r>
-                <a:t/>
-              </a:r>
-              <a:endParaRPr/>
-            </a:p>
-          </p:txBody>
-        </p:sp>
-        <p:sp>
-          <p:nvSpPr>
-            <p:cNvPr id="13" name="Google Shape;13;p2"/>
-            <p:cNvSpPr/>
-            <p:nvPr/>
-          </p:nvSpPr>
-          <p:spPr>
-            <a:xfrm rot="-5400000">
-              <a:off x="150" y="1145825"/>
-              <a:ext cx="3996600" cy="3996900"/>
-            </a:xfrm>
-            <a:prstGeom prst="diagStripe">
-              <a:avLst>
-                <a:gd fmla="val 58774" name="adj"/>
-              </a:avLst>
-            </a:prstGeom>
-            <a:solidFill>
-              <a:schemeClr val="lt1">
-                <a:alpha val="3030"/>
-              </a:schemeClr>
-            </a:solidFill>
-            <a:ln>
-              <a:noFill/>
-            </a:ln>
-          </p:spPr>
-          <p:txBody>
-            <a:bodyPr anchorCtr="0" anchor="ctr" bIns="91425" lIns="91425" spcFirstLastPara="1" rIns="91425" wrap="square" tIns="91425">
-              <a:noAutofit/>
-            </a:bodyPr>
-            <a:lstStyle/>
-            <a:p>
-              <a:pPr indent="0" lvl="0" marL="0" rtl="0" algn="l">
-                <a:spcBef>
-                  <a:spcPts val="0"/>
-                </a:spcBef>
-                <a:spcAft>
-                  <a:spcPts val="0"/>
-                </a:spcAft>
-                <a:buNone/>
-              </a:pPr>
-              <a:r>
-                <a:t/>
-              </a:r>
-              <a:endParaRPr/>
-            </a:p>
-          </p:txBody>
-        </p:sp>
-        <p:sp>
-          <p:nvSpPr>
-            <p:cNvPr id="14" name="Google Shape;14;p2"/>
-            <p:cNvSpPr/>
-            <p:nvPr/>
-          </p:nvSpPr>
-          <p:spPr>
-            <a:xfrm rot="-5400000">
-              <a:off x="1646" y="-75"/>
-              <a:ext cx="2299800" cy="2300100"/>
-            </a:xfrm>
-            <a:prstGeom prst="diagStripe">
-              <a:avLst>
-                <a:gd fmla="val 50000" name="adj"/>
-              </a:avLst>
-            </a:prstGeom>
-            <a:solidFill>
-              <a:schemeClr val="accent1"/>
-            </a:solidFill>
-            <a:ln>
-              <a:noFill/>
-            </a:ln>
-          </p:spPr>
-          <p:txBody>
-            <a:bodyPr anchorCtr="0" anchor="ctr" bIns="91425" lIns="91425" spcFirstLastPara="1" rIns="91425" wrap="square" tIns="91425">
-              <a:noAutofit/>
-            </a:bodyPr>
-            <a:lstStyle/>
-            <a:p>
-              <a:pPr indent="0" lvl="0" marL="0" rtl="0" algn="l">
-                <a:spcBef>
-                  <a:spcPts val="0"/>
-                </a:spcBef>
-                <a:spcAft>
-                  <a:spcPts val="0"/>
-                </a:spcAft>
-                <a:buNone/>
-              </a:pPr>
-              <a:r>
-                <a:t/>
-              </a:r>
-              <a:endParaRPr/>
-            </a:p>
-          </p:txBody>
-        </p:sp>
-        <p:sp>
-          <p:nvSpPr>
-            <p:cNvPr id="15" name="Google Shape;15;p2"/>
-            <p:cNvSpPr/>
-            <p:nvPr/>
-          </p:nvSpPr>
-          <p:spPr>
-            <a:xfrm flipH="1">
-              <a:off x="652821" y="590035"/>
-              <a:ext cx="2300100" cy="2299800"/>
-            </a:xfrm>
-            <a:prstGeom prst="diagStripe">
-              <a:avLst>
-                <a:gd fmla="val 50000" name="adj"/>
-              </a:avLst>
-            </a:prstGeom>
-            <a:solidFill>
-              <a:schemeClr val="lt2"/>
-            </a:solidFill>
-            <a:ln>
-              <a:noFill/>
-            </a:ln>
-          </p:spPr>
-          <p:txBody>
-            <a:bodyPr anchorCtr="0" anchor="ctr" bIns="91425" lIns="91425" spcFirstLastPara="1" rIns="91425" wrap="square" tIns="91425">
-              <a:noAutofit/>
-            </a:bodyPr>
-            <a:lstStyle/>
-            <a:p>
-              <a:pPr indent="0" lvl="0" marL="0" rtl="0" algn="l">
-                <a:spcBef>
-                  <a:spcPts val="0"/>
-                </a:spcBef>
-                <a:spcAft>
-                  <a:spcPts val="0"/>
-                </a:spcAft>
-                <a:buNone/>
-              </a:pPr>
-              <a:r>
-                <a:t/>
-              </a:r>
-              <a:endParaRPr/>
-            </a:p>
-          </p:txBody>
-        </p:sp>
-      </p:grpSp>
       <p:sp>
         <p:nvSpPr>
-          <p:cNvPr id="16" name="Google Shape;16;p2"/>
+          <p:cNvPr id="12" name="Google Shape;12;p2"/>
           <p:cNvSpPr txBox="1"/>
           <p:nvPr>
             <p:ph type="ctrTitle"/>
@@ -1974,8 +1836,8 @@
         </p:nvSpPr>
         <p:spPr>
           <a:xfrm>
-            <a:off x="3537150" y="1578400"/>
-            <a:ext cx="5017500" cy="1578900"/>
+            <a:off x="1912863" y="2319488"/>
+            <a:ext cx="5017500" cy="1578600"/>
           </a:xfrm>
           <a:prstGeom prst="rect">
             <a:avLst/>
@@ -1993,9 +1855,16 @@
               <a:spcAft>
                 <a:spcPts val="0"/>
               </a:spcAft>
+              <a:buClr>
+                <a:srgbClr val="41973E"/>
+              </a:buClr>
               <a:buSzPts val="4000"/>
               <a:buNone/>
-              <a:defRPr sz="4000"/>
+              <a:defRPr sz="4000">
+                <a:solidFill>
+                  <a:srgbClr val="41973E"/>
+                </a:solidFill>
+              </a:defRPr>
             </a:lvl1pPr>
             <a:lvl2pPr lvl="1">
               <a:spcBef>
@@ -2091,7 +1960,7 @@
       </p:sp>
       <p:sp>
         <p:nvSpPr>
-          <p:cNvPr id="17" name="Google Shape;17;p2"/>
+          <p:cNvPr id="13" name="Google Shape;13;p2"/>
           <p:cNvSpPr txBox="1"/>
           <p:nvPr>
             <p:ph idx="1" type="subTitle"/>
@@ -2099,7 +1968,7 @@
         </p:nvSpPr>
         <p:spPr>
           <a:xfrm>
-            <a:off x="5083950" y="3924925"/>
+            <a:off x="4029600" y="4157125"/>
             <a:ext cx="3470700" cy="506100"/>
           </a:xfrm>
           <a:prstGeom prst="rect">
@@ -2121,9 +1990,16 @@
               <a:spcAft>
                 <a:spcPts val="0"/>
               </a:spcAft>
+              <a:buClr>
+                <a:srgbClr val="41973E"/>
+              </a:buClr>
               <a:buSzPts val="1300"/>
               <a:buNone/>
-              <a:defRPr/>
+              <a:defRPr>
+                <a:solidFill>
+                  <a:srgbClr val="41973E"/>
+                </a:solidFill>
+              </a:defRPr>
             </a:lvl1pPr>
             <a:lvl2pPr lvl="1">
               <a:lnSpc>
@@ -2241,9 +2117,39 @@
           <a:p/>
         </p:txBody>
       </p:sp>
+      <p:pic>
+        <p:nvPicPr>
+          <p:cNvPr id="14" name="Google Shape;14;p2"/>
+          <p:cNvPicPr preferRelativeResize="0"/>
+          <p:nvPr/>
+        </p:nvPicPr>
+        <p:blipFill>
+          <a:blip r:embed="rId2">
+            <a:alphaModFix/>
+          </a:blip>
+          <a:stretch>
+            <a:fillRect/>
+          </a:stretch>
+        </p:blipFill>
+        <p:spPr>
+          <a:xfrm>
+            <a:off x="3248835" y="500"/>
+            <a:ext cx="2345578" cy="2318999"/>
+          </a:xfrm>
+          <a:prstGeom prst="rect">
+            <a:avLst/>
+          </a:prstGeom>
+          <a:solidFill>
+            <a:srgbClr val="41973E"/>
+          </a:solidFill>
+          <a:ln>
+            <a:noFill/>
+          </a:ln>
+        </p:spPr>
+      </p:pic>
       <p:sp>
         <p:nvSpPr>
-          <p:cNvPr id="18" name="Google Shape;18;p2"/>
+          <p:cNvPr id="15" name="Google Shape;15;p2"/>
           <p:cNvSpPr txBox="1"/>
           <p:nvPr>
             <p:ph idx="12" type="sldNum"/>
@@ -2331,7 +2237,7 @@
   <p:cSld name="BIG_NUMBER">
     <p:spTree>
       <p:nvGrpSpPr>
-        <p:cNvPr id="105" name="Shape 105"/>
+        <p:cNvPr id="106" name="Shape 106"/>
         <p:cNvGrpSpPr/>
         <p:nvPr/>
       </p:nvGrpSpPr>
@@ -2345,7 +2251,7 @@
       </p:grpSpPr>
       <p:grpSp>
         <p:nvGrpSpPr>
-          <p:cNvPr id="106" name="Google Shape;106;p11"/>
+          <p:cNvPr id="107" name="Google Shape;107;p11"/>
           <p:cNvGrpSpPr/>
           <p:nvPr/>
         </p:nvGrpSpPr>
@@ -2359,7 +2265,7 @@
         </p:grpSpPr>
         <p:sp>
           <p:nvSpPr>
-            <p:cNvPr id="107" name="Google Shape;107;p11"/>
+            <p:cNvPr id="108" name="Google Shape;108;p11"/>
             <p:cNvSpPr/>
             <p:nvPr/>
           </p:nvSpPr>
@@ -2406,7 +2312,7 @@
         </p:sp>
         <p:sp>
           <p:nvSpPr>
-            <p:cNvPr id="108" name="Google Shape;108;p11"/>
+            <p:cNvPr id="109" name="Google Shape;109;p11"/>
             <p:cNvSpPr/>
             <p:nvPr/>
           </p:nvSpPr>
@@ -2453,7 +2359,7 @@
         </p:sp>
         <p:sp>
           <p:nvSpPr>
-            <p:cNvPr id="109" name="Google Shape;109;p11"/>
+            <p:cNvPr id="110" name="Google Shape;110;p11"/>
             <p:cNvSpPr/>
             <p:nvPr/>
           </p:nvSpPr>
@@ -2500,7 +2406,7 @@
         </p:sp>
         <p:sp>
           <p:nvSpPr>
-            <p:cNvPr id="110" name="Google Shape;110;p11"/>
+            <p:cNvPr id="111" name="Google Shape;111;p11"/>
             <p:cNvSpPr/>
             <p:nvPr/>
           </p:nvSpPr>
@@ -2547,7 +2453,7 @@
         </p:sp>
         <p:sp>
           <p:nvSpPr>
-            <p:cNvPr id="111" name="Google Shape;111;p11"/>
+            <p:cNvPr id="112" name="Google Shape;112;p11"/>
             <p:cNvSpPr/>
             <p:nvPr/>
           </p:nvSpPr>
@@ -2594,7 +2500,7 @@
         </p:sp>
         <p:sp>
           <p:nvSpPr>
-            <p:cNvPr id="112" name="Google Shape;112;p11"/>
+            <p:cNvPr id="113" name="Google Shape;113;p11"/>
             <p:cNvSpPr/>
             <p:nvPr/>
           </p:nvSpPr>
@@ -2641,7 +2547,7 @@
         </p:sp>
         <p:sp>
           <p:nvSpPr>
-            <p:cNvPr id="113" name="Google Shape;113;p11"/>
+            <p:cNvPr id="114" name="Google Shape;114;p11"/>
             <p:cNvSpPr/>
             <p:nvPr/>
           </p:nvSpPr>
@@ -2688,7 +2594,7 @@
         </p:sp>
         <p:sp>
           <p:nvSpPr>
-            <p:cNvPr id="114" name="Google Shape;114;p11"/>
+            <p:cNvPr id="115" name="Google Shape;115;p11"/>
             <p:cNvSpPr/>
             <p:nvPr/>
           </p:nvSpPr>
@@ -2703,7 +2609,7 @@
               </a:avLst>
             </a:prstGeom>
             <a:solidFill>
-              <a:schemeClr val="lt2"/>
+              <a:srgbClr val="93C47D"/>
             </a:solidFill>
             <a:ln>
               <a:noFill/>
@@ -2733,7 +2639,7 @@
         </p:sp>
         <p:sp>
           <p:nvSpPr>
-            <p:cNvPr id="115" name="Google Shape;115;p11"/>
+            <p:cNvPr id="116" name="Google Shape;116;p11"/>
             <p:cNvSpPr/>
             <p:nvPr/>
           </p:nvSpPr>
@@ -2780,7 +2686,7 @@
         </p:sp>
         <p:sp>
           <p:nvSpPr>
-            <p:cNvPr id="116" name="Google Shape;116;p11"/>
+            <p:cNvPr id="117" name="Google Shape;117;p11"/>
             <p:cNvSpPr/>
             <p:nvPr/>
           </p:nvSpPr>
@@ -2827,7 +2733,7 @@
         </p:sp>
         <p:sp>
           <p:nvSpPr>
-            <p:cNvPr id="117" name="Google Shape;117;p11"/>
+            <p:cNvPr id="118" name="Google Shape;118;p11"/>
             <p:cNvSpPr/>
             <p:nvPr/>
           </p:nvSpPr>
@@ -2874,7 +2780,7 @@
         </p:sp>
         <p:sp>
           <p:nvSpPr>
-            <p:cNvPr id="118" name="Google Shape;118;p11"/>
+            <p:cNvPr id="119" name="Google Shape;119;p11"/>
             <p:cNvSpPr/>
             <p:nvPr/>
           </p:nvSpPr>
@@ -2921,7 +2827,7 @@
         </p:sp>
         <p:sp>
           <p:nvSpPr>
-            <p:cNvPr id="119" name="Google Shape;119;p11"/>
+            <p:cNvPr id="120" name="Google Shape;120;p11"/>
             <p:cNvSpPr/>
             <p:nvPr/>
           </p:nvSpPr>
@@ -2968,7 +2874,7 @@
         </p:sp>
         <p:sp>
           <p:nvSpPr>
-            <p:cNvPr id="120" name="Google Shape;120;p11"/>
+            <p:cNvPr id="121" name="Google Shape;121;p11"/>
             <p:cNvSpPr/>
             <p:nvPr/>
           </p:nvSpPr>
@@ -2983,7 +2889,7 @@
               </a:avLst>
             </a:prstGeom>
             <a:solidFill>
-              <a:schemeClr val="accent1"/>
+              <a:srgbClr val="41973E"/>
             </a:solidFill>
             <a:ln>
               <a:noFill/>
@@ -3013,7 +2919,7 @@
         </p:sp>
         <p:sp>
           <p:nvSpPr>
-            <p:cNvPr id="121" name="Google Shape;121;p11"/>
+            <p:cNvPr id="122" name="Google Shape;122;p11"/>
             <p:cNvSpPr/>
             <p:nvPr/>
           </p:nvSpPr>
@@ -3060,7 +2966,7 @@
         </p:sp>
         <p:sp>
           <p:nvSpPr>
-            <p:cNvPr id="122" name="Google Shape;122;p11"/>
+            <p:cNvPr id="123" name="Google Shape;123;p11"/>
             <p:cNvSpPr/>
             <p:nvPr/>
           </p:nvSpPr>
@@ -3107,7 +3013,7 @@
         </p:sp>
         <p:sp>
           <p:nvSpPr>
-            <p:cNvPr id="123" name="Google Shape;123;p11"/>
+            <p:cNvPr id="124" name="Google Shape;124;p11"/>
             <p:cNvSpPr/>
             <p:nvPr/>
           </p:nvSpPr>
@@ -3154,7 +3060,7 @@
         </p:sp>
         <p:sp>
           <p:nvSpPr>
-            <p:cNvPr id="124" name="Google Shape;124;p11"/>
+            <p:cNvPr id="125" name="Google Shape;125;p11"/>
             <p:cNvSpPr/>
             <p:nvPr/>
           </p:nvSpPr>
@@ -3202,7 +3108,7 @@
       </p:grpSp>
       <p:sp>
         <p:nvSpPr>
-          <p:cNvPr id="125" name="Google Shape;125;p11"/>
+          <p:cNvPr id="126" name="Google Shape;126;p11"/>
           <p:cNvSpPr txBox="1"/>
           <p:nvPr>
             <p:ph hasCustomPrompt="1" type="title"/>
@@ -3331,7 +3237,7 @@
       </p:sp>
       <p:sp>
         <p:nvSpPr>
-          <p:cNvPr id="126" name="Google Shape;126;p11"/>
+          <p:cNvPr id="127" name="Google Shape;127;p11"/>
           <p:cNvSpPr txBox="1"/>
           <p:nvPr>
             <p:ph idx="1" type="body"/>
@@ -3456,7 +3362,7 @@
       </p:sp>
       <p:sp>
         <p:nvSpPr>
-          <p:cNvPr id="127" name="Google Shape;127;p11"/>
+          <p:cNvPr id="128" name="Google Shape;128;p11"/>
           <p:cNvSpPr txBox="1"/>
           <p:nvPr>
             <p:ph idx="12" type="sldNum"/>
@@ -3544,7 +3450,7 @@
   <p:cSld name="BLANK">
     <p:spTree>
       <p:nvGrpSpPr>
-        <p:cNvPr id="128" name="Shape 128"/>
+        <p:cNvPr id="129" name="Shape 129"/>
         <p:cNvGrpSpPr/>
         <p:nvPr/>
       </p:nvGrpSpPr>
@@ -3558,7 +3464,7 @@
       </p:grpSpPr>
       <p:sp>
         <p:nvSpPr>
-          <p:cNvPr id="129" name="Google Shape;129;p12"/>
+          <p:cNvPr id="130" name="Google Shape;130;p12"/>
           <p:cNvSpPr txBox="1"/>
           <p:nvPr>
             <p:ph idx="12" type="sldNum"/>
@@ -3644,9 +3550,16 @@
 <file path=ppt/slideLayouts/slideLayout2.xml><?xml version="1.0" encoding="utf-8"?>
 <p:sldLayout xmlns:a="http://schemas.openxmlformats.org/drawingml/2006/main" xmlns:r="http://schemas.openxmlformats.org/officeDocument/2006/relationships" xmlns:mc="http://schemas.openxmlformats.org/markup-compatibility/2006" xmlns:mv="urn:schemas-microsoft-com:mac:vml" xmlns:p="http://schemas.openxmlformats.org/presentationml/2006/main" xmlns:c="http://schemas.openxmlformats.org/drawingml/2006/chart" xmlns:dgm="http://schemas.openxmlformats.org/drawingml/2006/diagram" xmlns:o="urn:schemas-microsoft-com:office:office" xmlns:v="urn:schemas-microsoft-com:vml" xmlns:pvml="urn:schemas-microsoft-com:office:powerpoint" xmlns:com="http://schemas.openxmlformats.org/drawingml/2006/compatibility" xmlns:p14="http://schemas.microsoft.com/office/powerpoint/2010/main" xmlns:p15="http://schemas.microsoft.com/office/powerpoint/2012/main" xmlns:ahyp="http://schemas.microsoft.com/office/drawing/2018/hyperlinkcolor" matchingName="Section header" type="secHead">
   <p:cSld name="SECTION_HEADER">
+    <p:bg>
+      <p:bgPr>
+        <a:solidFill>
+          <a:schemeClr val="lt1"/>
+        </a:solidFill>
+      </p:bgPr>
+    </p:bg>
     <p:spTree>
       <p:nvGrpSpPr>
-        <p:cNvPr id="19" name="Shape 19"/>
+        <p:cNvPr id="16" name="Shape 16"/>
         <p:cNvGrpSpPr/>
         <p:nvPr/>
       </p:nvGrpSpPr>
@@ -3660,7 +3573,7 @@
       </p:grpSpPr>
       <p:grpSp>
         <p:nvGrpSpPr>
-          <p:cNvPr id="20" name="Google Shape;20;p3"/>
+          <p:cNvPr id="17" name="Google Shape;17;p3"/>
           <p:cNvGrpSpPr/>
           <p:nvPr/>
         </p:nvGrpSpPr>
@@ -3674,7 +3587,7 @@
         </p:grpSpPr>
         <p:sp>
           <p:nvSpPr>
-            <p:cNvPr id="21" name="Google Shape;21;p3"/>
+            <p:cNvPr id="18" name="Google Shape;18;p3"/>
             <p:cNvSpPr/>
             <p:nvPr/>
           </p:nvSpPr>
@@ -3689,9 +3602,142 @@
               </a:avLst>
             </a:prstGeom>
             <a:solidFill>
-              <a:schemeClr val="lt1">
-                <a:alpha val="3460"/>
-              </a:schemeClr>
+              <a:srgbClr val="41973E"/>
+            </a:solidFill>
+            <a:ln>
+              <a:noFill/>
+            </a:ln>
+          </p:spPr>
+          <p:txBody>
+            <a:bodyPr anchorCtr="0" anchor="ctr" bIns="91425" lIns="91425" spcFirstLastPara="1" rIns="91425" wrap="square" tIns="91425">
+              <a:noAutofit/>
+            </a:bodyPr>
+            <a:lstStyle/>
+            <a:p>
+              <a:pPr indent="0" lvl="0" marL="0" rtl="0" algn="l">
+                <a:spcBef>
+                  <a:spcPts val="0"/>
+                </a:spcBef>
+                <a:spcAft>
+                  <a:spcPts val="0"/>
+                </a:spcAft>
+                <a:buNone/>
+              </a:pPr>
+              <a:r>
+                <a:t/>
+              </a:r>
+              <a:endParaRPr/>
+            </a:p>
+          </p:txBody>
+        </p:sp>
+        <p:sp>
+          <p:nvSpPr>
+            <p:cNvPr id="19" name="Google Shape;19;p3"/>
+            <p:cNvSpPr/>
+            <p:nvPr/>
+          </p:nvSpPr>
+          <p:spPr>
+            <a:xfrm rot="5400000">
+              <a:off x="4841125" y="5700"/>
+              <a:ext cx="4298100" cy="4286700"/>
+            </a:xfrm>
+            <a:prstGeom prst="diagStripe">
+              <a:avLst>
+                <a:gd fmla="val 0" name="adj"/>
+              </a:avLst>
+            </a:prstGeom>
+            <a:solidFill>
+              <a:srgbClr val="41973E"/>
+            </a:solidFill>
+            <a:ln>
+              <a:noFill/>
+            </a:ln>
+          </p:spPr>
+          <p:txBody>
+            <a:bodyPr anchorCtr="0" anchor="ctr" bIns="91425" lIns="91425" spcFirstLastPara="1" rIns="91425" wrap="square" tIns="91425">
+              <a:noAutofit/>
+            </a:bodyPr>
+            <a:lstStyle/>
+            <a:p>
+              <a:pPr indent="0" lvl="0" marL="0" rtl="0" algn="l">
+                <a:spcBef>
+                  <a:spcPts val="0"/>
+                </a:spcBef>
+                <a:spcAft>
+                  <a:spcPts val="0"/>
+                </a:spcAft>
+                <a:buNone/>
+              </a:pPr>
+              <a:r>
+                <a:t/>
+              </a:r>
+              <a:endParaRPr/>
+            </a:p>
+          </p:txBody>
+        </p:sp>
+        <p:sp>
+          <p:nvSpPr>
+            <p:cNvPr id="20" name="Google Shape;20;p3"/>
+            <p:cNvSpPr/>
+            <p:nvPr/>
+          </p:nvSpPr>
+          <p:spPr>
+            <a:xfrm rot="-5400000">
+              <a:off x="5618399" y="1236468"/>
+              <a:ext cx="808800" cy="808800"/>
+            </a:xfrm>
+            <a:prstGeom prst="diagStripe">
+              <a:avLst>
+                <a:gd fmla="val 50000" name="adj"/>
+              </a:avLst>
+            </a:prstGeom>
+            <a:solidFill>
+              <a:srgbClr val="41973E"/>
+            </a:solidFill>
+            <a:ln>
+              <a:noFill/>
+            </a:ln>
+          </p:spPr>
+          <p:txBody>
+            <a:bodyPr anchorCtr="0" anchor="ctr" bIns="91425" lIns="91425" spcFirstLastPara="1" rIns="91425" wrap="square" tIns="91425">
+              <a:noAutofit/>
+            </a:bodyPr>
+            <a:lstStyle/>
+            <a:p>
+              <a:pPr indent="0" lvl="0" marL="0" rtl="0" algn="l">
+                <a:spcBef>
+                  <a:spcPts val="0"/>
+                </a:spcBef>
+                <a:spcAft>
+                  <a:spcPts val="0"/>
+                </a:spcAft>
+                <a:buNone/>
+              </a:pPr>
+              <a:r>
+                <a:t/>
+              </a:r>
+              <a:endParaRPr/>
+            </a:p>
+          </p:txBody>
+        </p:sp>
+        <p:sp>
+          <p:nvSpPr>
+            <p:cNvPr id="21" name="Google Shape;21;p3"/>
+            <p:cNvSpPr/>
+            <p:nvPr/>
+          </p:nvSpPr>
+          <p:spPr>
+            <a:xfrm flipH="1">
+              <a:off x="5849857" y="1443956"/>
+              <a:ext cx="808800" cy="808800"/>
+            </a:xfrm>
+            <a:prstGeom prst="diagStripe">
+              <a:avLst>
+                <a:gd fmla="val 50000" name="adj"/>
+              </a:avLst>
+            </a:prstGeom>
+            <a:solidFill>
+              <a:srgbClr val="41973E"/>
             </a:solidFill>
             <a:ln>
               <a:noFill/>
@@ -3726,19 +3772,17 @@
             <p:nvPr/>
           </p:nvSpPr>
           <p:spPr>
-            <a:xfrm rot="5400000">
-              <a:off x="4841125" y="5700"/>
-              <a:ext cx="4298100" cy="4286700"/>
+            <a:xfrm rot="-5400000">
+              <a:off x="5987081" y="2469465"/>
+              <a:ext cx="808800" cy="808800"/>
             </a:xfrm>
             <a:prstGeom prst="diagStripe">
               <a:avLst>
-                <a:gd fmla="val 0" name="adj"/>
+                <a:gd fmla="val 50000" name="adj"/>
               </a:avLst>
             </a:prstGeom>
             <a:solidFill>
-              <a:schemeClr val="lt1">
-                <a:alpha val="3460"/>
-              </a:schemeClr>
+              <a:srgbClr val="93C47D"/>
             </a:solidFill>
             <a:ln>
               <a:noFill/>
@@ -3773,8 +3817,8 @@
             <p:nvPr/>
           </p:nvSpPr>
           <p:spPr>
-            <a:xfrm rot="-5400000">
-              <a:off x="5618399" y="1236468"/>
+            <a:xfrm flipH="1">
+              <a:off x="6222115" y="2676953"/>
               <a:ext cx="808800" cy="808800"/>
             </a:xfrm>
             <a:prstGeom prst="diagStripe">
@@ -3783,9 +3827,7 @@
               </a:avLst>
             </a:prstGeom>
             <a:solidFill>
-              <a:schemeClr val="lt1">
-                <a:alpha val="7310"/>
-              </a:schemeClr>
+              <a:srgbClr val="41973E"/>
             </a:solidFill>
             <a:ln>
               <a:noFill/>
@@ -3820,8 +3862,8 @@
             <p:nvPr/>
           </p:nvSpPr>
           <p:spPr>
-            <a:xfrm flipH="1">
-              <a:off x="5849857" y="1443956"/>
+            <a:xfrm rot="-5400000">
+              <a:off x="6675341" y="1862018"/>
               <a:ext cx="808800" cy="808800"/>
             </a:xfrm>
             <a:prstGeom prst="diagStripe">
@@ -3830,9 +3872,7 @@
               </a:avLst>
             </a:prstGeom>
             <a:solidFill>
-              <a:schemeClr val="lt1">
-                <a:alpha val="7310"/>
-              </a:schemeClr>
+              <a:srgbClr val="41973E"/>
             </a:solidFill>
             <a:ln>
               <a:noFill/>
@@ -3867,8 +3907,8 @@
             <p:nvPr/>
           </p:nvSpPr>
           <p:spPr>
-            <a:xfrm rot="-5400000">
-              <a:off x="5987081" y="2469465"/>
+            <a:xfrm flipH="1">
+              <a:off x="6908099" y="2069505"/>
               <a:ext cx="808800" cy="808800"/>
             </a:xfrm>
             <a:prstGeom prst="diagStripe">
@@ -3877,9 +3917,7 @@
               </a:avLst>
             </a:prstGeom>
             <a:solidFill>
-              <a:schemeClr val="lt1">
-                <a:alpha val="7310"/>
-              </a:schemeClr>
+              <a:srgbClr val="41973E"/>
             </a:solidFill>
             <a:ln>
               <a:noFill/>
@@ -3914,8 +3952,8 @@
             <p:nvPr/>
           </p:nvSpPr>
           <p:spPr>
-            <a:xfrm flipH="1">
-              <a:off x="6222115" y="2676953"/>
+            <a:xfrm rot="-5400000">
+              <a:off x="6861141" y="2477810"/>
               <a:ext cx="808800" cy="808800"/>
             </a:xfrm>
             <a:prstGeom prst="diagStripe">
@@ -3924,9 +3962,7 @@
               </a:avLst>
             </a:prstGeom>
             <a:solidFill>
-              <a:schemeClr val="lt1">
-                <a:alpha val="7310"/>
-              </a:schemeClr>
+              <a:srgbClr val="93C47D"/>
             </a:solidFill>
             <a:ln>
               <a:noFill/>
@@ -3961,8 +3997,8 @@
             <p:nvPr/>
           </p:nvSpPr>
           <p:spPr>
-            <a:xfrm rot="-5400000">
-              <a:off x="6675341" y="1862018"/>
+            <a:xfrm flipH="1">
+              <a:off x="7965266" y="2692963"/>
               <a:ext cx="808800" cy="808800"/>
             </a:xfrm>
             <a:prstGeom prst="diagStripe">
@@ -3971,9 +4007,7 @@
               </a:avLst>
             </a:prstGeom>
             <a:solidFill>
-              <a:schemeClr val="lt1">
-                <a:alpha val="7310"/>
-              </a:schemeClr>
+              <a:srgbClr val="41973E"/>
             </a:solidFill>
             <a:ln>
               <a:noFill/>
@@ -4009,7 +4043,7 @@
           </p:nvSpPr>
           <p:spPr>
             <a:xfrm flipH="1">
-              <a:off x="6908099" y="2069505"/>
+              <a:off x="8145082" y="3308755"/>
               <a:ext cx="808800" cy="808800"/>
             </a:xfrm>
             <a:prstGeom prst="diagStripe">
@@ -4018,7 +4052,7 @@
               </a:avLst>
             </a:prstGeom>
             <a:solidFill>
-              <a:schemeClr val="lt2"/>
+              <a:srgbClr val="41973E"/>
             </a:solidFill>
             <a:ln>
               <a:noFill/>
@@ -4054,7 +4088,7 @@
           </p:nvSpPr>
           <p:spPr>
             <a:xfrm rot="-5400000">
-              <a:off x="6861141" y="2477810"/>
+              <a:off x="7047599" y="3095015"/>
               <a:ext cx="808800" cy="808800"/>
             </a:xfrm>
             <a:prstGeom prst="diagStripe">
@@ -4063,9 +4097,7 @@
               </a:avLst>
             </a:prstGeom>
             <a:solidFill>
-              <a:schemeClr val="lt1">
-                <a:alpha val="7310"/>
-              </a:schemeClr>
+              <a:srgbClr val="93C47D"/>
             </a:solidFill>
             <a:ln>
               <a:noFill/>
@@ -4101,7 +4133,7 @@
           </p:nvSpPr>
           <p:spPr>
             <a:xfrm flipH="1">
-              <a:off x="7965266" y="2692963"/>
+              <a:off x="7276649" y="3302502"/>
               <a:ext cx="808800" cy="808800"/>
             </a:xfrm>
             <a:prstGeom prst="diagStripe">
@@ -4110,9 +4142,7 @@
               </a:avLst>
             </a:prstGeom>
             <a:solidFill>
-              <a:schemeClr val="lt1">
-                <a:alpha val="7310"/>
-              </a:schemeClr>
+              <a:srgbClr val="41973E"/>
             </a:solidFill>
             <a:ln>
               <a:noFill/>
@@ -4147,8 +4177,8 @@
             <p:nvPr/>
           </p:nvSpPr>
           <p:spPr>
-            <a:xfrm flipH="1">
-              <a:off x="8145082" y="3308755"/>
+            <a:xfrm rot="-5400000">
+              <a:off x="7227414" y="3710807"/>
               <a:ext cx="808800" cy="808800"/>
             </a:xfrm>
             <a:prstGeom prst="diagStripe">
@@ -4157,9 +4187,7 @@
               </a:avLst>
             </a:prstGeom>
             <a:solidFill>
-              <a:schemeClr val="lt1">
-                <a:alpha val="7310"/>
-              </a:schemeClr>
+              <a:srgbClr val="41973E"/>
             </a:solidFill>
             <a:ln>
               <a:noFill/>
@@ -4194,8 +4222,8 @@
             <p:nvPr/>
           </p:nvSpPr>
           <p:spPr>
-            <a:xfrm rot="-5400000">
-              <a:off x="7047599" y="3095015"/>
+            <a:xfrm flipH="1">
+              <a:off x="7462448" y="3918294"/>
               <a:ext cx="808800" cy="808800"/>
             </a:xfrm>
             <a:prstGeom prst="diagStripe">
@@ -4204,9 +4232,7 @@
               </a:avLst>
             </a:prstGeom>
             <a:solidFill>
-              <a:schemeClr val="lt1">
-                <a:alpha val="7310"/>
-              </a:schemeClr>
+              <a:srgbClr val="41973E"/>
             </a:solidFill>
             <a:ln>
               <a:noFill/>
@@ -4241,8 +4267,8 @@
             <p:nvPr/>
           </p:nvSpPr>
           <p:spPr>
-            <a:xfrm flipH="1">
-              <a:off x="7276649" y="3302502"/>
+            <a:xfrm rot="-5400000">
+              <a:off x="8102491" y="3718473"/>
               <a:ext cx="808800" cy="808800"/>
             </a:xfrm>
             <a:prstGeom prst="diagStripe">
@@ -4251,9 +4277,7 @@
               </a:avLst>
             </a:prstGeom>
             <a:solidFill>
-              <a:schemeClr val="lt1">
-                <a:alpha val="7310"/>
-              </a:schemeClr>
+              <a:srgbClr val="93C47D"/>
             </a:solidFill>
             <a:ln>
               <a:noFill/>
@@ -4288,8 +4312,8 @@
             <p:nvPr/>
           </p:nvSpPr>
           <p:spPr>
-            <a:xfrm rot="-5400000">
-              <a:off x="7227414" y="3710807"/>
+            <a:xfrm flipH="1">
+              <a:off x="8334533" y="3925960"/>
               <a:ext cx="808800" cy="808800"/>
             </a:xfrm>
             <a:prstGeom prst="diagStripe">
@@ -4298,7 +4322,7 @@
               </a:avLst>
             </a:prstGeom>
             <a:solidFill>
-              <a:schemeClr val="accent1"/>
+              <a:srgbClr val="41973E"/>
             </a:solidFill>
             <a:ln>
               <a:noFill/>
@@ -4333,8 +4357,8 @@
             <p:nvPr/>
           </p:nvSpPr>
           <p:spPr>
-            <a:xfrm flipH="1">
-              <a:off x="7462448" y="3918294"/>
+            <a:xfrm rot="-5400000">
+              <a:off x="8288290" y="4334265"/>
               <a:ext cx="808800" cy="808800"/>
             </a:xfrm>
             <a:prstGeom prst="diagStripe">
@@ -4343,9 +4367,7 @@
               </a:avLst>
             </a:prstGeom>
             <a:solidFill>
-              <a:schemeClr val="lt1">
-                <a:alpha val="7310"/>
-              </a:schemeClr>
+              <a:srgbClr val="41973E"/>
             </a:solidFill>
             <a:ln>
               <a:noFill/>
@@ -4373,151 +4395,10 @@
             </a:p>
           </p:txBody>
         </p:sp>
-        <p:sp>
-          <p:nvSpPr>
-            <p:cNvPr id="36" name="Google Shape;36;p3"/>
-            <p:cNvSpPr/>
-            <p:nvPr/>
-          </p:nvSpPr>
-          <p:spPr>
-            <a:xfrm rot="-5400000">
-              <a:off x="8102491" y="3718473"/>
-              <a:ext cx="808800" cy="808800"/>
-            </a:xfrm>
-            <a:prstGeom prst="diagStripe">
-              <a:avLst>
-                <a:gd fmla="val 50000" name="adj"/>
-              </a:avLst>
-            </a:prstGeom>
-            <a:solidFill>
-              <a:schemeClr val="lt1">
-                <a:alpha val="7310"/>
-              </a:schemeClr>
-            </a:solidFill>
-            <a:ln>
-              <a:noFill/>
-            </a:ln>
-          </p:spPr>
-          <p:txBody>
-            <a:bodyPr anchorCtr="0" anchor="ctr" bIns="91425" lIns="91425" spcFirstLastPara="1" rIns="91425" wrap="square" tIns="91425">
-              <a:noAutofit/>
-            </a:bodyPr>
-            <a:lstStyle/>
-            <a:p>
-              <a:pPr indent="0" lvl="0" marL="0" rtl="0" algn="l">
-                <a:spcBef>
-                  <a:spcPts val="0"/>
-                </a:spcBef>
-                <a:spcAft>
-                  <a:spcPts val="0"/>
-                </a:spcAft>
-                <a:buNone/>
-              </a:pPr>
-              <a:r>
-                <a:t/>
-              </a:r>
-              <a:endParaRPr/>
-            </a:p>
-          </p:txBody>
-        </p:sp>
-        <p:sp>
-          <p:nvSpPr>
-            <p:cNvPr id="37" name="Google Shape;37;p3"/>
-            <p:cNvSpPr/>
-            <p:nvPr/>
-          </p:nvSpPr>
-          <p:spPr>
-            <a:xfrm flipH="1">
-              <a:off x="8334533" y="3925960"/>
-              <a:ext cx="808800" cy="808800"/>
-            </a:xfrm>
-            <a:prstGeom prst="diagStripe">
-              <a:avLst>
-                <a:gd fmla="val 50000" name="adj"/>
-              </a:avLst>
-            </a:prstGeom>
-            <a:solidFill>
-              <a:schemeClr val="lt1">
-                <a:alpha val="7310"/>
-              </a:schemeClr>
-            </a:solidFill>
-            <a:ln>
-              <a:noFill/>
-            </a:ln>
-          </p:spPr>
-          <p:txBody>
-            <a:bodyPr anchorCtr="0" anchor="ctr" bIns="91425" lIns="91425" spcFirstLastPara="1" rIns="91425" wrap="square" tIns="91425">
-              <a:noAutofit/>
-            </a:bodyPr>
-            <a:lstStyle/>
-            <a:p>
-              <a:pPr indent="0" lvl="0" marL="0" rtl="0" algn="l">
-                <a:spcBef>
-                  <a:spcPts val="0"/>
-                </a:spcBef>
-                <a:spcAft>
-                  <a:spcPts val="0"/>
-                </a:spcAft>
-                <a:buNone/>
-              </a:pPr>
-              <a:r>
-                <a:t/>
-              </a:r>
-              <a:endParaRPr/>
-            </a:p>
-          </p:txBody>
-        </p:sp>
-        <p:sp>
-          <p:nvSpPr>
-            <p:cNvPr id="38" name="Google Shape;38;p3"/>
-            <p:cNvSpPr/>
-            <p:nvPr/>
-          </p:nvSpPr>
-          <p:spPr>
-            <a:xfrm rot="-5400000">
-              <a:off x="8288290" y="4334265"/>
-              <a:ext cx="808800" cy="808800"/>
-            </a:xfrm>
-            <a:prstGeom prst="diagStripe">
-              <a:avLst>
-                <a:gd fmla="val 50000" name="adj"/>
-              </a:avLst>
-            </a:prstGeom>
-            <a:solidFill>
-              <a:schemeClr val="lt1">
-                <a:alpha val="7310"/>
-              </a:schemeClr>
-            </a:solidFill>
-            <a:ln>
-              <a:noFill/>
-            </a:ln>
-          </p:spPr>
-          <p:txBody>
-            <a:bodyPr anchorCtr="0" anchor="ctr" bIns="91425" lIns="91425" spcFirstLastPara="1" rIns="91425" wrap="square" tIns="91425">
-              <a:noAutofit/>
-            </a:bodyPr>
-            <a:lstStyle/>
-            <a:p>
-              <a:pPr indent="0" lvl="0" marL="0" rtl="0" algn="l">
-                <a:spcBef>
-                  <a:spcPts val="0"/>
-                </a:spcBef>
-                <a:spcAft>
-                  <a:spcPts val="0"/>
-                </a:spcAft>
-                <a:buNone/>
-              </a:pPr>
-              <a:r>
-                <a:t/>
-              </a:r>
-              <a:endParaRPr/>
-            </a:p>
-          </p:txBody>
-        </p:sp>
       </p:grpSp>
       <p:sp>
         <p:nvSpPr>
-          <p:cNvPr id="39" name="Google Shape;39;p3"/>
+          <p:cNvPr id="36" name="Google Shape;36;p3"/>
           <p:cNvSpPr txBox="1"/>
           <p:nvPr>
             <p:ph type="title"/>
@@ -4544,9 +4425,16 @@
               <a:spcAft>
                 <a:spcPts val="0"/>
               </a:spcAft>
+              <a:buClr>
+                <a:srgbClr val="41973E"/>
+              </a:buClr>
               <a:buSzPts val="2800"/>
               <a:buNone/>
-              <a:defRPr/>
+              <a:defRPr>
+                <a:solidFill>
+                  <a:srgbClr val="41973E"/>
+                </a:solidFill>
+              </a:defRPr>
             </a:lvl1pPr>
             <a:lvl2pPr lvl="1">
               <a:spcBef>
@@ -4642,7 +4530,7 @@
       </p:sp>
       <p:sp>
         <p:nvSpPr>
-          <p:cNvPr id="40" name="Google Shape;40;p3"/>
+          <p:cNvPr id="37" name="Google Shape;37;p3"/>
           <p:cNvSpPr txBox="1"/>
           <p:nvPr>
             <p:ph idx="12" type="sldNum"/>
@@ -4728,9 +4616,16 @@
 <file path=ppt/slideLayouts/slideLayout3.xml><?xml version="1.0" encoding="utf-8"?>
 <p:sldLayout xmlns:a="http://schemas.openxmlformats.org/drawingml/2006/main" xmlns:r="http://schemas.openxmlformats.org/officeDocument/2006/relationships" xmlns:mc="http://schemas.openxmlformats.org/markup-compatibility/2006" xmlns:mv="urn:schemas-microsoft-com:mac:vml" xmlns:p="http://schemas.openxmlformats.org/presentationml/2006/main" xmlns:c="http://schemas.openxmlformats.org/drawingml/2006/chart" xmlns:dgm="http://schemas.openxmlformats.org/drawingml/2006/diagram" xmlns:o="urn:schemas-microsoft-com:office:office" xmlns:v="urn:schemas-microsoft-com:vml" xmlns:pvml="urn:schemas-microsoft-com:office:powerpoint" xmlns:com="http://schemas.openxmlformats.org/drawingml/2006/compatibility" xmlns:p14="http://schemas.microsoft.com/office/powerpoint/2010/main" xmlns:p15="http://schemas.microsoft.com/office/powerpoint/2012/main" xmlns:ahyp="http://schemas.microsoft.com/office/drawing/2018/hyperlinkcolor" matchingName="Title and body" type="tx">
   <p:cSld name="TITLE_AND_BODY">
+    <p:bg>
+      <p:bgPr>
+        <a:solidFill>
+          <a:schemeClr val="lt1"/>
+        </a:solidFill>
+      </p:bgPr>
+    </p:bg>
     <p:spTree>
       <p:nvGrpSpPr>
-        <p:cNvPr id="41" name="Shape 41"/>
+        <p:cNvPr id="38" name="Shape 38"/>
         <p:cNvGrpSpPr/>
         <p:nvPr/>
       </p:nvGrpSpPr>
@@ -4742,9 +4637,36 @@
           <a:chExt cx="0" cy="0"/>
         </a:xfrm>
       </p:grpSpPr>
+      <p:pic>
+        <p:nvPicPr>
+          <p:cNvPr id="39" name="Google Shape;39;p4" title="ChatGPT Image Jul 7, 2025, 03_40_25 PM.png"/>
+          <p:cNvPicPr preferRelativeResize="0"/>
+          <p:nvPr/>
+        </p:nvPicPr>
+        <p:blipFill rotWithShape="1">
+          <a:blip r:embed="rId2">
+            <a:alphaModFix amt="19000"/>
+          </a:blip>
+          <a:srcRect b="37047" l="0" r="0" t="0"/>
+          <a:stretch/>
+        </p:blipFill>
+        <p:spPr>
+          <a:xfrm>
+            <a:off x="1575325" y="685213"/>
+            <a:ext cx="5993354" cy="3773074"/>
+          </a:xfrm>
+          <a:prstGeom prst="rect">
+            <a:avLst/>
+          </a:prstGeom>
+          <a:noFill/>
+          <a:ln>
+            <a:noFill/>
+          </a:ln>
+        </p:spPr>
+      </p:pic>
       <p:grpSp>
         <p:nvGrpSpPr>
-          <p:cNvPr id="42" name="Google Shape;42;p4"/>
+          <p:cNvPr id="40" name="Google Shape;40;p4"/>
           <p:cNvGrpSpPr/>
           <p:nvPr/>
         </p:nvGrpSpPr>
@@ -4758,7 +4680,7 @@
         </p:grpSpPr>
         <p:sp>
           <p:nvSpPr>
-            <p:cNvPr id="43" name="Google Shape;43;p4"/>
+            <p:cNvPr id="41" name="Google Shape;41;p4"/>
             <p:cNvSpPr/>
             <p:nvPr/>
           </p:nvSpPr>
@@ -4773,7 +4695,7 @@
               </a:avLst>
             </a:prstGeom>
             <a:solidFill>
-              <a:schemeClr val="accent1"/>
+              <a:srgbClr val="93C47D"/>
             </a:solidFill>
             <a:ln>
               <a:noFill/>
@@ -4803,7 +4725,7 @@
         </p:sp>
         <p:sp>
           <p:nvSpPr>
-            <p:cNvPr id="44" name="Google Shape;44;p4"/>
+            <p:cNvPr id="42" name="Google Shape;42;p4"/>
             <p:cNvSpPr/>
             <p:nvPr/>
           </p:nvSpPr>
@@ -4818,7 +4740,7 @@
               </a:avLst>
             </a:prstGeom>
             <a:solidFill>
-              <a:schemeClr val="lt2"/>
+              <a:srgbClr val="41973E"/>
             </a:solidFill>
             <a:ln>
               <a:noFill/>
@@ -4849,7 +4771,7 @@
       </p:grpSp>
       <p:sp>
         <p:nvSpPr>
-          <p:cNvPr id="45" name="Google Shape;45;p4"/>
+          <p:cNvPr id="43" name="Google Shape;43;p4"/>
           <p:cNvSpPr txBox="1"/>
           <p:nvPr>
             <p:ph type="title"/>
@@ -4876,9 +4798,16 @@
               <a:spcAft>
                 <a:spcPts val="0"/>
               </a:spcAft>
+              <a:buClr>
+                <a:srgbClr val="41973E"/>
+              </a:buClr>
               <a:buSzPts val="2400"/>
               <a:buNone/>
-              <a:defRPr sz="2400"/>
+              <a:defRPr sz="2400">
+                <a:solidFill>
+                  <a:srgbClr val="41973E"/>
+                </a:solidFill>
+              </a:defRPr>
             </a:lvl1pPr>
             <a:lvl2pPr lvl="1">
               <a:spcBef>
@@ -4974,7 +4903,7 @@
       </p:sp>
       <p:sp>
         <p:nvSpPr>
-          <p:cNvPr id="46" name="Google Shape;46;p4"/>
+          <p:cNvPr id="44" name="Google Shape;44;p4" title="Logo"/>
           <p:cNvSpPr txBox="1"/>
           <p:nvPr>
             <p:ph idx="1" type="body"/>
@@ -5001,9 +4930,16 @@
               <a:spcAft>
                 <a:spcPts val="0"/>
               </a:spcAft>
+              <a:buClr>
+                <a:srgbClr val="41973E"/>
+              </a:buClr>
               <a:buSzPts val="1300"/>
               <a:buChar char="●"/>
-              <a:defRPr/>
+              <a:defRPr>
+                <a:solidFill>
+                  <a:srgbClr val="41973E"/>
+                </a:solidFill>
+              </a:defRPr>
             </a:lvl1pPr>
             <a:lvl2pPr indent="-298450" lvl="1" marL="914400">
               <a:spcBef>
@@ -5012,9 +4948,16 @@
               <a:spcAft>
                 <a:spcPts val="0"/>
               </a:spcAft>
+              <a:buClr>
+                <a:srgbClr val="41973E"/>
+              </a:buClr>
               <a:buSzPts val="1100"/>
               <a:buChar char="○"/>
-              <a:defRPr/>
+              <a:defRPr>
+                <a:solidFill>
+                  <a:srgbClr val="41973E"/>
+                </a:solidFill>
+              </a:defRPr>
             </a:lvl2pPr>
             <a:lvl3pPr indent="-298450" lvl="2" marL="1371600">
               <a:spcBef>
@@ -5023,9 +4966,16 @@
               <a:spcAft>
                 <a:spcPts val="0"/>
               </a:spcAft>
+              <a:buClr>
+                <a:srgbClr val="41973E"/>
+              </a:buClr>
               <a:buSzPts val="1100"/>
               <a:buChar char="■"/>
-              <a:defRPr/>
+              <a:defRPr>
+                <a:solidFill>
+                  <a:srgbClr val="41973E"/>
+                </a:solidFill>
+              </a:defRPr>
             </a:lvl3pPr>
             <a:lvl4pPr indent="-298450" lvl="3" marL="1828800">
               <a:spcBef>
@@ -5034,9 +4984,16 @@
               <a:spcAft>
                 <a:spcPts val="0"/>
               </a:spcAft>
+              <a:buClr>
+                <a:srgbClr val="41973E"/>
+              </a:buClr>
               <a:buSzPts val="1100"/>
               <a:buChar char="●"/>
-              <a:defRPr/>
+              <a:defRPr>
+                <a:solidFill>
+                  <a:srgbClr val="41973E"/>
+                </a:solidFill>
+              </a:defRPr>
             </a:lvl4pPr>
             <a:lvl5pPr indent="-298450" lvl="4" marL="2286000">
               <a:spcBef>
@@ -5045,9 +5002,16 @@
               <a:spcAft>
                 <a:spcPts val="0"/>
               </a:spcAft>
+              <a:buClr>
+                <a:srgbClr val="41973E"/>
+              </a:buClr>
               <a:buSzPts val="1100"/>
               <a:buChar char="○"/>
-              <a:defRPr/>
+              <a:defRPr>
+                <a:solidFill>
+                  <a:srgbClr val="41973E"/>
+                </a:solidFill>
+              </a:defRPr>
             </a:lvl5pPr>
             <a:lvl6pPr indent="-298450" lvl="5" marL="2743200">
               <a:spcBef>
@@ -5056,9 +5020,16 @@
               <a:spcAft>
                 <a:spcPts val="0"/>
               </a:spcAft>
+              <a:buClr>
+                <a:srgbClr val="41973E"/>
+              </a:buClr>
               <a:buSzPts val="1100"/>
               <a:buChar char="■"/>
-              <a:defRPr/>
+              <a:defRPr>
+                <a:solidFill>
+                  <a:srgbClr val="41973E"/>
+                </a:solidFill>
+              </a:defRPr>
             </a:lvl6pPr>
             <a:lvl7pPr indent="-298450" lvl="6" marL="3200400">
               <a:spcBef>
@@ -5067,9 +5038,16 @@
               <a:spcAft>
                 <a:spcPts val="0"/>
               </a:spcAft>
+              <a:buClr>
+                <a:srgbClr val="41973E"/>
+              </a:buClr>
               <a:buSzPts val="1100"/>
               <a:buChar char="●"/>
-              <a:defRPr/>
+              <a:defRPr>
+                <a:solidFill>
+                  <a:srgbClr val="41973E"/>
+                </a:solidFill>
+              </a:defRPr>
             </a:lvl7pPr>
             <a:lvl8pPr indent="-298450" lvl="7" marL="3657600">
               <a:spcBef>
@@ -5078,9 +5056,16 @@
               <a:spcAft>
                 <a:spcPts val="0"/>
               </a:spcAft>
+              <a:buClr>
+                <a:srgbClr val="41973E"/>
+              </a:buClr>
               <a:buSzPts val="1100"/>
               <a:buChar char="○"/>
-              <a:defRPr/>
+              <a:defRPr>
+                <a:solidFill>
+                  <a:srgbClr val="41973E"/>
+                </a:solidFill>
+              </a:defRPr>
             </a:lvl8pPr>
             <a:lvl9pPr indent="-298450" lvl="8" marL="4114800">
               <a:spcBef>
@@ -5089,9 +5074,16 @@
               <a:spcAft>
                 <a:spcPts val="0"/>
               </a:spcAft>
+              <a:buClr>
+                <a:srgbClr val="41973E"/>
+              </a:buClr>
               <a:buSzPts val="1100"/>
               <a:buChar char="■"/>
-              <a:defRPr/>
+              <a:defRPr>
+                <a:solidFill>
+                  <a:srgbClr val="41973E"/>
+                </a:solidFill>
+              </a:defRPr>
             </a:lvl9pPr>
           </a:lstStyle>
           <a:p/>
@@ -5099,7 +5091,7 @@
       </p:sp>
       <p:sp>
         <p:nvSpPr>
-          <p:cNvPr id="47" name="Google Shape;47;p4"/>
+          <p:cNvPr id="45" name="Google Shape;45;p4"/>
           <p:cNvSpPr txBox="1"/>
           <p:nvPr>
             <p:ph idx="12" type="sldNum"/>
@@ -5174,6 +5166,159 @@
           </a:p>
         </p:txBody>
       </p:sp>
+      <p:sp>
+        <p:nvSpPr>
+          <p:cNvPr id="46" name="Google Shape;46;p4"/>
+          <p:cNvSpPr/>
+          <p:nvPr/>
+        </p:nvSpPr>
+        <p:spPr>
+          <a:xfrm>
+            <a:off x="50" y="4909150"/>
+            <a:ext cx="9144000" cy="234300"/>
+          </a:xfrm>
+          <a:prstGeom prst="rect">
+            <a:avLst/>
+          </a:prstGeom>
+          <a:solidFill>
+            <a:srgbClr val="41973E"/>
+          </a:solidFill>
+          <a:ln cap="flat" cmpd="sng" w="9525">
+            <a:solidFill>
+              <a:schemeClr val="dk2"/>
+            </a:solidFill>
+            <a:prstDash val="solid"/>
+            <a:round/>
+            <a:headEnd len="sm" w="sm" type="none"/>
+            <a:tailEnd len="sm" w="sm" type="none"/>
+          </a:ln>
+        </p:spPr>
+        <p:txBody>
+          <a:bodyPr anchorCtr="0" anchor="ctr" bIns="91425" lIns="91425" spcFirstLastPara="1" rIns="91425" wrap="square" tIns="91425">
+            <a:noAutofit/>
+          </a:bodyPr>
+          <a:lstStyle/>
+          <a:p>
+            <a:pPr indent="0" lvl="0" marL="0" rtl="0" algn="ctr">
+              <a:spcBef>
+                <a:spcPts val="0"/>
+              </a:spcBef>
+              <a:spcAft>
+                <a:spcPts val="0"/>
+              </a:spcAft>
+              <a:buNone/>
+            </a:pPr>
+            <a:r>
+              <a:t/>
+            </a:r>
+            <a:endParaRPr>
+              <a:latin typeface="Lato"/>
+              <a:ea typeface="Lato"/>
+              <a:cs typeface="Lato"/>
+              <a:sym typeface="Lato"/>
+            </a:endParaRPr>
+          </a:p>
+        </p:txBody>
+      </p:sp>
+      <p:sp>
+        <p:nvSpPr>
+          <p:cNvPr id="47" name="Google Shape;47;p4"/>
+          <p:cNvSpPr/>
+          <p:nvPr/>
+        </p:nvSpPr>
+        <p:spPr>
+          <a:xfrm>
+            <a:off x="0" y="4738450"/>
+            <a:ext cx="9144000" cy="78900"/>
+          </a:xfrm>
+          <a:prstGeom prst="rect">
+            <a:avLst/>
+          </a:prstGeom>
+          <a:solidFill>
+            <a:srgbClr val="41973E"/>
+          </a:solidFill>
+          <a:ln cap="flat" cmpd="sng" w="9525">
+            <a:solidFill>
+              <a:schemeClr val="dk2"/>
+            </a:solidFill>
+            <a:prstDash val="solid"/>
+            <a:round/>
+            <a:headEnd len="sm" w="sm" type="none"/>
+            <a:tailEnd len="sm" w="sm" type="none"/>
+          </a:ln>
+        </p:spPr>
+        <p:txBody>
+          <a:bodyPr anchorCtr="0" anchor="ctr" bIns="91425" lIns="91425" spcFirstLastPara="1" rIns="91425" wrap="square" tIns="91425">
+            <a:noAutofit/>
+          </a:bodyPr>
+          <a:lstStyle/>
+          <a:p>
+            <a:pPr indent="0" lvl="0" marL="0" rtl="0" algn="ctr">
+              <a:spcBef>
+                <a:spcPts val="0"/>
+              </a:spcBef>
+              <a:spcAft>
+                <a:spcPts val="0"/>
+              </a:spcAft>
+              <a:buNone/>
+            </a:pPr>
+            <a:r>
+              <a:t/>
+            </a:r>
+            <a:endParaRPr>
+              <a:latin typeface="Lato"/>
+              <a:ea typeface="Lato"/>
+              <a:cs typeface="Lato"/>
+              <a:sym typeface="Lato"/>
+            </a:endParaRPr>
+          </a:p>
+        </p:txBody>
+      </p:sp>
+      <p:sp>
+        <p:nvSpPr>
+          <p:cNvPr id="48" name="Google Shape;48;p4"/>
+          <p:cNvSpPr/>
+          <p:nvPr/>
+        </p:nvSpPr>
+        <p:spPr>
+          <a:xfrm flipH="1" rot="5400000">
+            <a:off x="8148150" y="3773650"/>
+            <a:ext cx="930900" cy="815100"/>
+          </a:xfrm>
+          <a:prstGeom prst="diagStripe">
+            <a:avLst>
+              <a:gd fmla="val 50000" name="adj"/>
+            </a:avLst>
+          </a:prstGeom>
+          <a:solidFill>
+            <a:srgbClr val="93C47D"/>
+          </a:solidFill>
+          <a:ln>
+            <a:noFill/>
+          </a:ln>
+        </p:spPr>
+        <p:txBody>
+          <a:bodyPr anchorCtr="0" anchor="ctr" bIns="91425" lIns="91425" spcFirstLastPara="1" rIns="91425" wrap="square" tIns="91425">
+            <a:noAutofit/>
+          </a:bodyPr>
+          <a:lstStyle/>
+          <a:p>
+            <a:pPr indent="0" lvl="0" marL="0" rtl="0" algn="l">
+              <a:spcBef>
+                <a:spcPts val="0"/>
+              </a:spcBef>
+              <a:spcAft>
+                <a:spcPts val="0"/>
+              </a:spcAft>
+              <a:buNone/>
+            </a:pPr>
+            <a:r>
+              <a:t/>
+            </a:r>
+            <a:endParaRPr/>
+          </a:p>
+        </p:txBody>
+      </p:sp>
     </p:spTree>
   </p:cSld>
   <p:clrMapOvr>
@@ -5185,9 +5330,16 @@
 <file path=ppt/slideLayouts/slideLayout4.xml><?xml version="1.0" encoding="utf-8"?>
 <p:sldLayout xmlns:a="http://schemas.openxmlformats.org/drawingml/2006/main" xmlns:r="http://schemas.openxmlformats.org/officeDocument/2006/relationships" xmlns:mc="http://schemas.openxmlformats.org/markup-compatibility/2006" xmlns:mv="urn:schemas-microsoft-com:mac:vml" xmlns:p="http://schemas.openxmlformats.org/presentationml/2006/main" xmlns:c="http://schemas.openxmlformats.org/drawingml/2006/chart" xmlns:dgm="http://schemas.openxmlformats.org/drawingml/2006/diagram" xmlns:o="urn:schemas-microsoft-com:office:office" xmlns:v="urn:schemas-microsoft-com:vml" xmlns:pvml="urn:schemas-microsoft-com:office:powerpoint" xmlns:com="http://schemas.openxmlformats.org/drawingml/2006/compatibility" xmlns:p14="http://schemas.microsoft.com/office/powerpoint/2010/main" xmlns:p15="http://schemas.microsoft.com/office/powerpoint/2012/main" xmlns:ahyp="http://schemas.microsoft.com/office/drawing/2018/hyperlinkcolor" matchingName="Title and two columns" type="twoColTx">
   <p:cSld name="TITLE_AND_TWO_COLUMNS">
+    <p:bg>
+      <p:bgPr>
+        <a:solidFill>
+          <a:schemeClr val="lt1"/>
+        </a:solidFill>
+      </p:bgPr>
+    </p:bg>
     <p:spTree>
       <p:nvGrpSpPr>
-        <p:cNvPr id="48" name="Shape 48"/>
+        <p:cNvPr id="49" name="Shape 49"/>
         <p:cNvGrpSpPr/>
         <p:nvPr/>
       </p:nvGrpSpPr>
@@ -5201,7 +5353,7 @@
       </p:grpSpPr>
       <p:grpSp>
         <p:nvGrpSpPr>
-          <p:cNvPr id="49" name="Google Shape;49;p5"/>
+          <p:cNvPr id="50" name="Google Shape;50;p5"/>
           <p:cNvGrpSpPr/>
           <p:nvPr/>
         </p:nvGrpSpPr>
@@ -5215,7 +5367,7 @@
         </p:grpSpPr>
         <p:sp>
           <p:nvSpPr>
-            <p:cNvPr id="50" name="Google Shape;50;p5"/>
+            <p:cNvPr id="51" name="Google Shape;51;p5"/>
             <p:cNvSpPr/>
             <p:nvPr/>
           </p:nvSpPr>
@@ -5230,7 +5382,7 @@
               </a:avLst>
             </a:prstGeom>
             <a:solidFill>
-              <a:schemeClr val="accent1"/>
+              <a:srgbClr val="93C47D"/>
             </a:solidFill>
             <a:ln>
               <a:noFill/>
@@ -5260,7 +5412,7 @@
         </p:sp>
         <p:sp>
           <p:nvSpPr>
-            <p:cNvPr id="51" name="Google Shape;51;p5"/>
+            <p:cNvPr id="52" name="Google Shape;52;p5"/>
             <p:cNvSpPr/>
             <p:nvPr/>
           </p:nvSpPr>
@@ -5275,7 +5427,7 @@
               </a:avLst>
             </a:prstGeom>
             <a:solidFill>
-              <a:schemeClr val="lt2"/>
+              <a:srgbClr val="41973E"/>
             </a:solidFill>
             <a:ln>
               <a:noFill/>
@@ -5306,7 +5458,7 @@
       </p:grpSp>
       <p:sp>
         <p:nvSpPr>
-          <p:cNvPr id="52" name="Google Shape;52;p5"/>
+          <p:cNvPr id="53" name="Google Shape;53;p5"/>
           <p:cNvSpPr txBox="1"/>
           <p:nvPr>
             <p:ph type="title"/>
@@ -5333,9 +5485,16 @@
               <a:spcAft>
                 <a:spcPts val="0"/>
               </a:spcAft>
+              <a:buClr>
+                <a:srgbClr val="41973E"/>
+              </a:buClr>
               <a:buSzPts val="2400"/>
               <a:buNone/>
-              <a:defRPr sz="2400"/>
+              <a:defRPr sz="2400">
+                <a:solidFill>
+                  <a:srgbClr val="41973E"/>
+                </a:solidFill>
+              </a:defRPr>
             </a:lvl1pPr>
             <a:lvl2pPr lvl="1">
               <a:spcBef>
@@ -5344,9 +5503,16 @@
               <a:spcAft>
                 <a:spcPts val="0"/>
               </a:spcAft>
+              <a:buClr>
+                <a:srgbClr val="41973E"/>
+              </a:buClr>
               <a:buSzPts val="2400"/>
               <a:buNone/>
-              <a:defRPr sz="2400"/>
+              <a:defRPr sz="2400">
+                <a:solidFill>
+                  <a:srgbClr val="41973E"/>
+                </a:solidFill>
+              </a:defRPr>
             </a:lvl2pPr>
             <a:lvl3pPr lvl="2">
               <a:spcBef>
@@ -5355,9 +5521,16 @@
               <a:spcAft>
                 <a:spcPts val="0"/>
               </a:spcAft>
+              <a:buClr>
+                <a:srgbClr val="41973E"/>
+              </a:buClr>
               <a:buSzPts val="2400"/>
               <a:buNone/>
-              <a:defRPr sz="2400"/>
+              <a:defRPr sz="2400">
+                <a:solidFill>
+                  <a:srgbClr val="41973E"/>
+                </a:solidFill>
+              </a:defRPr>
             </a:lvl3pPr>
             <a:lvl4pPr lvl="3">
               <a:spcBef>
@@ -5366,9 +5539,16 @@
               <a:spcAft>
                 <a:spcPts val="0"/>
               </a:spcAft>
+              <a:buClr>
+                <a:srgbClr val="41973E"/>
+              </a:buClr>
               <a:buSzPts val="2400"/>
               <a:buNone/>
-              <a:defRPr sz="2400"/>
+              <a:defRPr sz="2400">
+                <a:solidFill>
+                  <a:srgbClr val="41973E"/>
+                </a:solidFill>
+              </a:defRPr>
             </a:lvl4pPr>
             <a:lvl5pPr lvl="4">
               <a:spcBef>
@@ -5377,9 +5557,16 @@
               <a:spcAft>
                 <a:spcPts val="0"/>
               </a:spcAft>
+              <a:buClr>
+                <a:srgbClr val="41973E"/>
+              </a:buClr>
               <a:buSzPts val="2400"/>
               <a:buNone/>
-              <a:defRPr sz="2400"/>
+              <a:defRPr sz="2400">
+                <a:solidFill>
+                  <a:srgbClr val="41973E"/>
+                </a:solidFill>
+              </a:defRPr>
             </a:lvl5pPr>
             <a:lvl6pPr lvl="5">
               <a:spcBef>
@@ -5388,9 +5575,16 @@
               <a:spcAft>
                 <a:spcPts val="0"/>
               </a:spcAft>
+              <a:buClr>
+                <a:srgbClr val="41973E"/>
+              </a:buClr>
               <a:buSzPts val="2400"/>
               <a:buNone/>
-              <a:defRPr sz="2400"/>
+              <a:defRPr sz="2400">
+                <a:solidFill>
+                  <a:srgbClr val="41973E"/>
+                </a:solidFill>
+              </a:defRPr>
             </a:lvl6pPr>
             <a:lvl7pPr lvl="6">
               <a:spcBef>
@@ -5399,9 +5593,16 @@
               <a:spcAft>
                 <a:spcPts val="0"/>
               </a:spcAft>
+              <a:buClr>
+                <a:srgbClr val="41973E"/>
+              </a:buClr>
               <a:buSzPts val="2400"/>
               <a:buNone/>
-              <a:defRPr sz="2400"/>
+              <a:defRPr sz="2400">
+                <a:solidFill>
+                  <a:srgbClr val="41973E"/>
+                </a:solidFill>
+              </a:defRPr>
             </a:lvl7pPr>
             <a:lvl8pPr lvl="7">
               <a:spcBef>
@@ -5410,9 +5611,16 @@
               <a:spcAft>
                 <a:spcPts val="0"/>
               </a:spcAft>
+              <a:buClr>
+                <a:srgbClr val="41973E"/>
+              </a:buClr>
               <a:buSzPts val="2400"/>
               <a:buNone/>
-              <a:defRPr sz="2400"/>
+              <a:defRPr sz="2400">
+                <a:solidFill>
+                  <a:srgbClr val="41973E"/>
+                </a:solidFill>
+              </a:defRPr>
             </a:lvl8pPr>
             <a:lvl9pPr lvl="8">
               <a:spcBef>
@@ -5421,9 +5629,16 @@
               <a:spcAft>
                 <a:spcPts val="0"/>
               </a:spcAft>
+              <a:buClr>
+                <a:srgbClr val="41973E"/>
+              </a:buClr>
               <a:buSzPts val="2400"/>
               <a:buNone/>
-              <a:defRPr sz="2400"/>
+              <a:defRPr sz="2400">
+                <a:solidFill>
+                  <a:srgbClr val="41973E"/>
+                </a:solidFill>
+              </a:defRPr>
             </a:lvl9pPr>
           </a:lstStyle>
           <a:p/>
@@ -5431,7 +5646,7 @@
       </p:sp>
       <p:sp>
         <p:nvSpPr>
-          <p:cNvPr id="53" name="Google Shape;53;p5"/>
+          <p:cNvPr id="54" name="Google Shape;54;p5"/>
           <p:cNvSpPr txBox="1"/>
           <p:nvPr>
             <p:ph idx="1" type="body"/>
@@ -5458,9 +5673,16 @@
               <a:spcAft>
                 <a:spcPts val="0"/>
               </a:spcAft>
+              <a:buClr>
+                <a:srgbClr val="41973E"/>
+              </a:buClr>
               <a:buSzPts val="1300"/>
               <a:buChar char="●"/>
-              <a:defRPr/>
+              <a:defRPr>
+                <a:solidFill>
+                  <a:srgbClr val="41973E"/>
+                </a:solidFill>
+              </a:defRPr>
             </a:lvl1pPr>
             <a:lvl2pPr indent="-298450" lvl="1" marL="914400">
               <a:spcBef>
@@ -5469,9 +5691,16 @@
               <a:spcAft>
                 <a:spcPts val="0"/>
               </a:spcAft>
+              <a:buClr>
+                <a:srgbClr val="41973E"/>
+              </a:buClr>
               <a:buSzPts val="1100"/>
               <a:buChar char="○"/>
-              <a:defRPr/>
+              <a:defRPr>
+                <a:solidFill>
+                  <a:srgbClr val="41973E"/>
+                </a:solidFill>
+              </a:defRPr>
             </a:lvl2pPr>
             <a:lvl3pPr indent="-298450" lvl="2" marL="1371600">
               <a:spcBef>
@@ -5480,9 +5709,16 @@
               <a:spcAft>
                 <a:spcPts val="0"/>
               </a:spcAft>
+              <a:buClr>
+                <a:srgbClr val="41973E"/>
+              </a:buClr>
               <a:buSzPts val="1100"/>
               <a:buChar char="■"/>
-              <a:defRPr/>
+              <a:defRPr>
+                <a:solidFill>
+                  <a:srgbClr val="41973E"/>
+                </a:solidFill>
+              </a:defRPr>
             </a:lvl3pPr>
             <a:lvl4pPr indent="-298450" lvl="3" marL="1828800">
               <a:spcBef>
@@ -5491,9 +5727,16 @@
               <a:spcAft>
                 <a:spcPts val="0"/>
               </a:spcAft>
+              <a:buClr>
+                <a:srgbClr val="41973E"/>
+              </a:buClr>
               <a:buSzPts val="1100"/>
               <a:buChar char="●"/>
-              <a:defRPr/>
+              <a:defRPr>
+                <a:solidFill>
+                  <a:srgbClr val="41973E"/>
+                </a:solidFill>
+              </a:defRPr>
             </a:lvl4pPr>
             <a:lvl5pPr indent="-298450" lvl="4" marL="2286000">
               <a:spcBef>
@@ -5502,9 +5745,16 @@
               <a:spcAft>
                 <a:spcPts val="0"/>
               </a:spcAft>
+              <a:buClr>
+                <a:srgbClr val="41973E"/>
+              </a:buClr>
               <a:buSzPts val="1100"/>
               <a:buChar char="○"/>
-              <a:defRPr/>
+              <a:defRPr>
+                <a:solidFill>
+                  <a:srgbClr val="41973E"/>
+                </a:solidFill>
+              </a:defRPr>
             </a:lvl5pPr>
             <a:lvl6pPr indent="-298450" lvl="5" marL="2743200">
               <a:spcBef>
@@ -5513,9 +5763,16 @@
               <a:spcAft>
                 <a:spcPts val="0"/>
               </a:spcAft>
+              <a:buClr>
+                <a:srgbClr val="41973E"/>
+              </a:buClr>
               <a:buSzPts val="1100"/>
               <a:buChar char="■"/>
-              <a:defRPr/>
+              <a:defRPr>
+                <a:solidFill>
+                  <a:srgbClr val="41973E"/>
+                </a:solidFill>
+              </a:defRPr>
             </a:lvl6pPr>
             <a:lvl7pPr indent="-298450" lvl="6" marL="3200400">
               <a:spcBef>
@@ -5524,9 +5781,16 @@
               <a:spcAft>
                 <a:spcPts val="0"/>
               </a:spcAft>
+              <a:buClr>
+                <a:srgbClr val="41973E"/>
+              </a:buClr>
               <a:buSzPts val="1100"/>
               <a:buChar char="●"/>
-              <a:defRPr/>
+              <a:defRPr>
+                <a:solidFill>
+                  <a:srgbClr val="41973E"/>
+                </a:solidFill>
+              </a:defRPr>
             </a:lvl7pPr>
             <a:lvl8pPr indent="-298450" lvl="7" marL="3657600">
               <a:spcBef>
@@ -5535,9 +5799,16 @@
               <a:spcAft>
                 <a:spcPts val="0"/>
               </a:spcAft>
+              <a:buClr>
+                <a:srgbClr val="41973E"/>
+              </a:buClr>
               <a:buSzPts val="1100"/>
               <a:buChar char="○"/>
-              <a:defRPr/>
+              <a:defRPr>
+                <a:solidFill>
+                  <a:srgbClr val="41973E"/>
+                </a:solidFill>
+              </a:defRPr>
             </a:lvl8pPr>
             <a:lvl9pPr indent="-298450" lvl="8" marL="4114800">
               <a:spcBef>
@@ -5546,9 +5817,16 @@
               <a:spcAft>
                 <a:spcPts val="0"/>
               </a:spcAft>
+              <a:buClr>
+                <a:srgbClr val="41973E"/>
+              </a:buClr>
               <a:buSzPts val="1100"/>
               <a:buChar char="■"/>
-              <a:defRPr/>
+              <a:defRPr>
+                <a:solidFill>
+                  <a:srgbClr val="41973E"/>
+                </a:solidFill>
+              </a:defRPr>
             </a:lvl9pPr>
           </a:lstStyle>
           <a:p/>
@@ -5556,7 +5834,7 @@
       </p:sp>
       <p:sp>
         <p:nvSpPr>
-          <p:cNvPr id="54" name="Google Shape;54;p5"/>
+          <p:cNvPr id="55" name="Google Shape;55;p5"/>
           <p:cNvSpPr txBox="1"/>
           <p:nvPr>
             <p:ph idx="2" type="body"/>
@@ -5583,9 +5861,16 @@
               <a:spcAft>
                 <a:spcPts val="0"/>
               </a:spcAft>
+              <a:buClr>
+                <a:srgbClr val="41973E"/>
+              </a:buClr>
               <a:buSzPts val="1300"/>
               <a:buChar char="●"/>
-              <a:defRPr/>
+              <a:defRPr>
+                <a:solidFill>
+                  <a:srgbClr val="41973E"/>
+                </a:solidFill>
+              </a:defRPr>
             </a:lvl1pPr>
             <a:lvl2pPr indent="-298450" lvl="1" marL="914400">
               <a:spcBef>
@@ -5594,9 +5879,16 @@
               <a:spcAft>
                 <a:spcPts val="0"/>
               </a:spcAft>
+              <a:buClr>
+                <a:srgbClr val="41973E"/>
+              </a:buClr>
               <a:buSzPts val="1100"/>
               <a:buChar char="○"/>
-              <a:defRPr/>
+              <a:defRPr>
+                <a:solidFill>
+                  <a:srgbClr val="41973E"/>
+                </a:solidFill>
+              </a:defRPr>
             </a:lvl2pPr>
             <a:lvl3pPr indent="-298450" lvl="2" marL="1371600">
               <a:spcBef>
@@ -5605,9 +5897,16 @@
               <a:spcAft>
                 <a:spcPts val="0"/>
               </a:spcAft>
+              <a:buClr>
+                <a:srgbClr val="41973E"/>
+              </a:buClr>
               <a:buSzPts val="1100"/>
               <a:buChar char="■"/>
-              <a:defRPr/>
+              <a:defRPr>
+                <a:solidFill>
+                  <a:srgbClr val="41973E"/>
+                </a:solidFill>
+              </a:defRPr>
             </a:lvl3pPr>
             <a:lvl4pPr indent="-298450" lvl="3" marL="1828800">
               <a:spcBef>
@@ -5616,9 +5915,16 @@
               <a:spcAft>
                 <a:spcPts val="0"/>
               </a:spcAft>
+              <a:buClr>
+                <a:srgbClr val="41973E"/>
+              </a:buClr>
               <a:buSzPts val="1100"/>
               <a:buChar char="●"/>
-              <a:defRPr/>
+              <a:defRPr>
+                <a:solidFill>
+                  <a:srgbClr val="41973E"/>
+                </a:solidFill>
+              </a:defRPr>
             </a:lvl4pPr>
             <a:lvl5pPr indent="-298450" lvl="4" marL="2286000">
               <a:spcBef>
@@ -5627,9 +5933,16 @@
               <a:spcAft>
                 <a:spcPts val="0"/>
               </a:spcAft>
+              <a:buClr>
+                <a:srgbClr val="41973E"/>
+              </a:buClr>
               <a:buSzPts val="1100"/>
               <a:buChar char="○"/>
-              <a:defRPr/>
+              <a:defRPr>
+                <a:solidFill>
+                  <a:srgbClr val="41973E"/>
+                </a:solidFill>
+              </a:defRPr>
             </a:lvl5pPr>
             <a:lvl6pPr indent="-298450" lvl="5" marL="2743200">
               <a:spcBef>
@@ -5638,9 +5951,16 @@
               <a:spcAft>
                 <a:spcPts val="0"/>
               </a:spcAft>
+              <a:buClr>
+                <a:srgbClr val="41973E"/>
+              </a:buClr>
               <a:buSzPts val="1100"/>
               <a:buChar char="■"/>
-              <a:defRPr/>
+              <a:defRPr>
+                <a:solidFill>
+                  <a:srgbClr val="41973E"/>
+                </a:solidFill>
+              </a:defRPr>
             </a:lvl6pPr>
             <a:lvl7pPr indent="-298450" lvl="6" marL="3200400">
               <a:spcBef>
@@ -5649,9 +5969,16 @@
               <a:spcAft>
                 <a:spcPts val="0"/>
               </a:spcAft>
+              <a:buClr>
+                <a:srgbClr val="41973E"/>
+              </a:buClr>
               <a:buSzPts val="1100"/>
               <a:buChar char="●"/>
-              <a:defRPr/>
+              <a:defRPr>
+                <a:solidFill>
+                  <a:srgbClr val="41973E"/>
+                </a:solidFill>
+              </a:defRPr>
             </a:lvl7pPr>
             <a:lvl8pPr indent="-298450" lvl="7" marL="3657600">
               <a:spcBef>
@@ -5660,9 +5987,16 @@
               <a:spcAft>
                 <a:spcPts val="0"/>
               </a:spcAft>
+              <a:buClr>
+                <a:srgbClr val="41973E"/>
+              </a:buClr>
               <a:buSzPts val="1100"/>
               <a:buChar char="○"/>
-              <a:defRPr/>
+              <a:defRPr>
+                <a:solidFill>
+                  <a:srgbClr val="41973E"/>
+                </a:solidFill>
+              </a:defRPr>
             </a:lvl8pPr>
             <a:lvl9pPr indent="-298450" lvl="8" marL="4114800">
               <a:spcBef>
@@ -5671,9 +6005,16 @@
               <a:spcAft>
                 <a:spcPts val="0"/>
               </a:spcAft>
+              <a:buClr>
+                <a:srgbClr val="41973E"/>
+              </a:buClr>
               <a:buSzPts val="1100"/>
               <a:buChar char="■"/>
-              <a:defRPr/>
+              <a:defRPr>
+                <a:solidFill>
+                  <a:srgbClr val="41973E"/>
+                </a:solidFill>
+              </a:defRPr>
             </a:lvl9pPr>
           </a:lstStyle>
           <a:p/>
@@ -5681,7 +6022,7 @@
       </p:sp>
       <p:sp>
         <p:nvSpPr>
-          <p:cNvPr id="55" name="Google Shape;55;p5"/>
+          <p:cNvPr id="56" name="Google Shape;56;p5"/>
           <p:cNvSpPr txBox="1"/>
           <p:nvPr>
             <p:ph idx="12" type="sldNum"/>
@@ -5769,7 +6110,7 @@
   <p:cSld name="TITLE_ONLY">
     <p:spTree>
       <p:nvGrpSpPr>
-        <p:cNvPr id="56" name="Shape 56"/>
+        <p:cNvPr id="57" name="Shape 57"/>
         <p:cNvGrpSpPr/>
         <p:nvPr/>
       </p:nvGrpSpPr>
@@ -5783,7 +6124,7 @@
       </p:grpSpPr>
       <p:grpSp>
         <p:nvGrpSpPr>
-          <p:cNvPr id="57" name="Google Shape;57;p6"/>
+          <p:cNvPr id="58" name="Google Shape;58;p6"/>
           <p:cNvGrpSpPr/>
           <p:nvPr/>
         </p:nvGrpSpPr>
@@ -5797,7 +6138,7 @@
         </p:grpSpPr>
         <p:sp>
           <p:nvSpPr>
-            <p:cNvPr id="58" name="Google Shape;58;p6"/>
+            <p:cNvPr id="59" name="Google Shape;59;p6"/>
             <p:cNvSpPr/>
             <p:nvPr/>
           </p:nvSpPr>
@@ -5812,7 +6153,7 @@
               </a:avLst>
             </a:prstGeom>
             <a:solidFill>
-              <a:schemeClr val="accent1"/>
+              <a:srgbClr val="93C47D"/>
             </a:solidFill>
             <a:ln>
               <a:noFill/>
@@ -5842,7 +6183,7 @@
         </p:sp>
         <p:sp>
           <p:nvSpPr>
-            <p:cNvPr id="59" name="Google Shape;59;p6"/>
+            <p:cNvPr id="60" name="Google Shape;60;p6"/>
             <p:cNvSpPr/>
             <p:nvPr/>
           </p:nvSpPr>
@@ -5857,7 +6198,7 @@
               </a:avLst>
             </a:prstGeom>
             <a:solidFill>
-              <a:schemeClr val="lt2"/>
+              <a:srgbClr val="41973E"/>
             </a:solidFill>
             <a:ln>
               <a:noFill/>
@@ -5888,7 +6229,7 @@
       </p:grpSp>
       <p:sp>
         <p:nvSpPr>
-          <p:cNvPr id="60" name="Google Shape;60;p6"/>
+          <p:cNvPr id="61" name="Google Shape;61;p6"/>
           <p:cNvSpPr txBox="1"/>
           <p:nvPr>
             <p:ph type="title"/>
@@ -6013,7 +6354,7 @@
       </p:sp>
       <p:sp>
         <p:nvSpPr>
-          <p:cNvPr id="61" name="Google Shape;61;p6"/>
+          <p:cNvPr id="62" name="Google Shape;62;p6"/>
           <p:cNvSpPr txBox="1"/>
           <p:nvPr>
             <p:ph idx="12" type="sldNum"/>
@@ -6101,7 +6442,7 @@
   <p:cSld name="ONE_COLUMN_TEXT">
     <p:spTree>
       <p:nvGrpSpPr>
-        <p:cNvPr id="62" name="Shape 62"/>
+        <p:cNvPr id="63" name="Shape 63"/>
         <p:cNvGrpSpPr/>
         <p:nvPr/>
       </p:nvGrpSpPr>
@@ -6115,7 +6456,7 @@
       </p:grpSpPr>
       <p:grpSp>
         <p:nvGrpSpPr>
-          <p:cNvPr id="63" name="Google Shape;63;p7"/>
+          <p:cNvPr id="64" name="Google Shape;64;p7"/>
           <p:cNvGrpSpPr/>
           <p:nvPr/>
         </p:nvGrpSpPr>
@@ -6129,7 +6470,7 @@
         </p:grpSpPr>
         <p:sp>
           <p:nvSpPr>
-            <p:cNvPr id="64" name="Google Shape;64;p7"/>
+            <p:cNvPr id="65" name="Google Shape;65;p7"/>
             <p:cNvSpPr/>
             <p:nvPr/>
           </p:nvSpPr>
@@ -6144,7 +6485,7 @@
               </a:avLst>
             </a:prstGeom>
             <a:solidFill>
-              <a:schemeClr val="accent1"/>
+              <a:srgbClr val="93C47D"/>
             </a:solidFill>
             <a:ln>
               <a:noFill/>
@@ -6174,7 +6515,7 @@
         </p:sp>
         <p:sp>
           <p:nvSpPr>
-            <p:cNvPr id="65" name="Google Shape;65;p7"/>
+            <p:cNvPr id="66" name="Google Shape;66;p7"/>
             <p:cNvSpPr/>
             <p:nvPr/>
           </p:nvSpPr>
@@ -6189,7 +6530,7 @@
               </a:avLst>
             </a:prstGeom>
             <a:solidFill>
-              <a:schemeClr val="lt2"/>
+              <a:srgbClr val="41973E"/>
             </a:solidFill>
             <a:ln>
               <a:noFill/>
@@ -6220,7 +6561,7 @@
       </p:grpSp>
       <p:sp>
         <p:nvSpPr>
-          <p:cNvPr id="66" name="Google Shape;66;p7"/>
+          <p:cNvPr id="67" name="Google Shape;67;p7"/>
           <p:cNvSpPr txBox="1"/>
           <p:nvPr>
             <p:ph type="title"/>
@@ -6345,7 +6686,7 @@
       </p:sp>
       <p:sp>
         <p:nvSpPr>
-          <p:cNvPr id="67" name="Google Shape;67;p7"/>
+          <p:cNvPr id="68" name="Google Shape;68;p7"/>
           <p:cNvSpPr txBox="1"/>
           <p:nvPr>
             <p:ph idx="1" type="body"/>
@@ -6470,7 +6811,7 @@
       </p:sp>
       <p:sp>
         <p:nvSpPr>
-          <p:cNvPr id="68" name="Google Shape;68;p7"/>
+          <p:cNvPr id="69" name="Google Shape;69;p7"/>
           <p:cNvSpPr txBox="1"/>
           <p:nvPr>
             <p:ph idx="12" type="sldNum"/>
@@ -6558,7 +6899,7 @@
   <p:cSld name="MAIN_POINT">
     <p:spTree>
       <p:nvGrpSpPr>
-        <p:cNvPr id="69" name="Shape 69"/>
+        <p:cNvPr id="70" name="Shape 70"/>
         <p:cNvGrpSpPr/>
         <p:nvPr/>
       </p:nvGrpSpPr>
@@ -6572,7 +6913,7 @@
       </p:grpSpPr>
       <p:grpSp>
         <p:nvGrpSpPr>
-          <p:cNvPr id="70" name="Google Shape;70;p8"/>
+          <p:cNvPr id="71" name="Google Shape;71;p8"/>
           <p:cNvGrpSpPr/>
           <p:nvPr/>
         </p:nvGrpSpPr>
@@ -6586,7 +6927,7 @@
         </p:grpSpPr>
         <p:sp>
           <p:nvSpPr>
-            <p:cNvPr id="71" name="Google Shape;71;p8"/>
+            <p:cNvPr id="72" name="Google Shape;72;p8"/>
             <p:cNvSpPr/>
             <p:nvPr/>
           </p:nvSpPr>
@@ -6633,7 +6974,7 @@
         </p:sp>
         <p:sp>
           <p:nvSpPr>
-            <p:cNvPr id="72" name="Google Shape;72;p8"/>
+            <p:cNvPr id="73" name="Google Shape;73;p8"/>
             <p:cNvSpPr/>
             <p:nvPr/>
           </p:nvSpPr>
@@ -6680,7 +7021,7 @@
         </p:sp>
         <p:sp>
           <p:nvSpPr>
-            <p:cNvPr id="73" name="Google Shape;73;p8"/>
+            <p:cNvPr id="74" name="Google Shape;74;p8"/>
             <p:cNvSpPr/>
             <p:nvPr/>
           </p:nvSpPr>
@@ -6727,7 +7068,7 @@
         </p:sp>
         <p:sp>
           <p:nvSpPr>
-            <p:cNvPr id="74" name="Google Shape;74;p8"/>
+            <p:cNvPr id="75" name="Google Shape;75;p8"/>
             <p:cNvSpPr/>
             <p:nvPr/>
           </p:nvSpPr>
@@ -6774,7 +7115,7 @@
         </p:sp>
         <p:sp>
           <p:nvSpPr>
-            <p:cNvPr id="75" name="Google Shape;75;p8"/>
+            <p:cNvPr id="76" name="Google Shape;76;p8"/>
             <p:cNvSpPr/>
             <p:nvPr/>
           </p:nvSpPr>
@@ -6821,7 +7162,7 @@
         </p:sp>
         <p:sp>
           <p:nvSpPr>
-            <p:cNvPr id="76" name="Google Shape;76;p8"/>
+            <p:cNvPr id="77" name="Google Shape;77;p8"/>
             <p:cNvSpPr/>
             <p:nvPr/>
           </p:nvSpPr>
@@ -6868,7 +7209,7 @@
         </p:sp>
         <p:sp>
           <p:nvSpPr>
-            <p:cNvPr id="77" name="Google Shape;77;p8"/>
+            <p:cNvPr id="78" name="Google Shape;78;p8"/>
             <p:cNvSpPr/>
             <p:nvPr/>
           </p:nvSpPr>
@@ -6915,7 +7256,7 @@
         </p:sp>
         <p:sp>
           <p:nvSpPr>
-            <p:cNvPr id="78" name="Google Shape;78;p8"/>
+            <p:cNvPr id="79" name="Google Shape;79;p8"/>
             <p:cNvSpPr/>
             <p:nvPr/>
           </p:nvSpPr>
@@ -6930,7 +7271,7 @@
               </a:avLst>
             </a:prstGeom>
             <a:solidFill>
-              <a:schemeClr val="lt2"/>
+              <a:srgbClr val="41973E"/>
             </a:solidFill>
             <a:ln>
               <a:noFill/>
@@ -6960,7 +7301,7 @@
         </p:sp>
         <p:sp>
           <p:nvSpPr>
-            <p:cNvPr id="79" name="Google Shape;79;p8"/>
+            <p:cNvPr id="80" name="Google Shape;80;p8"/>
             <p:cNvSpPr/>
             <p:nvPr/>
           </p:nvSpPr>
@@ -7007,7 +7348,7 @@
         </p:sp>
         <p:sp>
           <p:nvSpPr>
-            <p:cNvPr id="80" name="Google Shape;80;p8"/>
+            <p:cNvPr id="81" name="Google Shape;81;p8"/>
             <p:cNvSpPr/>
             <p:nvPr/>
           </p:nvSpPr>
@@ -7054,7 +7395,7 @@
         </p:sp>
         <p:sp>
           <p:nvSpPr>
-            <p:cNvPr id="81" name="Google Shape;81;p8"/>
+            <p:cNvPr id="82" name="Google Shape;82;p8"/>
             <p:cNvSpPr/>
             <p:nvPr/>
           </p:nvSpPr>
@@ -7101,7 +7442,7 @@
         </p:sp>
         <p:sp>
           <p:nvSpPr>
-            <p:cNvPr id="82" name="Google Shape;82;p8"/>
+            <p:cNvPr id="83" name="Google Shape;83;p8"/>
             <p:cNvSpPr/>
             <p:nvPr/>
           </p:nvSpPr>
@@ -7148,7 +7489,7 @@
         </p:sp>
         <p:sp>
           <p:nvSpPr>
-            <p:cNvPr id="83" name="Google Shape;83;p8"/>
+            <p:cNvPr id="84" name="Google Shape;84;p8"/>
             <p:cNvSpPr/>
             <p:nvPr/>
           </p:nvSpPr>
@@ -7195,7 +7536,7 @@
         </p:sp>
         <p:sp>
           <p:nvSpPr>
-            <p:cNvPr id="84" name="Google Shape;84;p8"/>
+            <p:cNvPr id="85" name="Google Shape;85;p8"/>
             <p:cNvSpPr/>
             <p:nvPr/>
           </p:nvSpPr>
@@ -7210,7 +7551,7 @@
               </a:avLst>
             </a:prstGeom>
             <a:solidFill>
-              <a:schemeClr val="accent1"/>
+              <a:srgbClr val="93C47D"/>
             </a:solidFill>
             <a:ln>
               <a:noFill/>
@@ -7240,7 +7581,7 @@
         </p:sp>
         <p:sp>
           <p:nvSpPr>
-            <p:cNvPr id="85" name="Google Shape;85;p8"/>
+            <p:cNvPr id="86" name="Google Shape;86;p8"/>
             <p:cNvSpPr/>
             <p:nvPr/>
           </p:nvSpPr>
@@ -7287,7 +7628,7 @@
         </p:sp>
         <p:sp>
           <p:nvSpPr>
-            <p:cNvPr id="86" name="Google Shape;86;p8"/>
+            <p:cNvPr id="87" name="Google Shape;87;p8"/>
             <p:cNvSpPr/>
             <p:nvPr/>
           </p:nvSpPr>
@@ -7334,7 +7675,7 @@
         </p:sp>
         <p:sp>
           <p:nvSpPr>
-            <p:cNvPr id="87" name="Google Shape;87;p8"/>
+            <p:cNvPr id="88" name="Google Shape;88;p8"/>
             <p:cNvSpPr/>
             <p:nvPr/>
           </p:nvSpPr>
@@ -7381,7 +7722,7 @@
         </p:sp>
         <p:sp>
           <p:nvSpPr>
-            <p:cNvPr id="88" name="Google Shape;88;p8"/>
+            <p:cNvPr id="89" name="Google Shape;89;p8"/>
             <p:cNvSpPr/>
             <p:nvPr/>
           </p:nvSpPr>
@@ -7429,7 +7770,7 @@
       </p:grpSp>
       <p:sp>
         <p:nvSpPr>
-          <p:cNvPr id="89" name="Google Shape;89;p8"/>
+          <p:cNvPr id="90" name="Google Shape;90;p8"/>
           <p:cNvSpPr txBox="1"/>
           <p:nvPr>
             <p:ph type="title"/>
@@ -7554,7 +7895,7 @@
       </p:sp>
       <p:sp>
         <p:nvSpPr>
-          <p:cNvPr id="90" name="Google Shape;90;p8"/>
+          <p:cNvPr id="91" name="Google Shape;91;p8"/>
           <p:cNvSpPr txBox="1"/>
           <p:nvPr>
             <p:ph idx="12" type="sldNum"/>
@@ -7642,7 +7983,7 @@
   <p:cSld name="SECTION_TITLE_AND_DESCRIPTION">
     <p:spTree>
       <p:nvGrpSpPr>
-        <p:cNvPr id="91" name="Shape 91"/>
+        <p:cNvPr id="92" name="Shape 92"/>
         <p:cNvGrpSpPr/>
         <p:nvPr/>
       </p:nvGrpSpPr>
@@ -7656,7 +7997,7 @@
       </p:grpSpPr>
       <p:grpSp>
         <p:nvGrpSpPr>
-          <p:cNvPr id="92" name="Google Shape;92;p9"/>
+          <p:cNvPr id="93" name="Google Shape;93;p9"/>
           <p:cNvGrpSpPr/>
           <p:nvPr/>
         </p:nvGrpSpPr>
@@ -7670,7 +8011,7 @@
         </p:grpSpPr>
         <p:sp>
           <p:nvSpPr>
-            <p:cNvPr id="93" name="Google Shape;93;p9"/>
+            <p:cNvPr id="94" name="Google Shape;94;p9"/>
             <p:cNvSpPr/>
             <p:nvPr/>
           </p:nvSpPr>
@@ -7715,7 +8056,7 @@
         </p:sp>
         <p:sp>
           <p:nvSpPr>
-            <p:cNvPr id="94" name="Google Shape;94;p9"/>
+            <p:cNvPr id="95" name="Google Shape;95;p9"/>
             <p:cNvSpPr/>
             <p:nvPr/>
           </p:nvSpPr>
@@ -7761,7 +8102,7 @@
       </p:grpSp>
       <p:sp>
         <p:nvSpPr>
-          <p:cNvPr id="95" name="Google Shape;95;p9"/>
+          <p:cNvPr id="96" name="Google Shape;96;p9"/>
           <p:cNvSpPr txBox="1"/>
           <p:nvPr>
             <p:ph type="title"/>
@@ -7886,7 +8227,7 @@
       </p:sp>
       <p:sp>
         <p:nvSpPr>
-          <p:cNvPr id="96" name="Google Shape;96;p9"/>
+          <p:cNvPr id="97" name="Google Shape;97;p9"/>
           <p:cNvSpPr txBox="1"/>
           <p:nvPr>
             <p:ph idx="1" type="subTitle"/>
@@ -8038,7 +8379,7 @@
       </p:sp>
       <p:sp>
         <p:nvSpPr>
-          <p:cNvPr id="97" name="Google Shape;97;p9"/>
+          <p:cNvPr id="98" name="Google Shape;98;p9"/>
           <p:cNvSpPr txBox="1"/>
           <p:nvPr>
             <p:ph idx="2" type="body"/>
@@ -8163,7 +8504,7 @@
       </p:sp>
       <p:sp>
         <p:nvSpPr>
-          <p:cNvPr id="98" name="Google Shape;98;p9"/>
+          <p:cNvPr id="99" name="Google Shape;99;p9"/>
           <p:cNvSpPr txBox="1"/>
           <p:nvPr>
             <p:ph idx="12" type="sldNum"/>
@@ -8251,7 +8592,7 @@
   <p:cSld name="CAPTION_ONLY">
     <p:spTree>
       <p:nvGrpSpPr>
-        <p:cNvPr id="99" name="Shape 99"/>
+        <p:cNvPr id="100" name="Shape 100"/>
         <p:cNvGrpSpPr/>
         <p:nvPr/>
       </p:nvGrpSpPr>
@@ -8265,7 +8606,7 @@
       </p:grpSpPr>
       <p:grpSp>
         <p:nvGrpSpPr>
-          <p:cNvPr id="100" name="Google Shape;100;p10"/>
+          <p:cNvPr id="101" name="Google Shape;101;p10"/>
           <p:cNvGrpSpPr/>
           <p:nvPr/>
         </p:nvGrpSpPr>
@@ -8279,7 +8620,7 @@
         </p:grpSpPr>
         <p:sp>
           <p:nvSpPr>
-            <p:cNvPr id="101" name="Google Shape;101;p10"/>
+            <p:cNvPr id="102" name="Google Shape;102;p10"/>
             <p:cNvSpPr/>
             <p:nvPr/>
           </p:nvSpPr>
@@ -8326,7 +8667,7 @@
         </p:sp>
         <p:sp>
           <p:nvSpPr>
-            <p:cNvPr id="102" name="Google Shape;102;p10"/>
+            <p:cNvPr id="103" name="Google Shape;103;p10"/>
             <p:cNvSpPr/>
             <p:nvPr/>
           </p:nvSpPr>
@@ -8374,7 +8715,7 @@
       </p:grpSp>
       <p:sp>
         <p:nvSpPr>
-          <p:cNvPr id="103" name="Google Shape;103;p10"/>
+          <p:cNvPr id="104" name="Google Shape;104;p10"/>
           <p:cNvSpPr txBox="1"/>
           <p:nvPr>
             <p:ph idx="1" type="body"/>
@@ -8414,7 +8755,7 @@
       </p:sp>
       <p:sp>
         <p:nvSpPr>
-          <p:cNvPr id="104" name="Google Shape;104;p10"/>
+          <p:cNvPr id="105" name="Google Shape;105;p10"/>
           <p:cNvSpPr txBox="1"/>
           <p:nvPr>
             <p:ph idx="12" type="sldNum"/>
@@ -8503,7 +8844,7 @@
     <p:bg>
       <p:bgPr>
         <a:solidFill>
-          <a:schemeClr val="dk1"/>
+          <a:schemeClr val="lt1"/>
         </a:solidFill>
       </p:bgPr>
     </p:bg>
@@ -8555,14 +8896,14 @@
                 <a:spcPts val="0"/>
               </a:spcAft>
               <a:buClr>
-                <a:schemeClr val="lt1"/>
+                <a:srgbClr val="41973E"/>
               </a:buClr>
               <a:buSzPts val="2800"/>
               <a:buFont typeface="Montserrat"/>
               <a:buNone/>
               <a:defRPr sz="2800">
                 <a:solidFill>
-                  <a:schemeClr val="lt1"/>
+                  <a:srgbClr val="41973E"/>
                 </a:solidFill>
                 <a:latin typeface="Montserrat"/>
                 <a:ea typeface="Montserrat"/>
@@ -8578,14 +8919,14 @@
                 <a:spcPts val="0"/>
               </a:spcAft>
               <a:buClr>
-                <a:schemeClr val="lt1"/>
+                <a:srgbClr val="41973E"/>
               </a:buClr>
               <a:buSzPts val="2800"/>
               <a:buFont typeface="Montserrat"/>
               <a:buNone/>
               <a:defRPr sz="2800">
                 <a:solidFill>
-                  <a:schemeClr val="lt1"/>
+                  <a:srgbClr val="41973E"/>
                 </a:solidFill>
                 <a:latin typeface="Montserrat"/>
                 <a:ea typeface="Montserrat"/>
@@ -8601,14 +8942,14 @@
                 <a:spcPts val="0"/>
               </a:spcAft>
               <a:buClr>
-                <a:schemeClr val="lt1"/>
+                <a:srgbClr val="41973E"/>
               </a:buClr>
               <a:buSzPts val="2800"/>
               <a:buFont typeface="Montserrat"/>
               <a:buNone/>
               <a:defRPr sz="2800">
                 <a:solidFill>
-                  <a:schemeClr val="lt1"/>
+                  <a:srgbClr val="41973E"/>
                 </a:solidFill>
                 <a:latin typeface="Montserrat"/>
                 <a:ea typeface="Montserrat"/>
@@ -8624,14 +8965,14 @@
                 <a:spcPts val="0"/>
               </a:spcAft>
               <a:buClr>
-                <a:schemeClr val="lt1"/>
+                <a:srgbClr val="41973E"/>
               </a:buClr>
               <a:buSzPts val="2800"/>
               <a:buFont typeface="Montserrat"/>
               <a:buNone/>
               <a:defRPr sz="2800">
                 <a:solidFill>
-                  <a:schemeClr val="lt1"/>
+                  <a:srgbClr val="41973E"/>
                 </a:solidFill>
                 <a:latin typeface="Montserrat"/>
                 <a:ea typeface="Montserrat"/>
@@ -8647,14 +8988,14 @@
                 <a:spcPts val="0"/>
               </a:spcAft>
               <a:buClr>
-                <a:schemeClr val="lt1"/>
+                <a:srgbClr val="41973E"/>
               </a:buClr>
               <a:buSzPts val="2800"/>
               <a:buFont typeface="Montserrat"/>
               <a:buNone/>
               <a:defRPr sz="2800">
                 <a:solidFill>
-                  <a:schemeClr val="lt1"/>
+                  <a:srgbClr val="41973E"/>
                 </a:solidFill>
                 <a:latin typeface="Montserrat"/>
                 <a:ea typeface="Montserrat"/>
@@ -8670,14 +9011,14 @@
                 <a:spcPts val="0"/>
               </a:spcAft>
               <a:buClr>
-                <a:schemeClr val="lt1"/>
+                <a:srgbClr val="41973E"/>
               </a:buClr>
               <a:buSzPts val="2800"/>
               <a:buFont typeface="Montserrat"/>
               <a:buNone/>
               <a:defRPr sz="2800">
                 <a:solidFill>
-                  <a:schemeClr val="lt1"/>
+                  <a:srgbClr val="41973E"/>
                 </a:solidFill>
                 <a:latin typeface="Montserrat"/>
                 <a:ea typeface="Montserrat"/>
@@ -8693,14 +9034,14 @@
                 <a:spcPts val="0"/>
               </a:spcAft>
               <a:buClr>
-                <a:schemeClr val="lt1"/>
+                <a:srgbClr val="41973E"/>
               </a:buClr>
               <a:buSzPts val="2800"/>
               <a:buFont typeface="Montserrat"/>
               <a:buNone/>
               <a:defRPr sz="2800">
                 <a:solidFill>
-                  <a:schemeClr val="lt1"/>
+                  <a:srgbClr val="41973E"/>
                 </a:solidFill>
                 <a:latin typeface="Montserrat"/>
                 <a:ea typeface="Montserrat"/>
@@ -8716,14 +9057,14 @@
                 <a:spcPts val="0"/>
               </a:spcAft>
               <a:buClr>
-                <a:schemeClr val="lt1"/>
+                <a:srgbClr val="41973E"/>
               </a:buClr>
               <a:buSzPts val="2800"/>
               <a:buFont typeface="Montserrat"/>
               <a:buNone/>
               <a:defRPr sz="2800">
                 <a:solidFill>
-                  <a:schemeClr val="lt1"/>
+                  <a:srgbClr val="41973E"/>
                 </a:solidFill>
                 <a:latin typeface="Montserrat"/>
                 <a:ea typeface="Montserrat"/>
@@ -8739,14 +9080,14 @@
                 <a:spcPts val="0"/>
               </a:spcAft>
               <a:buClr>
-                <a:schemeClr val="lt1"/>
+                <a:srgbClr val="41973E"/>
               </a:buClr>
               <a:buSzPts val="2800"/>
               <a:buFont typeface="Montserrat"/>
               <a:buNone/>
               <a:defRPr sz="2800">
                 <a:solidFill>
-                  <a:schemeClr val="lt1"/>
+                  <a:srgbClr val="41973E"/>
                 </a:solidFill>
                 <a:latin typeface="Montserrat"/>
                 <a:ea typeface="Montserrat"/>
@@ -8795,14 +9136,14 @@
                 <a:spcPts val="0"/>
               </a:spcAft>
               <a:buClr>
-                <a:schemeClr val="lt1"/>
+                <a:srgbClr val="41973E"/>
               </a:buClr>
               <a:buSzPts val="1300"/>
               <a:buFont typeface="Lato"/>
               <a:buChar char="●"/>
               <a:defRPr sz="1300">
                 <a:solidFill>
-                  <a:schemeClr val="lt1"/>
+                  <a:srgbClr val="41973E"/>
                 </a:solidFill>
                 <a:latin typeface="Lato"/>
                 <a:ea typeface="Lato"/>
@@ -8821,14 +9162,14 @@
                 <a:spcPts val="0"/>
               </a:spcAft>
               <a:buClr>
-                <a:schemeClr val="lt1"/>
+                <a:srgbClr val="41973E"/>
               </a:buClr>
               <a:buSzPts val="1100"/>
               <a:buFont typeface="Lato"/>
               <a:buChar char="○"/>
               <a:defRPr sz="1100">
                 <a:solidFill>
-                  <a:schemeClr val="lt1"/>
+                  <a:srgbClr val="41973E"/>
                 </a:solidFill>
                 <a:latin typeface="Lato"/>
                 <a:ea typeface="Lato"/>
@@ -8847,14 +9188,14 @@
                 <a:spcPts val="0"/>
               </a:spcAft>
               <a:buClr>
-                <a:schemeClr val="lt1"/>
+                <a:srgbClr val="41973E"/>
               </a:buClr>
               <a:buSzPts val="1100"/>
               <a:buFont typeface="Lato"/>
               <a:buChar char="■"/>
               <a:defRPr sz="1100">
                 <a:solidFill>
-                  <a:schemeClr val="lt1"/>
+                  <a:srgbClr val="41973E"/>
                 </a:solidFill>
                 <a:latin typeface="Lato"/>
                 <a:ea typeface="Lato"/>
@@ -8873,14 +9214,14 @@
                 <a:spcPts val="0"/>
               </a:spcAft>
               <a:buClr>
-                <a:schemeClr val="lt1"/>
+                <a:srgbClr val="41973E"/>
               </a:buClr>
               <a:buSzPts val="1100"/>
               <a:buFont typeface="Lato"/>
               <a:buChar char="●"/>
               <a:defRPr sz="1100">
                 <a:solidFill>
-                  <a:schemeClr val="lt1"/>
+                  <a:srgbClr val="41973E"/>
                 </a:solidFill>
                 <a:latin typeface="Lato"/>
                 <a:ea typeface="Lato"/>
@@ -8899,14 +9240,14 @@
                 <a:spcPts val="0"/>
               </a:spcAft>
               <a:buClr>
-                <a:schemeClr val="lt1"/>
+                <a:srgbClr val="41973E"/>
               </a:buClr>
               <a:buSzPts val="1100"/>
               <a:buFont typeface="Lato"/>
               <a:buChar char="○"/>
               <a:defRPr sz="1100">
                 <a:solidFill>
-                  <a:schemeClr val="lt1"/>
+                  <a:srgbClr val="41973E"/>
                 </a:solidFill>
                 <a:latin typeface="Lato"/>
                 <a:ea typeface="Lato"/>
@@ -8925,14 +9266,14 @@
                 <a:spcPts val="0"/>
               </a:spcAft>
               <a:buClr>
-                <a:schemeClr val="lt1"/>
+                <a:srgbClr val="41973E"/>
               </a:buClr>
               <a:buSzPts val="1100"/>
               <a:buFont typeface="Lato"/>
               <a:buChar char="■"/>
               <a:defRPr sz="1100">
                 <a:solidFill>
-                  <a:schemeClr val="lt1"/>
+                  <a:srgbClr val="41973E"/>
                 </a:solidFill>
                 <a:latin typeface="Lato"/>
                 <a:ea typeface="Lato"/>
@@ -8951,14 +9292,14 @@
                 <a:spcPts val="0"/>
               </a:spcAft>
               <a:buClr>
-                <a:schemeClr val="lt1"/>
+                <a:srgbClr val="41973E"/>
               </a:buClr>
               <a:buSzPts val="1100"/>
               <a:buFont typeface="Lato"/>
               <a:buChar char="●"/>
               <a:defRPr sz="1100">
                 <a:solidFill>
-                  <a:schemeClr val="lt1"/>
+                  <a:srgbClr val="41973E"/>
                 </a:solidFill>
                 <a:latin typeface="Lato"/>
                 <a:ea typeface="Lato"/>
@@ -8977,14 +9318,14 @@
                 <a:spcPts val="0"/>
               </a:spcAft>
               <a:buClr>
-                <a:schemeClr val="lt1"/>
+                <a:srgbClr val="41973E"/>
               </a:buClr>
               <a:buSzPts val="1100"/>
               <a:buFont typeface="Lato"/>
               <a:buChar char="○"/>
               <a:defRPr sz="1100">
                 <a:solidFill>
-                  <a:schemeClr val="lt1"/>
+                  <a:srgbClr val="41973E"/>
                 </a:solidFill>
                 <a:latin typeface="Lato"/>
                 <a:ea typeface="Lato"/>
@@ -9003,14 +9344,14 @@
                 <a:spcPts val="0"/>
               </a:spcAft>
               <a:buClr>
-                <a:schemeClr val="lt1"/>
+                <a:srgbClr val="41973E"/>
               </a:buClr>
               <a:buSzPts val="1100"/>
               <a:buFont typeface="Lato"/>
               <a:buChar char="■"/>
               <a:defRPr sz="1100">
                 <a:solidFill>
-                  <a:schemeClr val="lt1"/>
+                  <a:srgbClr val="41973E"/>
                 </a:solidFill>
                 <a:latin typeface="Lato"/>
                 <a:ea typeface="Lato"/>
@@ -9889,7 +10230,7 @@
   <p:cSld>
     <p:spTree>
       <p:nvGrpSpPr>
-        <p:cNvPr id="133" name="Shape 133"/>
+        <p:cNvPr id="134" name="Shape 134"/>
         <p:cNvGrpSpPr/>
         <p:nvPr/>
       </p:nvGrpSpPr>
@@ -9903,7 +10244,7 @@
       </p:grpSpPr>
       <p:sp>
         <p:nvSpPr>
-          <p:cNvPr id="134" name="Google Shape;134;p13"/>
+          <p:cNvPr id="135" name="Google Shape;135;p13"/>
           <p:cNvSpPr txBox="1"/>
           <p:nvPr>
             <p:ph type="ctrTitle"/>
@@ -9911,8 +10252,8 @@
         </p:nvSpPr>
         <p:spPr>
           <a:xfrm>
-            <a:off x="3356700" y="1782300"/>
-            <a:ext cx="5017500" cy="1578900"/>
+            <a:off x="2419350" y="2372675"/>
+            <a:ext cx="4305300" cy="2032800"/>
           </a:xfrm>
           <a:prstGeom prst="rect">
             <a:avLst/>
@@ -9920,7 +10261,7 @@
         </p:spPr>
         <p:txBody>
           <a:bodyPr anchorCtr="0" anchor="t" bIns="91425" lIns="91425" spcFirstLastPara="1" rIns="91425" wrap="square" tIns="91425">
-            <a:normAutofit fontScale="90000"/>
+            <a:normAutofit/>
           </a:bodyPr>
           <a:lstStyle/>
           <a:p>
@@ -9934,24 +10275,24 @@
               <a:buNone/>
             </a:pPr>
             <a:r>
-              <a:rPr lang="en"/>
-              <a:t>MealMind: Prepping the </a:t>
+              <a:rPr lang="en" sz="3700"/>
+              <a:t>Prepping the </a:t>
             </a:r>
             <a:r>
-              <a:rPr lang="en"/>
+              <a:rPr lang="en" sz="3700"/>
               <a:t>Ingredients</a:t>
             </a:r>
             <a:r>
-              <a:rPr lang="en"/>
+              <a:rPr lang="en" sz="3700"/>
               <a:t> for Smarter Cooking</a:t>
             </a:r>
-            <a:endParaRPr/>
+            <a:endParaRPr sz="3700"/>
           </a:p>
         </p:txBody>
       </p:sp>
       <p:sp>
         <p:nvSpPr>
-          <p:cNvPr id="135" name="Google Shape;135;p13"/>
+          <p:cNvPr id="136" name="Google Shape;136;p13"/>
           <p:cNvSpPr txBox="1"/>
           <p:nvPr>
             <p:ph idx="1" type="subTitle"/>
@@ -9959,7 +10300,7 @@
         </p:nvSpPr>
         <p:spPr>
           <a:xfrm>
-            <a:off x="3642450" y="3504200"/>
+            <a:off x="4421800" y="4405475"/>
             <a:ext cx="3470700" cy="506100"/>
           </a:xfrm>
           <a:prstGeom prst="rect">
@@ -10107,7 +10448,7 @@
   <p:cSld>
     <p:spTree>
       <p:nvGrpSpPr>
-        <p:cNvPr id="139" name="Shape 139"/>
+        <p:cNvPr id="140" name="Shape 140"/>
         <p:cNvGrpSpPr/>
         <p:nvPr/>
       </p:nvGrpSpPr>
@@ -10121,7 +10462,7 @@
       </p:grpSpPr>
       <p:sp>
         <p:nvSpPr>
-          <p:cNvPr id="140" name="Google Shape;140;p14"/>
+          <p:cNvPr id="141" name="Google Shape;141;p14"/>
           <p:cNvSpPr txBox="1"/>
           <p:nvPr>
             <p:ph type="title"/>
@@ -10161,7 +10502,7 @@
       </p:sp>
       <p:sp>
         <p:nvSpPr>
-          <p:cNvPr id="141" name="Google Shape;141;p14"/>
+          <p:cNvPr id="142" name="Google Shape;142;p14"/>
           <p:cNvSpPr txBox="1"/>
           <p:nvPr>
             <p:ph idx="1" type="body"/>
@@ -10169,7 +10510,7 @@
         </p:nvSpPr>
         <p:spPr>
           <a:xfrm>
-            <a:off x="1297500" y="1307850"/>
+            <a:off x="1297500" y="1567550"/>
             <a:ext cx="7038900" cy="2911200"/>
           </a:xfrm>
           <a:prstGeom prst="rect">
@@ -10212,7 +10553,7 @@
   <p:cSld>
     <p:spTree>
       <p:nvGrpSpPr>
-        <p:cNvPr id="145" name="Shape 145"/>
+        <p:cNvPr id="146" name="Shape 146"/>
         <p:cNvGrpSpPr/>
         <p:nvPr/>
       </p:nvGrpSpPr>
@@ -10226,7 +10567,7 @@
       </p:grpSpPr>
       <p:sp>
         <p:nvSpPr>
-          <p:cNvPr id="146" name="Google Shape;146;p15"/>
+          <p:cNvPr id="147" name="Google Shape;147;p15"/>
           <p:cNvSpPr txBox="1"/>
           <p:nvPr>
             <p:ph type="title"/>
@@ -10234,7 +10575,7 @@
         </p:nvSpPr>
         <p:spPr>
           <a:xfrm>
-            <a:off x="1052550" y="393750"/>
+            <a:off x="1297500" y="393750"/>
             <a:ext cx="7038900" cy="914100"/>
           </a:xfrm>
           <a:prstGeom prst="rect">
@@ -10270,7 +10611,7 @@
       </p:sp>
       <p:sp>
         <p:nvSpPr>
-          <p:cNvPr id="147" name="Google Shape;147;p15"/>
+          <p:cNvPr id="148" name="Google Shape;148;p15"/>
           <p:cNvSpPr txBox="1"/>
           <p:nvPr>
             <p:ph idx="1" type="body"/>
@@ -10278,8 +10619,8 @@
         </p:nvSpPr>
         <p:spPr>
           <a:xfrm>
-            <a:off x="314425" y="1307850"/>
-            <a:ext cx="4042500" cy="2911200"/>
+            <a:off x="1297500" y="1567550"/>
+            <a:ext cx="7038900" cy="2911200"/>
           </a:xfrm>
           <a:prstGeom prst="rect">
             <a:avLst/>
@@ -10310,7 +10651,7 @@
       </p:sp>
       <p:pic>
         <p:nvPicPr>
-          <p:cNvPr id="148" name="Google Shape;148;p15" title="original-1276-1681402314-3.jpg"/>
+          <p:cNvPr id="149" name="Google Shape;149;p15" title="original-1276-1681402314-3.jpg"/>
           <p:cNvPicPr preferRelativeResize="0"/>
           <p:nvPr/>
         </p:nvPicPr>
@@ -10349,7 +10690,7 @@
   <p:cSld>
     <p:spTree>
       <p:nvGrpSpPr>
-        <p:cNvPr id="152" name="Shape 152"/>
+        <p:cNvPr id="153" name="Shape 153"/>
         <p:cNvGrpSpPr/>
         <p:nvPr/>
       </p:nvGrpSpPr>
@@ -10363,7 +10704,7 @@
       </p:grpSpPr>
       <p:sp>
         <p:nvSpPr>
-          <p:cNvPr id="153" name="Google Shape;153;p16"/>
+          <p:cNvPr id="154" name="Google Shape;154;p16"/>
           <p:cNvSpPr txBox="1"/>
           <p:nvPr>
             <p:ph type="title"/>
@@ -10403,7 +10744,7 @@
       </p:sp>
       <p:sp>
         <p:nvSpPr>
-          <p:cNvPr id="154" name="Google Shape;154;p16"/>
+          <p:cNvPr id="155" name="Google Shape;155;p16"/>
           <p:cNvSpPr txBox="1"/>
           <p:nvPr>
             <p:ph idx="1" type="body"/>
@@ -10515,7 +10856,7 @@
   <p:cSld>
     <p:spTree>
       <p:nvGrpSpPr>
-        <p:cNvPr id="158" name="Shape 158"/>
+        <p:cNvPr id="159" name="Shape 159"/>
         <p:cNvGrpSpPr/>
         <p:nvPr/>
       </p:nvGrpSpPr>
@@ -10529,7 +10870,7 @@
       </p:grpSpPr>
       <p:sp>
         <p:nvSpPr>
-          <p:cNvPr id="159" name="Google Shape;159;p17"/>
+          <p:cNvPr id="160" name="Google Shape;160;p17"/>
           <p:cNvSpPr txBox="1"/>
           <p:nvPr>
             <p:ph type="title"/>
@@ -10569,7 +10910,7 @@
       </p:sp>
       <p:sp>
         <p:nvSpPr>
-          <p:cNvPr id="160" name="Google Shape;160;p17"/>
+          <p:cNvPr id="161" name="Google Shape;161;p17"/>
           <p:cNvSpPr txBox="1"/>
           <p:nvPr>
             <p:ph idx="1" type="body"/>
@@ -10577,8 +10918,8 @@
         </p:nvSpPr>
         <p:spPr>
           <a:xfrm>
-            <a:off x="1100525" y="918900"/>
-            <a:ext cx="7584300" cy="4030800"/>
+            <a:off x="1297500" y="1567550"/>
+            <a:ext cx="7038900" cy="2911200"/>
           </a:xfrm>
           <a:prstGeom prst="rect">
             <a:avLst/>
@@ -10586,7 +10927,7 @@
         </p:spPr>
         <p:txBody>
           <a:bodyPr anchorCtr="0" anchor="t" bIns="91425" lIns="91425" spcFirstLastPara="1" rIns="91425" wrap="square" tIns="91425">
-            <a:normAutofit fontScale="85000" lnSpcReduction="20000"/>
+            <a:normAutofit fontScale="47500" lnSpcReduction="20000"/>
           </a:bodyPr>
           <a:lstStyle/>
           <a:p>
@@ -10641,7 +10982,7 @@
             <a:endParaRPr sz="1442"/>
           </a:p>
           <a:p>
-            <a:pPr indent="-306478" lvl="0" marL="457200" rtl="0" algn="l">
+            <a:pPr indent="-272120" lvl="0" marL="457200" rtl="0" algn="l">
               <a:spcBef>
                 <a:spcPts val="1200"/>
               </a:spcBef>
@@ -10690,7 +11031,7 @@
             <a:endParaRPr sz="1442"/>
           </a:p>
           <a:p>
-            <a:pPr indent="-306478" lvl="0" marL="457200" rtl="0" algn="l">
+            <a:pPr indent="-272120" lvl="0" marL="457200" rtl="0" algn="l">
               <a:spcBef>
                 <a:spcPts val="1200"/>
               </a:spcBef>
@@ -10707,7 +11048,7 @@
             <a:endParaRPr sz="1442"/>
           </a:p>
           <a:p>
-            <a:pPr indent="-306478" lvl="0" marL="457200" rtl="0" algn="l">
+            <a:pPr indent="-272120" lvl="0" marL="457200" rtl="0" algn="l">
               <a:spcBef>
                 <a:spcPts val="0"/>
               </a:spcBef>
@@ -10728,7 +11069,7 @@
             <a:endParaRPr sz="1442"/>
           </a:p>
           <a:p>
-            <a:pPr indent="-306478" lvl="0" marL="457200" rtl="0" algn="l">
+            <a:pPr indent="-272120" lvl="0" marL="457200" rtl="0" algn="l">
               <a:spcBef>
                 <a:spcPts val="0"/>
               </a:spcBef>
@@ -10830,7 +11171,7 @@
   <p:cSld>
     <p:spTree>
       <p:nvGrpSpPr>
-        <p:cNvPr id="164" name="Shape 164"/>
+        <p:cNvPr id="165" name="Shape 165"/>
         <p:cNvGrpSpPr/>
         <p:nvPr/>
       </p:nvGrpSpPr>
@@ -10844,7 +11185,7 @@
       </p:grpSpPr>
       <p:sp>
         <p:nvSpPr>
-          <p:cNvPr id="165" name="Google Shape;165;p18"/>
+          <p:cNvPr id="166" name="Google Shape;166;p18"/>
           <p:cNvSpPr txBox="1"/>
           <p:nvPr>
             <p:ph type="title"/>
@@ -10884,7 +11225,7 @@
       </p:sp>
       <p:sp>
         <p:nvSpPr>
-          <p:cNvPr id="166" name="Google Shape;166;p18"/>
+          <p:cNvPr id="167" name="Google Shape;167;p18"/>
           <p:cNvSpPr txBox="1"/>
           <p:nvPr>
             <p:ph idx="1" type="body"/>
@@ -10976,7 +11317,7 @@
       </p:sp>
       <p:pic>
         <p:nvPicPr>
-          <p:cNvPr id="167" name="Google Shape;167;p18"/>
+          <p:cNvPr id="168" name="Google Shape;168;p18"/>
           <p:cNvPicPr preferRelativeResize="0"/>
           <p:nvPr/>
         </p:nvPicPr>
@@ -11004,7 +11345,7 @@
       </p:pic>
       <p:pic>
         <p:nvPicPr>
-          <p:cNvPr id="168" name="Google Shape;168;p18"/>
+          <p:cNvPr id="169" name="Google Shape;169;p18"/>
           <p:cNvPicPr preferRelativeResize="0"/>
           <p:nvPr/>
         </p:nvPicPr>
@@ -11043,7 +11384,7 @@
   <p:cSld>
     <p:spTree>
       <p:nvGrpSpPr>
-        <p:cNvPr id="172" name="Shape 172"/>
+        <p:cNvPr id="173" name="Shape 173"/>
         <p:cNvGrpSpPr/>
         <p:nvPr/>
       </p:nvGrpSpPr>
@@ -11057,7 +11398,7 @@
       </p:grpSpPr>
       <p:sp>
         <p:nvSpPr>
-          <p:cNvPr id="173" name="Google Shape;173;p19"/>
+          <p:cNvPr id="174" name="Google Shape;174;p19"/>
           <p:cNvSpPr txBox="1"/>
           <p:nvPr>
             <p:ph type="title"/>
@@ -11097,7 +11438,7 @@
       </p:sp>
       <p:sp>
         <p:nvSpPr>
-          <p:cNvPr id="174" name="Google Shape;174;p19"/>
+          <p:cNvPr id="175" name="Google Shape;175;p19"/>
           <p:cNvSpPr txBox="1"/>
           <p:nvPr>
             <p:ph idx="1" type="body"/>
@@ -11181,7 +11522,7 @@
   <p:cSld>
     <p:spTree>
       <p:nvGrpSpPr>
-        <p:cNvPr id="178" name="Shape 178"/>
+        <p:cNvPr id="179" name="Shape 179"/>
         <p:cNvGrpSpPr/>
         <p:nvPr/>
       </p:nvGrpSpPr>
@@ -11195,7 +11536,7 @@
       </p:grpSpPr>
       <p:sp>
         <p:nvSpPr>
-          <p:cNvPr id="179" name="Google Shape;179;p20"/>
+          <p:cNvPr id="180" name="Google Shape;180;p20"/>
           <p:cNvSpPr txBox="1"/>
           <p:nvPr>
             <p:ph type="title"/>
@@ -11235,7 +11576,7 @@
       </p:sp>
       <p:sp>
         <p:nvSpPr>
-          <p:cNvPr id="180" name="Google Shape;180;p20"/>
+          <p:cNvPr id="181" name="Google Shape;181;p20"/>
           <p:cNvSpPr txBox="1"/>
           <p:nvPr>
             <p:ph idx="1" type="body"/>
@@ -11319,7 +11660,7 @@
   <p:cSld>
     <p:spTree>
       <p:nvGrpSpPr>
-        <p:cNvPr id="184" name="Shape 184"/>
+        <p:cNvPr id="185" name="Shape 185"/>
         <p:cNvGrpSpPr/>
         <p:nvPr/>
       </p:nvGrpSpPr>
@@ -11333,7 +11674,7 @@
       </p:grpSpPr>
       <p:sp>
         <p:nvSpPr>
-          <p:cNvPr id="185" name="Google Shape;185;p21"/>
+          <p:cNvPr id="186" name="Google Shape;186;p21"/>
           <p:cNvSpPr txBox="1"/>
           <p:nvPr>
             <p:ph type="title"/>
@@ -11373,7 +11714,7 @@
       </p:sp>
       <p:sp>
         <p:nvSpPr>
-          <p:cNvPr id="186" name="Google Shape;186;p21"/>
+          <p:cNvPr id="187" name="Google Shape;187;p21"/>
           <p:cNvSpPr txBox="1"/>
           <p:nvPr>
             <p:ph idx="1" type="body"/>
@@ -11381,8 +11722,8 @@
         </p:nvSpPr>
         <p:spPr>
           <a:xfrm>
-            <a:off x="6320400" y="393750"/>
-            <a:ext cx="2385300" cy="2337000"/>
+            <a:off x="5902325" y="711525"/>
+            <a:ext cx="2434200" cy="2911200"/>
           </a:xfrm>
           <a:prstGeom prst="rect">
             <a:avLst/>
@@ -11465,62 +11806,13 @@
       </p:sp>
       <p:sp>
         <p:nvSpPr>
-          <p:cNvPr id="187" name="Google Shape;187;p21"/>
-          <p:cNvSpPr txBox="1"/>
-          <p:nvPr/>
-        </p:nvSpPr>
-        <p:spPr>
-          <a:xfrm>
-            <a:off x="914400" y="1540700"/>
-            <a:ext cx="5406000" cy="2906100"/>
-          </a:xfrm>
-          <a:prstGeom prst="rect">
-            <a:avLst/>
-          </a:prstGeom>
-          <a:noFill/>
-          <a:ln>
-            <a:noFill/>
-          </a:ln>
-        </p:spPr>
-        <p:txBody>
-          <a:bodyPr anchorCtr="0" anchor="t" bIns="91425" lIns="91425" spcFirstLastPara="1" rIns="91425" wrap="square" tIns="91425">
-            <a:noAutofit/>
-          </a:bodyPr>
-          <a:lstStyle/>
-          <a:p>
-            <a:pPr indent="0" lvl="0" marL="0" rtl="0" algn="l">
-              <a:spcBef>
-                <a:spcPts val="0"/>
-              </a:spcBef>
-              <a:spcAft>
-                <a:spcPts val="0"/>
-              </a:spcAft>
-              <a:buNone/>
-            </a:pPr>
-            <a:r>
-              <a:t/>
-            </a:r>
-            <a:endParaRPr sz="1300">
-              <a:solidFill>
-                <a:schemeClr val="lt1"/>
-              </a:solidFill>
-              <a:latin typeface="Lato"/>
-              <a:ea typeface="Lato"/>
-              <a:cs typeface="Lato"/>
-              <a:sym typeface="Lato"/>
-            </a:endParaRPr>
-          </a:p>
-        </p:txBody>
-      </p:sp>
-      <p:sp>
-        <p:nvSpPr>
           <p:cNvPr id="188" name="Google Shape;188;p21"/>
           <p:cNvSpPr txBox="1"/>
           <p:nvPr/>
         </p:nvSpPr>
         <p:spPr>
           <a:xfrm>
-            <a:off x="1297500" y="1103325"/>
+            <a:off x="1297500" y="1307850"/>
             <a:ext cx="4444500" cy="3220800"/>
           </a:xfrm>
           <a:prstGeom prst="rect">
@@ -11552,7 +11844,7 @@
             <a:r>
               <a:rPr lang="en" sz="1300">
                 <a:solidFill>
-                  <a:schemeClr val="lt1"/>
+                  <a:srgbClr val="41973E"/>
                 </a:solidFill>
                 <a:latin typeface="Lato"/>
                 <a:ea typeface="Lato"/>
@@ -11564,7 +11856,7 @@
             <a:br>
               <a:rPr lang="en" sz="1300">
                 <a:solidFill>
-                  <a:schemeClr val="lt1"/>
+                  <a:srgbClr val="41973E"/>
                 </a:solidFill>
                 <a:latin typeface="Lato"/>
                 <a:ea typeface="Lato"/>
@@ -11575,7 +11867,7 @@
             <a:br>
               <a:rPr lang="en" sz="1300">
                 <a:solidFill>
-                  <a:schemeClr val="lt1"/>
+                  <a:srgbClr val="41973E"/>
                 </a:solidFill>
                 <a:latin typeface="Lato"/>
                 <a:ea typeface="Lato"/>
@@ -11586,7 +11878,7 @@
             <a:r>
               <a:rPr lang="en" sz="1300">
                 <a:solidFill>
-                  <a:schemeClr val="lt1"/>
+                  <a:srgbClr val="41973E"/>
                 </a:solidFill>
                 <a:latin typeface="Lato"/>
                 <a:ea typeface="Lato"/>
@@ -11597,7 +11889,7 @@
             </a:r>
             <a:endParaRPr sz="1300">
               <a:solidFill>
-                <a:schemeClr val="lt1"/>
+                <a:srgbClr val="41973E"/>
               </a:solidFill>
               <a:latin typeface="Lato"/>
               <a:ea typeface="Lato"/>

--- a/Documents/Phase 2/ProjectPhase2.pptx
+++ b/Documents/Phase 2/ProjectPhase2.pptx
@@ -1112,7 +1112,7 @@
   <p:cSld>
     <p:spTree>
       <p:nvGrpSpPr>
-        <p:cNvPr id="150" name="Shape 150"/>
+        <p:cNvPr id="149" name="Shape 149"/>
         <p:cNvGrpSpPr/>
         <p:nvPr/>
       </p:nvGrpSpPr>
@@ -1126,7 +1126,7 @@
       </p:grpSpPr>
       <p:sp>
         <p:nvSpPr>
-          <p:cNvPr id="151" name="Google Shape;151;g3698b5456d1_0_15:notes"/>
+          <p:cNvPr id="150" name="Google Shape;150;g3698b5456d1_0_15:notes"/>
           <p:cNvSpPr/>
           <p:nvPr>
             <p:ph idx="2" type="sldImg"/>
@@ -1161,7 +1161,7 @@
       </p:sp>
       <p:sp>
         <p:nvSpPr>
-          <p:cNvPr id="152" name="Google Shape;152;g3698b5456d1_0_15:notes"/>
+          <p:cNvPr id="151" name="Google Shape;151;g3698b5456d1_0_15:notes"/>
           <p:cNvSpPr txBox="1"/>
           <p:nvPr>
             <p:ph idx="1" type="body"/>
@@ -1211,7 +1211,7 @@
   <p:cSld>
     <p:spTree>
       <p:nvGrpSpPr>
-        <p:cNvPr id="156" name="Shape 156"/>
+        <p:cNvPr id="158" name="Shape 158"/>
         <p:cNvGrpSpPr/>
         <p:nvPr/>
       </p:nvGrpSpPr>
@@ -1225,7 +1225,7 @@
       </p:grpSpPr>
       <p:sp>
         <p:nvSpPr>
-          <p:cNvPr id="157" name="Google Shape;157;g36a50dade9c_1_0:notes"/>
+          <p:cNvPr id="159" name="Google Shape;159;g36a50dade9c_1_0:notes"/>
           <p:cNvSpPr/>
           <p:nvPr>
             <p:ph idx="2" type="sldImg"/>
@@ -1260,7 +1260,7 @@
       </p:sp>
       <p:sp>
         <p:nvSpPr>
-          <p:cNvPr id="158" name="Google Shape;158;g36a50dade9c_1_0:notes"/>
+          <p:cNvPr id="160" name="Google Shape;160;g36a50dade9c_1_0:notes"/>
           <p:cNvSpPr txBox="1"/>
           <p:nvPr>
             <p:ph idx="1" type="body"/>
@@ -1310,7 +1310,7 @@
   <p:cSld>
     <p:spTree>
       <p:nvGrpSpPr>
-        <p:cNvPr id="162" name="Shape 162"/>
+        <p:cNvPr id="164" name="Shape 164"/>
         <p:cNvGrpSpPr/>
         <p:nvPr/>
       </p:nvGrpSpPr>
@@ -1324,7 +1324,7 @@
       </p:grpSpPr>
       <p:sp>
         <p:nvSpPr>
-          <p:cNvPr id="163" name="Google Shape;163;g3698b5456d1_1_35:notes"/>
+          <p:cNvPr id="165" name="Google Shape;165;g3698b5456d1_1_35:notes"/>
           <p:cNvSpPr/>
           <p:nvPr>
             <p:ph idx="2" type="sldImg"/>
@@ -1359,7 +1359,7 @@
       </p:sp>
       <p:sp>
         <p:nvSpPr>
-          <p:cNvPr id="164" name="Google Shape;164;g3698b5456d1_1_35:notes"/>
+          <p:cNvPr id="166" name="Google Shape;166;g3698b5456d1_1_35:notes"/>
           <p:cNvSpPr txBox="1"/>
           <p:nvPr>
             <p:ph idx="1" type="body"/>
@@ -1409,7 +1409,7 @@
   <p:cSld>
     <p:spTree>
       <p:nvGrpSpPr>
-        <p:cNvPr id="170" name="Shape 170"/>
+        <p:cNvPr id="171" name="Shape 171"/>
         <p:cNvGrpSpPr/>
         <p:nvPr/>
       </p:nvGrpSpPr>
@@ -1423,7 +1423,7 @@
       </p:grpSpPr>
       <p:sp>
         <p:nvSpPr>
-          <p:cNvPr id="171" name="Google Shape;171;g3698b5456d1_1_5:notes"/>
+          <p:cNvPr id="172" name="Google Shape;172;g3698b5456d1_1_5:notes"/>
           <p:cNvSpPr/>
           <p:nvPr>
             <p:ph idx="2" type="sldImg"/>
@@ -1458,7 +1458,7 @@
       </p:sp>
       <p:sp>
         <p:nvSpPr>
-          <p:cNvPr id="172" name="Google Shape;172;g3698b5456d1_1_5:notes"/>
+          <p:cNvPr id="173" name="Google Shape;173;g3698b5456d1_1_5:notes"/>
           <p:cNvSpPr txBox="1"/>
           <p:nvPr>
             <p:ph idx="1" type="body"/>
@@ -1508,7 +1508,7 @@
   <p:cSld>
     <p:spTree>
       <p:nvGrpSpPr>
-        <p:cNvPr id="176" name="Shape 176"/>
+        <p:cNvPr id="177" name="Shape 177"/>
         <p:cNvGrpSpPr/>
         <p:nvPr/>
       </p:nvGrpSpPr>
@@ -1522,7 +1522,7 @@
       </p:grpSpPr>
       <p:sp>
         <p:nvSpPr>
-          <p:cNvPr id="177" name="Google Shape;177;g3698b5456d1_1_0:notes"/>
+          <p:cNvPr id="178" name="Google Shape;178;g3698b5456d1_1_0:notes"/>
           <p:cNvSpPr/>
           <p:nvPr>
             <p:ph idx="2" type="sldImg"/>
@@ -1557,7 +1557,7 @@
       </p:sp>
       <p:sp>
         <p:nvSpPr>
-          <p:cNvPr id="178" name="Google Shape;178;g3698b5456d1_1_0:notes"/>
+          <p:cNvPr id="179" name="Google Shape;179;g3698b5456d1_1_0:notes"/>
           <p:cNvSpPr txBox="1"/>
           <p:nvPr>
             <p:ph idx="1" type="body"/>
@@ -1607,7 +1607,7 @@
   <p:cSld>
     <p:spTree>
       <p:nvGrpSpPr>
-        <p:cNvPr id="182" name="Shape 182"/>
+        <p:cNvPr id="183" name="Shape 183"/>
         <p:cNvGrpSpPr/>
         <p:nvPr/>
       </p:nvGrpSpPr>
@@ -1621,7 +1621,7 @@
       </p:grpSpPr>
       <p:sp>
         <p:nvSpPr>
-          <p:cNvPr id="183" name="Google Shape;183;g3698b5456d1_1_45:notes"/>
+          <p:cNvPr id="184" name="Google Shape;184;g3698b5456d1_1_45:notes"/>
           <p:cNvSpPr/>
           <p:nvPr>
             <p:ph idx="2" type="sldImg"/>
@@ -1656,7 +1656,7 @@
       </p:sp>
       <p:sp>
         <p:nvSpPr>
-          <p:cNvPr id="184" name="Google Shape;184;g3698b5456d1_1_45:notes"/>
+          <p:cNvPr id="185" name="Google Shape;185;g3698b5456d1_1_45:notes"/>
           <p:cNvSpPr txBox="1"/>
           <p:nvPr>
             <p:ph idx="1" type="body"/>
@@ -9532,6 +9532,9 @@
     <p:sldLayoutId id="2147483657" r:id="rId10"/>
     <p:sldLayoutId id="2147483658" r:id="rId11"/>
   </p:sldLayoutIdLst>
+  <p:transition spd="med">
+    <p:fade/>
+  </p:transition>
   <p:hf dt="0" ftr="0" hdr="0" sldNum="0"/>
   <p:txStyles>
     <p:titleStyle>
@@ -10429,7 +10432,7 @@
             </a:pPr>
             <a:r>
               <a:rPr lang="en"/>
-              <a:t>In the next phase of development, the project manager will continue overseeing progress, organizing team goals, and assisting with front-end development. The development team will focus on building out the backend, selecting and integrating a suitable API for recipe generation, and improving the user interface. Technologies such as HTML, CSS, JavaScript, and React will continue to be used as the foundation. Additional features, including user accounts, personalized meal planning, and smarter ingredient handling, will also be explored as the project evolves.</a:t>
+              <a:t>Before our next presentation on July 22, we plan to finalize the system design by implementing the remaining database features and refining both the front-end and back-end components. We will also continue testing the core functionalities to ensure stability and usability. In addition, we aim to polish the user interface, improve performance, and begin preparing documentation and user support materials. Our goal is to have a functional and visually cohesive version of the app ready for live demonstration.</a:t>
             </a:r>
             <a:endParaRPr/>
           </a:p>
@@ -10528,13 +10531,82 @@
                 <a:spcPts val="0"/>
               </a:spcBef>
               <a:spcAft>
-                <a:spcPts val="1200"/>
+                <a:spcPts val="0"/>
               </a:spcAft>
               <a:buNone/>
             </a:pPr>
             <a:r>
               <a:rPr lang="en" sz="1400"/>
-              <a:t>In Phase 2, we made crucial steps on our front end development to create a clean, simple user interface. We tested mobile versions as well. </a:t>
+              <a:t>FRONT END:</a:t>
+            </a:r>
+            <a:br>
+              <a:rPr lang="en" sz="1400"/>
+            </a:br>
+            <a:r>
+              <a:rPr lang="en" sz="1400"/>
+              <a:t>Implement login system: email/password login, new user registration, third-party login (e.g., Google).</a:t>
+            </a:r>
+            <a:endParaRPr sz="1400"/>
+          </a:p>
+          <a:p>
+            <a:pPr indent="0" lvl="0" marL="0" rtl="0" algn="l">
+              <a:spcBef>
+                <a:spcPts val="1200"/>
+              </a:spcBef>
+              <a:spcAft>
+                <a:spcPts val="0"/>
+              </a:spcAft>
+              <a:buNone/>
+            </a:pPr>
+            <a:r>
+              <a:rPr lang="en" sz="1400"/>
+              <a:t>Enhance user experience with optional features: fingerprint/face login, profile photo upload or capture, welcome email, and user feedback system.</a:t>
+            </a:r>
+            <a:endParaRPr sz="1400"/>
+          </a:p>
+          <a:p>
+            <a:pPr indent="0" lvl="0" marL="0" rtl="0" algn="l">
+              <a:spcBef>
+                <a:spcPts val="1200"/>
+              </a:spcBef>
+              <a:spcAft>
+                <a:spcPts val="0"/>
+              </a:spcAft>
+              <a:buNone/>
+            </a:pPr>
+            <a:r>
+              <a:rPr lang="en" sz="1400"/>
+              <a:t>BACK END:</a:t>
+            </a:r>
+            <a:br>
+              <a:rPr lang="en" sz="1400"/>
+            </a:br>
+            <a:r>
+              <a:rPr lang="en" sz="1400"/>
+              <a:t>Begin development of system’s core functionality.</a:t>
+            </a:r>
+            <a:endParaRPr sz="1400"/>
+          </a:p>
+          <a:p>
+            <a:pPr indent="0" lvl="0" marL="0" rtl="0" algn="l">
+              <a:spcBef>
+                <a:spcPts val="1200"/>
+              </a:spcBef>
+              <a:spcAft>
+                <a:spcPts val="1200"/>
+              </a:spcAft>
+              <a:buNone/>
+            </a:pPr>
+            <a:r>
+              <a:rPr lang="en" sz="1400"/>
+              <a:t>OTHER:</a:t>
+            </a:r>
+            <a:br>
+              <a:rPr lang="en" sz="1400"/>
+            </a:br>
+            <a:r>
+              <a:rPr lang="en" sz="1400"/>
+              <a:t>Project Timeline/Milestones finalized</a:t>
             </a:r>
             <a:endParaRPr sz="1400"/>
           </a:p>
@@ -10545,6 +10617,104 @@
   <p:clrMapOvr>
     <a:masterClrMapping/>
   </p:clrMapOvr>
+  <p:timing>
+    <p:tnLst>
+      <p:par>
+        <p:cTn dur="indefinite" nodeType="tmRoot" restart="never">
+          <p:childTnLst>
+            <p:seq concurrent="1" nextAc="seek">
+              <p:cTn dur="indefinite" id="2" nodeType="mainSeq">
+                <p:childTnLst>
+                  <p:par>
+                    <p:cTn fill="hold">
+                      <p:stCondLst>
+                        <p:cond delay="indefinite"/>
+                      </p:stCondLst>
+                      <p:childTnLst>
+                        <p:par>
+                          <p:cTn fill="hold">
+                            <p:stCondLst>
+                              <p:cond delay="0"/>
+                            </p:stCondLst>
+                            <p:childTnLst>
+                              <p:par>
+                                <p:cTn fill="hold" nodeType="clickEffect" presetClass="entr" presetID="2" presetSubtype="8">
+                                  <p:stCondLst>
+                                    <p:cond delay="0"/>
+                                  </p:stCondLst>
+                                  <p:childTnLst>
+                                    <p:set>
+                                      <p:cBhvr>
+                                        <p:cTn dur="1" fill="hold">
+                                          <p:stCondLst>
+                                            <p:cond delay="0"/>
+                                          </p:stCondLst>
+                                        </p:cTn>
+                                        <p:tgtEl>
+                                          <p:spTgt spid="142"/>
+                                        </p:tgtEl>
+                                        <p:attrNameLst>
+                                          <p:attrName>style.visibility</p:attrName>
+                                        </p:attrNameLst>
+                                      </p:cBhvr>
+                                      <p:to>
+                                        <p:strVal val="visible"/>
+                                      </p:to>
+                                    </p:set>
+                                    <p:anim calcmode="lin" valueType="num">
+                                      <p:cBhvr additive="base">
+                                        <p:cTn dur="1000"/>
+                                        <p:tgtEl>
+                                          <p:spTgt spid="142"/>
+                                        </p:tgtEl>
+                                        <p:attrNameLst>
+                                          <p:attrName>ppt_x</p:attrName>
+                                        </p:attrNameLst>
+                                      </p:cBhvr>
+                                      <p:tavLst>
+                                        <p:tav fmla="" tm="0">
+                                          <p:val>
+                                            <p:strVal val="#ppt_x-1"/>
+                                          </p:val>
+                                        </p:tav>
+                                        <p:tav fmla="" tm="100000">
+                                          <p:val>
+                                            <p:strVal val="#ppt_x"/>
+                                          </p:val>
+                                        </p:tav>
+                                      </p:tavLst>
+                                    </p:anim>
+                                  </p:childTnLst>
+                                </p:cTn>
+                              </p:par>
+                            </p:childTnLst>
+                          </p:cTn>
+                        </p:par>
+                      </p:childTnLst>
+                    </p:cTn>
+                  </p:par>
+                </p:childTnLst>
+              </p:cTn>
+              <p:prevCondLst>
+                <p:cond evt="onPrev">
+                  <p:tgtEl>
+                    <p:sldTgt/>
+                  </p:tgtEl>
+                </p:cond>
+              </p:prevCondLst>
+              <p:nextCondLst>
+                <p:cond evt="onNext">
+                  <p:tgtEl>
+                    <p:sldTgt/>
+                  </p:tgtEl>
+                </p:cond>
+              </p:nextCondLst>
+            </p:seq>
+          </p:childTnLst>
+        </p:cTn>
+      </p:par>
+    </p:tnLst>
+  </p:timing>
 </p:sld>
 </file>
 
@@ -10619,6 +10789,272 @@
         </p:nvSpPr>
         <p:spPr>
           <a:xfrm>
+            <a:off x="1052550" y="1307850"/>
+            <a:ext cx="7038900" cy="2911200"/>
+          </a:xfrm>
+          <a:prstGeom prst="rect">
+            <a:avLst/>
+          </a:prstGeom>
+        </p:spPr>
+        <p:txBody>
+          <a:bodyPr anchorCtr="0" anchor="t" bIns="91425" lIns="91425" spcFirstLastPara="1" rIns="91425" wrap="square" tIns="91425">
+            <a:normAutofit lnSpcReduction="20000"/>
+          </a:bodyPr>
+          <a:lstStyle/>
+          <a:p>
+            <a:pPr indent="0" lvl="0" marL="0" rtl="0" algn="l">
+              <a:spcBef>
+                <a:spcPts val="0"/>
+              </a:spcBef>
+              <a:spcAft>
+                <a:spcPts val="0"/>
+              </a:spcAft>
+              <a:buNone/>
+            </a:pPr>
+            <a:r>
+              <a:rPr lang="en" sz="1500"/>
+              <a:t>In our previous presentation, we proposed web scraping as the primary method for collecting recipes and related content.</a:t>
+            </a:r>
+            <a:endParaRPr sz="1500"/>
+          </a:p>
+          <a:p>
+            <a:pPr indent="0" lvl="0" marL="0" rtl="0" algn="l">
+              <a:spcBef>
+                <a:spcPts val="1200"/>
+              </a:spcBef>
+              <a:spcAft>
+                <a:spcPts val="0"/>
+              </a:spcAft>
+              <a:buNone/>
+            </a:pPr>
+            <a:r>
+              <a:rPr lang="en" sz="1500"/>
+              <a:t>After further discussion and feedback, we’ve chosen to move away from web scraping due to legal, ethical, and reliability concerns.</a:t>
+            </a:r>
+            <a:endParaRPr sz="1500"/>
+          </a:p>
+          <a:p>
+            <a:pPr indent="0" lvl="0" marL="0" rtl="0" algn="l">
+              <a:spcBef>
+                <a:spcPts val="1200"/>
+              </a:spcBef>
+              <a:spcAft>
+                <a:spcPts val="0"/>
+              </a:spcAft>
+              <a:buNone/>
+            </a:pPr>
+            <a:r>
+              <a:rPr lang="en" sz="1500"/>
+              <a:t>Instead, we’re shifting to AI-assisted recipe discovery, focusing on publicly available and fair-use-compliant sources.</a:t>
+            </a:r>
+            <a:endParaRPr sz="1500"/>
+          </a:p>
+          <a:p>
+            <a:pPr indent="0" lvl="0" marL="0" rtl="0" algn="l">
+              <a:spcBef>
+                <a:spcPts val="1200"/>
+              </a:spcBef>
+              <a:spcAft>
+                <a:spcPts val="0"/>
+              </a:spcAft>
+              <a:buNone/>
+            </a:pPr>
+            <a:r>
+              <a:rPr lang="en" sz="1500"/>
+              <a:t>To ensure accuracy and originality, all content will be manually reviewed and moderated by team members before being added to the platform.</a:t>
+            </a:r>
+            <a:endParaRPr sz="1500"/>
+          </a:p>
+          <a:p>
+            <a:pPr indent="0" lvl="0" marL="0" rtl="0" algn="l">
+              <a:spcBef>
+                <a:spcPts val="1200"/>
+              </a:spcBef>
+              <a:spcAft>
+                <a:spcPts val="1200"/>
+              </a:spcAft>
+              <a:buNone/>
+            </a:pPr>
+            <a:r>
+              <a:t/>
+            </a:r>
+            <a:endParaRPr sz="1500"/>
+          </a:p>
+        </p:txBody>
+      </p:sp>
+    </p:spTree>
+  </p:cSld>
+  <p:clrMapOvr>
+    <a:masterClrMapping/>
+  </p:clrMapOvr>
+  <p:timing>
+    <p:tnLst>
+      <p:par>
+        <p:cTn dur="indefinite" nodeType="tmRoot" restart="never">
+          <p:childTnLst>
+            <p:seq concurrent="1" nextAc="seek">
+              <p:cTn dur="indefinite" id="2" nodeType="mainSeq">
+                <p:childTnLst>
+                  <p:par>
+                    <p:cTn fill="hold">
+                      <p:stCondLst>
+                        <p:cond delay="indefinite"/>
+                      </p:stCondLst>
+                      <p:childTnLst>
+                        <p:par>
+                          <p:cTn fill="hold">
+                            <p:stCondLst>
+                              <p:cond delay="0"/>
+                            </p:stCondLst>
+                            <p:childTnLst>
+                              <p:par>
+                                <p:cTn fill="hold" nodeType="clickEffect" presetClass="entr" presetID="2" presetSubtype="2">
+                                  <p:stCondLst>
+                                    <p:cond delay="0"/>
+                                  </p:stCondLst>
+                                  <p:childTnLst>
+                                    <p:set>
+                                      <p:cBhvr>
+                                        <p:cTn dur="1" fill="hold">
+                                          <p:stCondLst>
+                                            <p:cond delay="0"/>
+                                          </p:stCondLst>
+                                        </p:cTn>
+                                        <p:tgtEl>
+                                          <p:spTgt spid="148"/>
+                                        </p:tgtEl>
+                                        <p:attrNameLst>
+                                          <p:attrName>style.visibility</p:attrName>
+                                        </p:attrNameLst>
+                                      </p:cBhvr>
+                                      <p:to>
+                                        <p:strVal val="visible"/>
+                                      </p:to>
+                                    </p:set>
+                                    <p:anim calcmode="lin" valueType="num">
+                                      <p:cBhvr additive="base">
+                                        <p:cTn dur="1000"/>
+                                        <p:tgtEl>
+                                          <p:spTgt spid="148"/>
+                                        </p:tgtEl>
+                                        <p:attrNameLst>
+                                          <p:attrName>ppt_x</p:attrName>
+                                        </p:attrNameLst>
+                                      </p:cBhvr>
+                                      <p:tavLst>
+                                        <p:tav fmla="" tm="0">
+                                          <p:val>
+                                            <p:strVal val="#ppt_x+1"/>
+                                          </p:val>
+                                        </p:tav>
+                                        <p:tav fmla="" tm="100000">
+                                          <p:val>
+                                            <p:strVal val="#ppt_x"/>
+                                          </p:val>
+                                        </p:tav>
+                                      </p:tavLst>
+                                    </p:anim>
+                                  </p:childTnLst>
+                                </p:cTn>
+                              </p:par>
+                            </p:childTnLst>
+                          </p:cTn>
+                        </p:par>
+                      </p:childTnLst>
+                    </p:cTn>
+                  </p:par>
+                </p:childTnLst>
+              </p:cTn>
+              <p:prevCondLst>
+                <p:cond evt="onPrev">
+                  <p:tgtEl>
+                    <p:sldTgt/>
+                  </p:tgtEl>
+                </p:cond>
+              </p:prevCondLst>
+              <p:nextCondLst>
+                <p:cond evt="onNext">
+                  <p:tgtEl>
+                    <p:sldTgt/>
+                  </p:tgtEl>
+                </p:cond>
+              </p:nextCondLst>
+            </p:seq>
+          </p:childTnLst>
+        </p:cTn>
+      </p:par>
+    </p:tnLst>
+  </p:timing>
+</p:sld>
+</file>
+
+<file path=ppt/slides/slide4.xml><?xml version="1.0" encoding="utf-8"?>
+<p:sld xmlns:a="http://schemas.openxmlformats.org/drawingml/2006/main" xmlns:r="http://schemas.openxmlformats.org/officeDocument/2006/relationships" xmlns:mc="http://schemas.openxmlformats.org/markup-compatibility/2006" xmlns:mv="urn:schemas-microsoft-com:mac:vml" xmlns:p="http://schemas.openxmlformats.org/presentationml/2006/main" xmlns:c="http://schemas.openxmlformats.org/drawingml/2006/chart" xmlns:dgm="http://schemas.openxmlformats.org/drawingml/2006/diagram" xmlns:o="urn:schemas-microsoft-com:office:office" xmlns:v="urn:schemas-microsoft-com:vml" xmlns:pvml="urn:schemas-microsoft-com:office:powerpoint" xmlns:com="http://schemas.openxmlformats.org/drawingml/2006/compatibility" xmlns:p14="http://schemas.microsoft.com/office/powerpoint/2010/main" xmlns:p15="http://schemas.microsoft.com/office/powerpoint/2012/main" xmlns:ahyp="http://schemas.microsoft.com/office/drawing/2018/hyperlinkcolor">
+  <p:cSld>
+    <p:spTree>
+      <p:nvGrpSpPr>
+        <p:cNvPr id="152" name="Shape 152"/>
+        <p:cNvGrpSpPr/>
+        <p:nvPr/>
+      </p:nvGrpSpPr>
+      <p:grpSpPr>
+        <a:xfrm>
+          <a:off x="0" y="0"/>
+          <a:ext cx="0" cy="0"/>
+          <a:chOff x="0" y="0"/>
+          <a:chExt cx="0" cy="0"/>
+        </a:xfrm>
+      </p:grpSpPr>
+      <p:sp>
+        <p:nvSpPr>
+          <p:cNvPr id="153" name="Google Shape;153;p16"/>
+          <p:cNvSpPr txBox="1"/>
+          <p:nvPr>
+            <p:ph type="title"/>
+          </p:nvPr>
+        </p:nvSpPr>
+        <p:spPr>
+          <a:xfrm>
+            <a:off x="707650" y="71300"/>
+            <a:ext cx="7038900" cy="914100"/>
+          </a:xfrm>
+          <a:prstGeom prst="rect">
+            <a:avLst/>
+          </a:prstGeom>
+        </p:spPr>
+        <p:txBody>
+          <a:bodyPr anchorCtr="0" anchor="t" bIns="91425" lIns="91425" spcFirstLastPara="1" rIns="91425" wrap="square" tIns="91425">
+            <a:normAutofit/>
+          </a:bodyPr>
+          <a:lstStyle/>
+          <a:p>
+            <a:pPr indent="0" lvl="0" marL="0" rtl="0" algn="l">
+              <a:spcBef>
+                <a:spcPts val="0"/>
+              </a:spcBef>
+              <a:spcAft>
+                <a:spcPts val="0"/>
+              </a:spcAft>
+              <a:buNone/>
+            </a:pPr>
+            <a:r>
+              <a:rPr b="1" i="1" lang="en" u="sng"/>
+              <a:t>Front End Pictures</a:t>
+            </a:r>
+            <a:endParaRPr b="1" i="1" u="sng"/>
+          </a:p>
+        </p:txBody>
+      </p:sp>
+      <p:sp>
+        <p:nvSpPr>
+          <p:cNvPr id="154" name="Google Shape;154;p16"/>
+          <p:cNvSpPr txBox="1"/>
+          <p:nvPr>
+            <p:ph idx="1" type="body"/>
+          </p:nvPr>
+        </p:nvSpPr>
+        <p:spPr>
+          <a:xfrm>
             <a:off x="1297500" y="1567550"/>
             <a:ext cx="7038900" cy="2911200"/>
           </a:xfrm>
@@ -10642,16 +11078,15 @@
               <a:buNone/>
             </a:pPr>
             <a:r>
-              <a:rPr lang="en" sz="1500"/>
-              <a:t>One potential issue brought to our attention was the ethical use of web scraping. To ensure all web scraping is done ethically.. </a:t>
+              <a:t/>
             </a:r>
-            <a:endParaRPr sz="1500"/>
+            <a:endParaRPr/>
           </a:p>
         </p:txBody>
       </p:sp>
       <p:pic>
         <p:nvPicPr>
-          <p:cNvPr id="149" name="Google Shape;149;p15" title="original-1276-1681402314-3.jpg"/>
+          <p:cNvPr id="155" name="Google Shape;155;p16" title="Screenshot 2025-07-07 174720.png"/>
           <p:cNvPicPr preferRelativeResize="0"/>
           <p:nvPr/>
         </p:nvPicPr>
@@ -10665,15 +11100,89 @@
         </p:blipFill>
         <p:spPr>
           <a:xfrm>
-            <a:off x="5128075" y="1161400"/>
-            <a:ext cx="3208330" cy="3089126"/>
+            <a:off x="4931175" y="251668"/>
+            <a:ext cx="4075499" cy="1936775"/>
           </a:xfrm>
           <a:prstGeom prst="rect">
             <a:avLst/>
           </a:prstGeom>
           <a:noFill/>
-          <a:ln>
-            <a:noFill/>
+          <a:ln cap="flat" cmpd="sng" w="38100">
+            <a:solidFill>
+              <a:schemeClr val="dk1"/>
+            </a:solidFill>
+            <a:prstDash val="solid"/>
+            <a:round/>
+            <a:headEnd len="sm" w="sm" type="none"/>
+            <a:tailEnd len="sm" w="sm" type="none"/>
+          </a:ln>
+        </p:spPr>
+      </p:pic>
+      <p:pic>
+        <p:nvPicPr>
+          <p:cNvPr id="156" name="Google Shape;156;p16" title="Screenshot 2025-07-07 174812.png"/>
+          <p:cNvPicPr preferRelativeResize="0"/>
+          <p:nvPr/>
+        </p:nvPicPr>
+        <p:blipFill>
+          <a:blip r:embed="rId4">
+            <a:alphaModFix/>
+          </a:blip>
+          <a:stretch>
+            <a:fillRect/>
+          </a:stretch>
+        </p:blipFill>
+        <p:spPr>
+          <a:xfrm>
+            <a:off x="291000" y="985400"/>
+            <a:ext cx="4506450" cy="2587274"/>
+          </a:xfrm>
+          <a:prstGeom prst="rect">
+            <a:avLst/>
+          </a:prstGeom>
+          <a:noFill/>
+          <a:ln cap="flat" cmpd="sng" w="38100">
+            <a:solidFill>
+              <a:schemeClr val="dk1"/>
+            </a:solidFill>
+            <a:prstDash val="solid"/>
+            <a:round/>
+            <a:headEnd len="sm" w="sm" type="none"/>
+            <a:tailEnd len="sm" w="sm" type="none"/>
+          </a:ln>
+        </p:spPr>
+      </p:pic>
+      <p:pic>
+        <p:nvPicPr>
+          <p:cNvPr id="157" name="Google Shape;157;p16" title="Screenshot 2025-07-07 174800.png"/>
+          <p:cNvPicPr preferRelativeResize="0"/>
+          <p:nvPr/>
+        </p:nvPicPr>
+        <p:blipFill>
+          <a:blip r:embed="rId5">
+            <a:alphaModFix/>
+          </a:blip>
+          <a:stretch>
+            <a:fillRect/>
+          </a:stretch>
+        </p:blipFill>
+        <p:spPr>
+          <a:xfrm>
+            <a:off x="4396375" y="2422325"/>
+            <a:ext cx="4700452" cy="2215451"/>
+          </a:xfrm>
+          <a:prstGeom prst="rect">
+            <a:avLst/>
+          </a:prstGeom>
+          <a:noFill/>
+          <a:ln cap="flat" cmpd="sng" w="38100">
+            <a:solidFill>
+              <a:schemeClr val="dk1"/>
+            </a:solidFill>
+            <a:prstDash val="solid"/>
+            <a:round/>
+            <a:headEnd len="sm" w="sm" type="none"/>
+            <a:tailEnd len="sm" w="sm" type="none"/>
           </a:ln>
         </p:spPr>
       </p:pic>
@@ -10682,15 +11191,204 @@
   <p:clrMapOvr>
     <a:masterClrMapping/>
   </p:clrMapOvr>
+  <p:timing>
+    <p:tnLst>
+      <p:par>
+        <p:cTn dur="indefinite" nodeType="tmRoot" restart="never">
+          <p:childTnLst>
+            <p:seq concurrent="1" nextAc="seek">
+              <p:cTn dur="indefinite" id="2" nodeType="mainSeq">
+                <p:childTnLst>
+                  <p:par>
+                    <p:cTn fill="hold">
+                      <p:stCondLst>
+                        <p:cond delay="indefinite"/>
+                      </p:stCondLst>
+                      <p:childTnLst>
+                        <p:par>
+                          <p:cTn fill="hold">
+                            <p:stCondLst>
+                              <p:cond delay="0"/>
+                            </p:stCondLst>
+                            <p:childTnLst>
+                              <p:par>
+                                <p:cTn fill="hold" nodeType="clickEffect" presetClass="entr" presetID="10" presetSubtype="0">
+                                  <p:stCondLst>
+                                    <p:cond delay="0"/>
+                                  </p:stCondLst>
+                                  <p:childTnLst>
+                                    <p:set>
+                                      <p:cBhvr>
+                                        <p:cTn dur="1" fill="hold">
+                                          <p:stCondLst>
+                                            <p:cond delay="0"/>
+                                          </p:stCondLst>
+                                        </p:cTn>
+                                        <p:tgtEl>
+                                          <p:spTgt spid="156"/>
+                                        </p:tgtEl>
+                                        <p:attrNameLst>
+                                          <p:attrName>style.visibility</p:attrName>
+                                        </p:attrNameLst>
+                                      </p:cBhvr>
+                                      <p:to>
+                                        <p:strVal val="visible"/>
+                                      </p:to>
+                                    </p:set>
+                                    <p:animEffect filter="fade" transition="in">
+                                      <p:cBhvr>
+                                        <p:cTn dur="1000"/>
+                                        <p:tgtEl>
+                                          <p:spTgt spid="156"/>
+                                        </p:tgtEl>
+                                      </p:cBhvr>
+                                    </p:animEffect>
+                                  </p:childTnLst>
+                                </p:cTn>
+                              </p:par>
+                            </p:childTnLst>
+                          </p:cTn>
+                        </p:par>
+                      </p:childTnLst>
+                    </p:cTn>
+                  </p:par>
+                  <p:par>
+                    <p:cTn fill="hold">
+                      <p:stCondLst>
+                        <p:cond delay="indefinite"/>
+                      </p:stCondLst>
+                      <p:childTnLst>
+                        <p:par>
+                          <p:cTn fill="hold">
+                            <p:stCondLst>
+                              <p:cond delay="0"/>
+                            </p:stCondLst>
+                            <p:childTnLst>
+                              <p:par>
+                                <p:cTn fill="hold" nodeType="clickEffect" presetClass="entr" presetID="10" presetSubtype="0">
+                                  <p:stCondLst>
+                                    <p:cond delay="0"/>
+                                  </p:stCondLst>
+                                  <p:childTnLst>
+                                    <p:set>
+                                      <p:cBhvr>
+                                        <p:cTn dur="1" fill="hold">
+                                          <p:stCondLst>
+                                            <p:cond delay="0"/>
+                                          </p:stCondLst>
+                                        </p:cTn>
+                                        <p:tgtEl>
+                                          <p:spTgt spid="155"/>
+                                        </p:tgtEl>
+                                        <p:attrNameLst>
+                                          <p:attrName>style.visibility</p:attrName>
+                                        </p:attrNameLst>
+                                      </p:cBhvr>
+                                      <p:to>
+                                        <p:strVal val="visible"/>
+                                      </p:to>
+                                    </p:set>
+                                    <p:animEffect filter="fade" transition="in">
+                                      <p:cBhvr>
+                                        <p:cTn dur="1000"/>
+                                        <p:tgtEl>
+                                          <p:spTgt spid="155"/>
+                                        </p:tgtEl>
+                                      </p:cBhvr>
+                                    </p:animEffect>
+                                  </p:childTnLst>
+                                </p:cTn>
+                              </p:par>
+                            </p:childTnLst>
+                          </p:cTn>
+                        </p:par>
+                      </p:childTnLst>
+                    </p:cTn>
+                  </p:par>
+                  <p:par>
+                    <p:cTn fill="hold">
+                      <p:stCondLst>
+                        <p:cond delay="indefinite"/>
+                      </p:stCondLst>
+                      <p:childTnLst>
+                        <p:par>
+                          <p:cTn fill="hold">
+                            <p:stCondLst>
+                              <p:cond delay="0"/>
+                            </p:stCondLst>
+                            <p:childTnLst>
+                              <p:par>
+                                <p:cTn fill="hold" nodeType="clickEffect" presetClass="entr" presetID="10" presetSubtype="0">
+                                  <p:stCondLst>
+                                    <p:cond delay="0"/>
+                                  </p:stCondLst>
+                                  <p:childTnLst>
+                                    <p:set>
+                                      <p:cBhvr>
+                                        <p:cTn dur="1" fill="hold">
+                                          <p:stCondLst>
+                                            <p:cond delay="0"/>
+                                          </p:stCondLst>
+                                        </p:cTn>
+                                        <p:tgtEl>
+                                          <p:spTgt spid="157"/>
+                                        </p:tgtEl>
+                                        <p:attrNameLst>
+                                          <p:attrName>style.visibility</p:attrName>
+                                        </p:attrNameLst>
+                                      </p:cBhvr>
+                                      <p:to>
+                                        <p:strVal val="visible"/>
+                                      </p:to>
+                                    </p:set>
+                                    <p:animEffect filter="fade" transition="in">
+                                      <p:cBhvr>
+                                        <p:cTn dur="1000"/>
+                                        <p:tgtEl>
+                                          <p:spTgt spid="157"/>
+                                        </p:tgtEl>
+                                      </p:cBhvr>
+                                    </p:animEffect>
+                                  </p:childTnLst>
+                                </p:cTn>
+                              </p:par>
+                            </p:childTnLst>
+                          </p:cTn>
+                        </p:par>
+                      </p:childTnLst>
+                    </p:cTn>
+                  </p:par>
+                </p:childTnLst>
+              </p:cTn>
+              <p:prevCondLst>
+                <p:cond evt="onPrev">
+                  <p:tgtEl>
+                    <p:sldTgt/>
+                  </p:tgtEl>
+                </p:cond>
+              </p:prevCondLst>
+              <p:nextCondLst>
+                <p:cond evt="onNext">
+                  <p:tgtEl>
+                    <p:sldTgt/>
+                  </p:tgtEl>
+                </p:cond>
+              </p:nextCondLst>
+            </p:seq>
+          </p:childTnLst>
+        </p:cTn>
+      </p:par>
+    </p:tnLst>
+  </p:timing>
 </p:sld>
 </file>
 
-<file path=ppt/slides/slide4.xml><?xml version="1.0" encoding="utf-8"?>
+<file path=ppt/slides/slide5.xml><?xml version="1.0" encoding="utf-8"?>
 <p:sld xmlns:a="http://schemas.openxmlformats.org/drawingml/2006/main" xmlns:r="http://schemas.openxmlformats.org/officeDocument/2006/relationships" xmlns:mc="http://schemas.openxmlformats.org/markup-compatibility/2006" xmlns:mv="urn:schemas-microsoft-com:mac:vml" xmlns:p="http://schemas.openxmlformats.org/presentationml/2006/main" xmlns:c="http://schemas.openxmlformats.org/drawingml/2006/chart" xmlns:dgm="http://schemas.openxmlformats.org/drawingml/2006/diagram" xmlns:o="urn:schemas-microsoft-com:office:office" xmlns:v="urn:schemas-microsoft-com:vml" xmlns:pvml="urn:schemas-microsoft-com:office:powerpoint" xmlns:com="http://schemas.openxmlformats.org/drawingml/2006/compatibility" xmlns:p14="http://schemas.microsoft.com/office/powerpoint/2010/main" xmlns:p15="http://schemas.microsoft.com/office/powerpoint/2012/main" xmlns:ahyp="http://schemas.microsoft.com/office/drawing/2018/hyperlinkcolor">
   <p:cSld>
     <p:spTree>
       <p:nvGrpSpPr>
-        <p:cNvPr id="153" name="Shape 153"/>
+        <p:cNvPr id="161" name="Shape 161"/>
         <p:cNvGrpSpPr/>
         <p:nvPr/>
       </p:nvGrpSpPr>
@@ -10704,7 +11402,7 @@
       </p:grpSpPr>
       <p:sp>
         <p:nvSpPr>
-          <p:cNvPr id="154" name="Google Shape;154;p16"/>
+          <p:cNvPr id="162" name="Google Shape;162;p17"/>
           <p:cNvSpPr txBox="1"/>
           <p:nvPr>
             <p:ph type="title"/>
@@ -10736,7 +11434,7 @@
             </a:pPr>
             <a:r>
               <a:rPr b="1" i="1" lang="en" u="sng"/>
-              <a:t>System Components </a:t>
+              <a:t>Front End Development</a:t>
             </a:r>
             <a:endParaRPr b="1" i="1" u="sng"/>
           </a:p>
@@ -10744,7 +11442,120 @@
       </p:sp>
       <p:sp>
         <p:nvSpPr>
-          <p:cNvPr id="155" name="Google Shape;155;p16"/>
+          <p:cNvPr id="163" name="Google Shape;163;p17"/>
+          <p:cNvSpPr txBox="1"/>
+          <p:nvPr>
+            <p:ph idx="1" type="body"/>
+          </p:nvPr>
+        </p:nvSpPr>
+        <p:spPr>
+          <a:xfrm>
+            <a:off x="1297500" y="1567550"/>
+            <a:ext cx="7038900" cy="2911200"/>
+          </a:xfrm>
+          <a:prstGeom prst="rect">
+            <a:avLst/>
+          </a:prstGeom>
+        </p:spPr>
+        <p:txBody>
+          <a:bodyPr anchorCtr="0" anchor="t" bIns="91425" lIns="91425" spcFirstLastPara="1" rIns="91425" wrap="square" tIns="91425">
+            <a:normAutofit/>
+          </a:bodyPr>
+          <a:lstStyle/>
+          <a:p>
+            <a:pPr indent="0" lvl="0" marL="0" rtl="0" algn="l">
+              <a:spcBef>
+                <a:spcPts val="0"/>
+              </a:spcBef>
+              <a:spcAft>
+                <a:spcPts val="1200"/>
+              </a:spcAft>
+              <a:buNone/>
+            </a:pPr>
+            <a:r>
+              <a:rPr lang="en"/>
+              <a:t>The front end development utilized a lot of AI to correctly connect the original concept of an AI created recipe generator. When the work on the project originally began we utilized Chat GPT to create a input and output for the server connected to the Open AI API. Once the foundation was laid we further went and input that code into Chat GPT again to make it aesthetically </a:t>
+            </a:r>
+            <a:r>
+              <a:rPr lang="en"/>
+              <a:t>pleasing</a:t>
+            </a:r>
+            <a:r>
+              <a:rPr lang="en"/>
+              <a:t> this provided the backbone upon which we built the rest of our CSS Styles, However there was much that needed to be done manually such as graphic placement and text margins which the AI just could not get quite right. Once that was done we Asked Chat GPT again to create a tab matching the theme of the style. This lead to us creating and the remaining html files to be further worked on once Backend is implemented.</a:t>
+            </a:r>
+            <a:endParaRPr/>
+          </a:p>
+        </p:txBody>
+      </p:sp>
+    </p:spTree>
+  </p:cSld>
+  <p:clrMapOvr>
+    <a:masterClrMapping/>
+  </p:clrMapOvr>
+</p:sld>
+</file>
+
+<file path=ppt/slides/slide6.xml><?xml version="1.0" encoding="utf-8"?>
+<p:sld xmlns:a="http://schemas.openxmlformats.org/drawingml/2006/main" xmlns:r="http://schemas.openxmlformats.org/officeDocument/2006/relationships" xmlns:mc="http://schemas.openxmlformats.org/markup-compatibility/2006" xmlns:mv="urn:schemas-microsoft-com:mac:vml" xmlns:p="http://schemas.openxmlformats.org/presentationml/2006/main" xmlns:c="http://schemas.openxmlformats.org/drawingml/2006/chart" xmlns:dgm="http://schemas.openxmlformats.org/drawingml/2006/diagram" xmlns:o="urn:schemas-microsoft-com:office:office" xmlns:v="urn:schemas-microsoft-com:vml" xmlns:pvml="urn:schemas-microsoft-com:office:powerpoint" xmlns:com="http://schemas.openxmlformats.org/drawingml/2006/compatibility" xmlns:p14="http://schemas.microsoft.com/office/powerpoint/2010/main" xmlns:p15="http://schemas.microsoft.com/office/powerpoint/2012/main" xmlns:ahyp="http://schemas.microsoft.com/office/drawing/2018/hyperlinkcolor">
+  <p:cSld>
+    <p:spTree>
+      <p:nvGrpSpPr>
+        <p:cNvPr id="167" name="Shape 167"/>
+        <p:cNvGrpSpPr/>
+        <p:nvPr/>
+      </p:nvGrpSpPr>
+      <p:grpSpPr>
+        <a:xfrm>
+          <a:off x="0" y="0"/>
+          <a:ext cx="0" cy="0"/>
+          <a:chOff x="0" y="0"/>
+          <a:chExt cx="0" cy="0"/>
+        </a:xfrm>
+      </p:grpSpPr>
+      <p:sp>
+        <p:nvSpPr>
+          <p:cNvPr id="168" name="Google Shape;168;p18"/>
+          <p:cNvSpPr txBox="1"/>
+          <p:nvPr>
+            <p:ph type="title"/>
+          </p:nvPr>
+        </p:nvSpPr>
+        <p:spPr>
+          <a:xfrm>
+            <a:off x="1297500" y="393750"/>
+            <a:ext cx="7038900" cy="914100"/>
+          </a:xfrm>
+          <a:prstGeom prst="rect">
+            <a:avLst/>
+          </a:prstGeom>
+        </p:spPr>
+        <p:txBody>
+          <a:bodyPr anchorCtr="0" anchor="t" bIns="91425" lIns="91425" spcFirstLastPara="1" rIns="91425" wrap="square" tIns="91425">
+            <a:normAutofit/>
+          </a:bodyPr>
+          <a:lstStyle/>
+          <a:p>
+            <a:pPr indent="0" lvl="0" marL="0" rtl="0" algn="l">
+              <a:spcBef>
+                <a:spcPts val="0"/>
+              </a:spcBef>
+              <a:spcAft>
+                <a:spcPts val="0"/>
+              </a:spcAft>
+              <a:buNone/>
+            </a:pPr>
+            <a:r>
+              <a:rPr b="1" i="1" lang="en" u="sng"/>
+              <a:t>API, GoogleAPI, and other technology</a:t>
+            </a:r>
+            <a:endParaRPr b="1" i="1" u="sng"/>
+          </a:p>
+        </p:txBody>
+      </p:sp>
+      <p:sp>
+        <p:nvSpPr>
+          <p:cNvPr id="169" name="Google Shape;169;p18"/>
           <p:cNvSpPr txBox="1"/>
           <p:nvPr>
             <p:ph idx="1" type="body"/>
@@ -10773,23 +11584,12 @@
                 <a:spcPts val="0"/>
               </a:spcAft>
               <a:buSzPts val="1300"/>
-              <a:buAutoNum type="arabicPeriod"/>
+              <a:buChar char="●"/>
             </a:pPr>
             <a:r>
               <a:rPr lang="en"/>
-              <a:t>Input your </a:t>
+              <a:t>OpenAI</a:t>
             </a:r>
-            <a:r>
-              <a:rPr lang="en"/>
-              <a:t>ingredients</a:t>
-            </a:r>
-            <a:r>
-              <a:rPr lang="en"/>
-              <a:t> to the simple to use interface</a:t>
-            </a:r>
-            <a:br>
-              <a:rPr lang="en"/>
-            </a:br>
             <a:endParaRPr/>
           </a:p>
           <a:p>
@@ -10801,48 +11601,50 @@
                 <a:spcPts val="0"/>
               </a:spcAft>
               <a:buSzPts val="1300"/>
-              <a:buAutoNum type="arabicPeriod"/>
+              <a:buChar char="●"/>
             </a:pPr>
             <a:r>
               <a:rPr lang="en"/>
-              <a:t>AI-Powered Recipe Discovery - the AI system analyzes the list and searches the web for relevant </a:t>
-            </a:r>
-            <a:r>
-              <a:rPr lang="en"/>
-              <a:t>recipes</a:t>
-            </a:r>
-            <a:r>
-              <a:rPr lang="en"/>
-              <a:t> using your </a:t>
-            </a:r>
-            <a:r>
-              <a:rPr lang="en"/>
-              <a:t>ingredients.</a:t>
-            </a:r>
-            <a:br>
-              <a:rPr lang="en"/>
-            </a:br>
-            <a:endParaRPr/>
-          </a:p>
-          <a:p>
-            <a:pPr indent="-311150" lvl="0" marL="457200" rtl="0" algn="l">
-              <a:spcBef>
-                <a:spcPts val="0"/>
-              </a:spcBef>
-              <a:spcAft>
-                <a:spcPts val="0"/>
-              </a:spcAft>
-              <a:buSzPts val="1300"/>
-              <a:buAutoNum type="arabicPeriod"/>
-            </a:pPr>
-            <a:r>
-              <a:rPr lang="en"/>
-              <a:t>If you recipe requires additional ingredients, the program will automatically generate a grocery list to help users complete the meal with minimal effort</a:t>
+              <a:t>GoogleAPI</a:t>
             </a:r>
             <a:endParaRPr/>
           </a:p>
         </p:txBody>
       </p:sp>
+      <p:pic>
+        <p:nvPicPr>
+          <p:cNvPr id="170" name="Google Shape;170;p18" title="Screenshot 2025-07-07 174800.png"/>
+          <p:cNvPicPr preferRelativeResize="0"/>
+          <p:nvPr/>
+        </p:nvPicPr>
+        <p:blipFill>
+          <a:blip r:embed="rId3">
+            <a:alphaModFix/>
+          </a:blip>
+          <a:stretch>
+            <a:fillRect/>
+          </a:stretch>
+        </p:blipFill>
+        <p:spPr>
+          <a:xfrm>
+            <a:off x="3874370" y="1167625"/>
+            <a:ext cx="4853130" cy="2219551"/>
+          </a:xfrm>
+          <a:prstGeom prst="rect">
+            <a:avLst/>
+          </a:prstGeom>
+          <a:noFill/>
+          <a:ln cap="flat" cmpd="sng" w="38100">
+            <a:solidFill>
+              <a:schemeClr val="dk1"/>
+            </a:solidFill>
+            <a:prstDash val="solid"/>
+            <a:round/>
+            <a:headEnd len="sm" w="sm" type="none"/>
+            <a:tailEnd len="sm" w="sm" type="none"/>
+          </a:ln>
+        </p:spPr>
+      </p:pic>
     </p:spTree>
   </p:cSld>
   <p:clrMapOvr>
@@ -10851,12 +11653,12 @@
 </p:sld>
 </file>
 
-<file path=ppt/slides/slide5.xml><?xml version="1.0" encoding="utf-8"?>
+<file path=ppt/slides/slide7.xml><?xml version="1.0" encoding="utf-8"?>
 <p:sld xmlns:a="http://schemas.openxmlformats.org/drawingml/2006/main" xmlns:r="http://schemas.openxmlformats.org/officeDocument/2006/relationships" xmlns:mc="http://schemas.openxmlformats.org/markup-compatibility/2006" xmlns:mv="urn:schemas-microsoft-com:mac:vml" xmlns:p="http://schemas.openxmlformats.org/presentationml/2006/main" xmlns:c="http://schemas.openxmlformats.org/drawingml/2006/chart" xmlns:dgm="http://schemas.openxmlformats.org/drawingml/2006/diagram" xmlns:o="urn:schemas-microsoft-com:office:office" xmlns:v="urn:schemas-microsoft-com:vml" xmlns:pvml="urn:schemas-microsoft-com:office:powerpoint" xmlns:com="http://schemas.openxmlformats.org/drawingml/2006/compatibility" xmlns:p14="http://schemas.microsoft.com/office/powerpoint/2010/main" xmlns:p15="http://schemas.microsoft.com/office/powerpoint/2012/main" xmlns:ahyp="http://schemas.microsoft.com/office/drawing/2018/hyperlinkcolor">
   <p:cSld>
     <p:spTree>
       <p:nvGrpSpPr>
-        <p:cNvPr id="159" name="Shape 159"/>
+        <p:cNvPr id="174" name="Shape 174"/>
         <p:cNvGrpSpPr/>
         <p:nvPr/>
       </p:nvGrpSpPr>
@@ -10870,7 +11672,7 @@
       </p:grpSpPr>
       <p:sp>
         <p:nvSpPr>
-          <p:cNvPr id="160" name="Google Shape;160;p17"/>
+          <p:cNvPr id="175" name="Google Shape;175;p19"/>
           <p:cNvSpPr txBox="1"/>
           <p:nvPr>
             <p:ph type="title"/>
@@ -10902,7 +11704,7 @@
             </a:pPr>
             <a:r>
               <a:rPr b="1" i="1" lang="en" u="sng"/>
-              <a:t>Front End Development</a:t>
+              <a:t>Backend Development</a:t>
             </a:r>
             <a:endParaRPr b="1" i="1" u="sng"/>
           </a:p>
@@ -10910,7 +11712,7 @@
       </p:sp>
       <p:sp>
         <p:nvSpPr>
-          <p:cNvPr id="161" name="Google Shape;161;p17"/>
+          <p:cNvPr id="176" name="Google Shape;176;p19"/>
           <p:cNvSpPr txBox="1"/>
           <p:nvPr>
             <p:ph idx="1" type="body"/>
@@ -10927,7 +11729,7 @@
         </p:spPr>
         <p:txBody>
           <a:bodyPr anchorCtr="0" anchor="t" bIns="91425" lIns="91425" spcFirstLastPara="1" rIns="91425" wrap="square" tIns="91425">
-            <a:normAutofit fontScale="47500" lnSpcReduction="20000"/>
+            <a:normAutofit/>
           </a:bodyPr>
           <a:lstStyle/>
           <a:p>
@@ -10942,204 +11744,17 @@
             </a:pPr>
             <a:r>
               <a:rPr lang="en"/>
-              <a:t>E</a:t>
+              <a:t>There was a bit of an early start on the backend side of the development solely due to the fact that our entire premise is predicated on the idea of an AI generated recipe. In order for the Open AI API to work it has to have a local server running so the Open AI could find us on the web and send us the output. We also had to implement a little javascript backend for the require google login API as well as use </a:t>
             </a:r>
             <a:r>
-              <a:rPr lang="en" sz="1442"/>
-              <a:t>xample Scenario – “What can I cook tonight?”</a:t>
-            </a:r>
-            <a:br>
-              <a:rPr lang="en" sz="1442"/>
-            </a:br>
-            <a:r>
-              <a:rPr lang="en" sz="1442"/>
-              <a:t>1. User logs in (or continues as guest)</a:t>
-            </a:r>
-            <a:endParaRPr sz="1442"/>
-          </a:p>
-          <a:p>
-            <a:pPr indent="0" lvl="0" marL="0" rtl="0" algn="l">
-              <a:spcBef>
-                <a:spcPts val="1200"/>
-              </a:spcBef>
-              <a:spcAft>
-                <a:spcPts val="0"/>
-              </a:spcAft>
-              <a:buNone/>
-            </a:pPr>
-            <a:r>
-              <a:rPr lang="en" sz="1442"/>
-              <a:t>2. They selects </a:t>
+              <a:rPr lang="en"/>
+              <a:t>Firebase</a:t>
             </a:r>
             <a:r>
-              <a:rPr lang="en" sz="1442"/>
-              <a:t>ingredients</a:t>
+              <a:rPr lang="en"/>
+              <a:t> to make everything work.</a:t>
             </a:r>
-            <a:r>
-              <a:rPr lang="en" sz="1442"/>
-              <a:t> they already have:</a:t>
-            </a:r>
-            <a:endParaRPr sz="1442"/>
-          </a:p>
-          <a:p>
-            <a:pPr indent="-272120" lvl="0" marL="457200" rtl="0" algn="l">
-              <a:spcBef>
-                <a:spcPts val="1200"/>
-              </a:spcBef>
-              <a:spcAft>
-                <a:spcPts val="0"/>
-              </a:spcAft>
-              <a:buSzPct val="100000"/>
-              <a:buChar char="●"/>
-            </a:pPr>
-            <a:r>
-              <a:rPr lang="en" sz="1442"/>
-              <a:t>Eggs, spinach, cheese, onion</a:t>
-            </a:r>
-            <a:endParaRPr sz="1442"/>
-          </a:p>
-          <a:p>
-            <a:pPr indent="0" lvl="0" marL="0" rtl="0" algn="l">
-              <a:spcBef>
-                <a:spcPts val="1200"/>
-              </a:spcBef>
-              <a:spcAft>
-                <a:spcPts val="0"/>
-              </a:spcAft>
-              <a:buNone/>
-            </a:pPr>
-            <a:r>
-              <a:rPr lang="en" sz="1442"/>
-              <a:t>3. They’ve set their diet preference to ‘’vegetarian’’</a:t>
-            </a:r>
-            <a:endParaRPr sz="1442"/>
-          </a:p>
-          <a:p>
-            <a:pPr indent="0" lvl="0" marL="0" rtl="0" algn="l">
-              <a:spcBef>
-                <a:spcPts val="1200"/>
-              </a:spcBef>
-              <a:spcAft>
-                <a:spcPts val="0"/>
-              </a:spcAft>
-              <a:buNone/>
-            </a:pPr>
-            <a:r>
-              <a:rPr lang="en" sz="1442"/>
-              <a:t>4. The AI quickly returns suggested meals: </a:t>
-            </a:r>
-            <a:endParaRPr sz="1442"/>
-          </a:p>
-          <a:p>
-            <a:pPr indent="-272120" lvl="0" marL="457200" rtl="0" algn="l">
-              <a:spcBef>
-                <a:spcPts val="1200"/>
-              </a:spcBef>
-              <a:spcAft>
-                <a:spcPts val="0"/>
-              </a:spcAft>
-              <a:buSzPct val="100000"/>
-              <a:buChar char="●"/>
-            </a:pPr>
-            <a:r>
-              <a:rPr lang="en" sz="1442"/>
-              <a:t>Spinach &amp; Cheese Omelette</a:t>
-            </a:r>
-            <a:endParaRPr sz="1442"/>
-          </a:p>
-          <a:p>
-            <a:pPr indent="-272120" lvl="0" marL="457200" rtl="0" algn="l">
-              <a:spcBef>
-                <a:spcPts val="0"/>
-              </a:spcBef>
-              <a:spcAft>
-                <a:spcPts val="0"/>
-              </a:spcAft>
-              <a:buSzPct val="100000"/>
-              <a:buChar char="●"/>
-            </a:pPr>
-            <a:r>
-              <a:rPr lang="en" sz="1442"/>
-              <a:t>Vegetarian</a:t>
-            </a:r>
-            <a:r>
-              <a:rPr lang="en" sz="1442"/>
-              <a:t> Frittata</a:t>
-            </a:r>
-            <a:endParaRPr sz="1442"/>
-          </a:p>
-          <a:p>
-            <a:pPr indent="-272120" lvl="0" marL="457200" rtl="0" algn="l">
-              <a:spcBef>
-                <a:spcPts val="0"/>
-              </a:spcBef>
-              <a:spcAft>
-                <a:spcPts val="0"/>
-              </a:spcAft>
-              <a:buSzPct val="100000"/>
-              <a:buChar char="●"/>
-            </a:pPr>
-            <a:r>
-              <a:rPr lang="en" sz="1442"/>
-              <a:t>Egg &amp; Veggie Wrap</a:t>
-            </a:r>
-            <a:endParaRPr sz="1442"/>
-          </a:p>
-          <a:p>
-            <a:pPr indent="0" lvl="0" marL="0" rtl="0" algn="l">
-              <a:spcBef>
-                <a:spcPts val="1200"/>
-              </a:spcBef>
-              <a:spcAft>
-                <a:spcPts val="0"/>
-              </a:spcAft>
-              <a:buNone/>
-            </a:pPr>
-            <a:r>
-              <a:rPr lang="en" sz="1442"/>
-              <a:t>5. One recipe - Frittata - Needs an extra item: Milk</a:t>
-            </a:r>
-            <a:endParaRPr sz="1442"/>
-          </a:p>
-          <a:p>
-            <a:pPr indent="0" lvl="0" marL="0" rtl="0" algn="l">
-              <a:spcBef>
-                <a:spcPts val="1200"/>
-              </a:spcBef>
-              <a:spcAft>
-                <a:spcPts val="0"/>
-              </a:spcAft>
-              <a:buNone/>
-            </a:pPr>
-            <a:r>
-              <a:rPr lang="en" sz="1442"/>
-              <a:t>	</a:t>
-            </a:r>
-            <a:r>
-              <a:rPr lang="en" sz="1442"/>
-              <a:t>The app Automatically adds milk to a smart grocery list</a:t>
-            </a:r>
-            <a:endParaRPr sz="1442"/>
-          </a:p>
-          <a:p>
-            <a:pPr indent="0" lvl="0" marL="0" rtl="0" algn="l">
-              <a:spcBef>
-                <a:spcPts val="1200"/>
-              </a:spcBef>
-              <a:spcAft>
-                <a:spcPts val="0"/>
-              </a:spcAft>
-              <a:buNone/>
-            </a:pPr>
-            <a:r>
-              <a:rPr lang="en" sz="1442"/>
-              <a:t>6. </a:t>
-            </a:r>
-            <a:r>
-              <a:rPr lang="en" sz="1442"/>
-              <a:t>The grocery list only shows items the user doesn’t already have, making shopping faster and more efficient.</a:t>
-            </a:r>
-            <a:endParaRPr sz="1442"/>
+            <a:endParaRPr/>
           </a:p>
           <a:p>
             <a:pPr indent="0" lvl="0" marL="0" rtl="0" algn="l">
@@ -11166,12 +11781,12 @@
 </p:sld>
 </file>
 
-<file path=ppt/slides/slide6.xml><?xml version="1.0" encoding="utf-8"?>
+<file path=ppt/slides/slide8.xml><?xml version="1.0" encoding="utf-8"?>
 <p:sld xmlns:a="http://schemas.openxmlformats.org/drawingml/2006/main" xmlns:r="http://schemas.openxmlformats.org/officeDocument/2006/relationships" xmlns:mc="http://schemas.openxmlformats.org/markup-compatibility/2006" xmlns:mv="urn:schemas-microsoft-com:mac:vml" xmlns:p="http://schemas.openxmlformats.org/presentationml/2006/main" xmlns:c="http://schemas.openxmlformats.org/drawingml/2006/chart" xmlns:dgm="http://schemas.openxmlformats.org/drawingml/2006/diagram" xmlns:o="urn:schemas-microsoft-com:office:office" xmlns:v="urn:schemas-microsoft-com:vml" xmlns:pvml="urn:schemas-microsoft-com:office:powerpoint" xmlns:com="http://schemas.openxmlformats.org/drawingml/2006/compatibility" xmlns:p14="http://schemas.microsoft.com/office/powerpoint/2010/main" xmlns:p15="http://schemas.microsoft.com/office/powerpoint/2012/main" xmlns:ahyp="http://schemas.microsoft.com/office/drawing/2018/hyperlinkcolor">
   <p:cSld>
     <p:spTree>
       <p:nvGrpSpPr>
-        <p:cNvPr id="165" name="Shape 165"/>
+        <p:cNvPr id="180" name="Shape 180"/>
         <p:cNvGrpSpPr/>
         <p:nvPr/>
       </p:nvGrpSpPr>
@@ -11185,7 +11800,7 @@
       </p:grpSpPr>
       <p:sp>
         <p:nvSpPr>
-          <p:cNvPr id="166" name="Google Shape;166;p18"/>
+          <p:cNvPr id="181" name="Google Shape;181;p20"/>
           <p:cNvSpPr txBox="1"/>
           <p:nvPr>
             <p:ph type="title"/>
@@ -11217,357 +11832,6 @@
             </a:pPr>
             <a:r>
               <a:rPr b="1" i="1" lang="en" u="sng"/>
-              <a:t>API, GoogleAPI, and other technology</a:t>
-            </a:r>
-            <a:endParaRPr b="1" i="1" u="sng"/>
-          </a:p>
-        </p:txBody>
-      </p:sp>
-      <p:sp>
-        <p:nvSpPr>
-          <p:cNvPr id="167" name="Google Shape;167;p18"/>
-          <p:cNvSpPr txBox="1"/>
-          <p:nvPr>
-            <p:ph idx="1" type="body"/>
-          </p:nvPr>
-        </p:nvSpPr>
-        <p:spPr>
-          <a:xfrm>
-            <a:off x="1297500" y="1567550"/>
-            <a:ext cx="7038900" cy="2911200"/>
-          </a:xfrm>
-          <a:prstGeom prst="rect">
-            <a:avLst/>
-          </a:prstGeom>
-        </p:spPr>
-        <p:txBody>
-          <a:bodyPr anchorCtr="0" anchor="t" bIns="91425" lIns="91425" spcFirstLastPara="1" rIns="91425" wrap="square" tIns="91425">
-            <a:normAutofit/>
-          </a:bodyPr>
-          <a:lstStyle/>
-          <a:p>
-            <a:pPr indent="-311150" lvl="0" marL="457200" rtl="0" algn="l">
-              <a:spcBef>
-                <a:spcPts val="0"/>
-              </a:spcBef>
-              <a:spcAft>
-                <a:spcPts val="0"/>
-              </a:spcAft>
-              <a:buSzPts val="1300"/>
-              <a:buChar char="●"/>
-            </a:pPr>
-            <a:r>
-              <a:rPr lang="en"/>
-              <a:t>Spoonacular</a:t>
-            </a:r>
-            <a:endParaRPr/>
-          </a:p>
-          <a:p>
-            <a:pPr indent="-311150" lvl="0" marL="457200" rtl="0" algn="l">
-              <a:spcBef>
-                <a:spcPts val="0"/>
-              </a:spcBef>
-              <a:spcAft>
-                <a:spcPts val="0"/>
-              </a:spcAft>
-              <a:buSzPts val="1300"/>
-              <a:buChar char="●"/>
-            </a:pPr>
-            <a:r>
-              <a:rPr lang="en"/>
-              <a:t>Edamam</a:t>
-            </a:r>
-            <a:endParaRPr/>
-          </a:p>
-          <a:p>
-            <a:pPr indent="-311150" lvl="0" marL="457200" rtl="0" algn="l">
-              <a:spcBef>
-                <a:spcPts val="0"/>
-              </a:spcBef>
-              <a:spcAft>
-                <a:spcPts val="0"/>
-              </a:spcAft>
-              <a:buSzPts val="1300"/>
-              <a:buChar char="●"/>
-            </a:pPr>
-            <a:r>
-              <a:rPr lang="en"/>
-              <a:t>OpenAI</a:t>
-            </a:r>
-            <a:endParaRPr/>
-          </a:p>
-          <a:p>
-            <a:pPr indent="-311150" lvl="0" marL="457200" rtl="0" algn="l">
-              <a:spcBef>
-                <a:spcPts val="0"/>
-              </a:spcBef>
-              <a:spcAft>
-                <a:spcPts val="0"/>
-              </a:spcAft>
-              <a:buSzPts val="1300"/>
-              <a:buChar char="●"/>
-            </a:pPr>
-            <a:r>
-              <a:rPr lang="en"/>
-              <a:t>Web Scraping</a:t>
-            </a:r>
-            <a:endParaRPr/>
-          </a:p>
-        </p:txBody>
-      </p:sp>
-      <p:pic>
-        <p:nvPicPr>
-          <p:cNvPr id="168" name="Google Shape;168;p18"/>
-          <p:cNvPicPr preferRelativeResize="0"/>
-          <p:nvPr/>
-        </p:nvPicPr>
-        <p:blipFill>
-          <a:blip r:embed="rId3">
-            <a:alphaModFix/>
-          </a:blip>
-          <a:stretch>
-            <a:fillRect/>
-          </a:stretch>
-        </p:blipFill>
-        <p:spPr>
-          <a:xfrm>
-            <a:off x="4526475" y="1908100"/>
-            <a:ext cx="2324100" cy="666750"/>
-          </a:xfrm>
-          <a:prstGeom prst="rect">
-            <a:avLst/>
-          </a:prstGeom>
-          <a:noFill/>
-          <a:ln>
-            <a:noFill/>
-          </a:ln>
-        </p:spPr>
-      </p:pic>
-      <p:pic>
-        <p:nvPicPr>
-          <p:cNvPr id="169" name="Google Shape;169;p18"/>
-          <p:cNvPicPr preferRelativeResize="0"/>
-          <p:nvPr/>
-        </p:nvPicPr>
-        <p:blipFill>
-          <a:blip r:embed="rId4">
-            <a:alphaModFix/>
-          </a:blip>
-          <a:stretch>
-            <a:fillRect/>
-          </a:stretch>
-        </p:blipFill>
-        <p:spPr>
-          <a:xfrm>
-            <a:off x="4526475" y="3175108"/>
-            <a:ext cx="2324100" cy="642842"/>
-          </a:xfrm>
-          <a:prstGeom prst="rect">
-            <a:avLst/>
-          </a:prstGeom>
-          <a:noFill/>
-          <a:ln>
-            <a:noFill/>
-          </a:ln>
-        </p:spPr>
-      </p:pic>
-    </p:spTree>
-  </p:cSld>
-  <p:clrMapOvr>
-    <a:masterClrMapping/>
-  </p:clrMapOvr>
-</p:sld>
-</file>
-
-<file path=ppt/slides/slide7.xml><?xml version="1.0" encoding="utf-8"?>
-<p:sld xmlns:a="http://schemas.openxmlformats.org/drawingml/2006/main" xmlns:r="http://schemas.openxmlformats.org/officeDocument/2006/relationships" xmlns:mc="http://schemas.openxmlformats.org/markup-compatibility/2006" xmlns:mv="urn:schemas-microsoft-com:mac:vml" xmlns:p="http://schemas.openxmlformats.org/presentationml/2006/main" xmlns:c="http://schemas.openxmlformats.org/drawingml/2006/chart" xmlns:dgm="http://schemas.openxmlformats.org/drawingml/2006/diagram" xmlns:o="urn:schemas-microsoft-com:office:office" xmlns:v="urn:schemas-microsoft-com:vml" xmlns:pvml="urn:schemas-microsoft-com:office:powerpoint" xmlns:com="http://schemas.openxmlformats.org/drawingml/2006/compatibility" xmlns:p14="http://schemas.microsoft.com/office/powerpoint/2010/main" xmlns:p15="http://schemas.microsoft.com/office/powerpoint/2012/main" xmlns:ahyp="http://schemas.microsoft.com/office/drawing/2018/hyperlinkcolor">
-  <p:cSld>
-    <p:spTree>
-      <p:nvGrpSpPr>
-        <p:cNvPr id="173" name="Shape 173"/>
-        <p:cNvGrpSpPr/>
-        <p:nvPr/>
-      </p:nvGrpSpPr>
-      <p:grpSpPr>
-        <a:xfrm>
-          <a:off x="0" y="0"/>
-          <a:ext cx="0" cy="0"/>
-          <a:chOff x="0" y="0"/>
-          <a:chExt cx="0" cy="0"/>
-        </a:xfrm>
-      </p:grpSpPr>
-      <p:sp>
-        <p:nvSpPr>
-          <p:cNvPr id="174" name="Google Shape;174;p19"/>
-          <p:cNvSpPr txBox="1"/>
-          <p:nvPr>
-            <p:ph type="title"/>
-          </p:nvPr>
-        </p:nvSpPr>
-        <p:spPr>
-          <a:xfrm>
-            <a:off x="1297500" y="393750"/>
-            <a:ext cx="7038900" cy="914100"/>
-          </a:xfrm>
-          <a:prstGeom prst="rect">
-            <a:avLst/>
-          </a:prstGeom>
-        </p:spPr>
-        <p:txBody>
-          <a:bodyPr anchorCtr="0" anchor="t" bIns="91425" lIns="91425" spcFirstLastPara="1" rIns="91425" wrap="square" tIns="91425">
-            <a:normAutofit/>
-          </a:bodyPr>
-          <a:lstStyle/>
-          <a:p>
-            <a:pPr indent="0" lvl="0" marL="0" rtl="0" algn="l">
-              <a:spcBef>
-                <a:spcPts val="0"/>
-              </a:spcBef>
-              <a:spcAft>
-                <a:spcPts val="0"/>
-              </a:spcAft>
-              <a:buNone/>
-            </a:pPr>
-            <a:r>
-              <a:rPr b="1" i="1" lang="en" u="sng"/>
-              <a:t>Backend Development</a:t>
-            </a:r>
-            <a:endParaRPr b="1" i="1" u="sng"/>
-          </a:p>
-        </p:txBody>
-      </p:sp>
-      <p:sp>
-        <p:nvSpPr>
-          <p:cNvPr id="175" name="Google Shape;175;p19"/>
-          <p:cNvSpPr txBox="1"/>
-          <p:nvPr>
-            <p:ph idx="1" type="body"/>
-          </p:nvPr>
-        </p:nvSpPr>
-        <p:spPr>
-          <a:xfrm>
-            <a:off x="1297500" y="1567550"/>
-            <a:ext cx="7038900" cy="2911200"/>
-          </a:xfrm>
-          <a:prstGeom prst="rect">
-            <a:avLst/>
-          </a:prstGeom>
-        </p:spPr>
-        <p:txBody>
-          <a:bodyPr anchorCtr="0" anchor="t" bIns="91425" lIns="91425" spcFirstLastPara="1" rIns="91425" wrap="square" tIns="91425">
-            <a:normAutofit/>
-          </a:bodyPr>
-          <a:lstStyle/>
-          <a:p>
-            <a:pPr indent="-311150" lvl="0" marL="457200" rtl="0" algn="l">
-              <a:spcBef>
-                <a:spcPts val="0"/>
-              </a:spcBef>
-              <a:spcAft>
-                <a:spcPts val="0"/>
-              </a:spcAft>
-              <a:buSzPts val="1300"/>
-              <a:buChar char="●"/>
-            </a:pPr>
-            <a:r>
-              <a:rPr lang="en"/>
-              <a:t>HTML</a:t>
-            </a:r>
-            <a:endParaRPr/>
-          </a:p>
-          <a:p>
-            <a:pPr indent="-311150" lvl="0" marL="457200" rtl="0" algn="l">
-              <a:spcBef>
-                <a:spcPts val="0"/>
-              </a:spcBef>
-              <a:spcAft>
-                <a:spcPts val="0"/>
-              </a:spcAft>
-              <a:buSzPts val="1300"/>
-              <a:buChar char="●"/>
-            </a:pPr>
-            <a:r>
-              <a:rPr lang="en"/>
-              <a:t>CSS</a:t>
-            </a:r>
-            <a:endParaRPr/>
-          </a:p>
-          <a:p>
-            <a:pPr indent="0" lvl="0" marL="0" rtl="0" algn="l">
-              <a:spcBef>
-                <a:spcPts val="1200"/>
-              </a:spcBef>
-              <a:spcAft>
-                <a:spcPts val="1200"/>
-              </a:spcAft>
-              <a:buNone/>
-            </a:pPr>
-            <a:r>
-              <a:t/>
-            </a:r>
-            <a:endParaRPr/>
-          </a:p>
-        </p:txBody>
-      </p:sp>
-    </p:spTree>
-  </p:cSld>
-  <p:clrMapOvr>
-    <a:masterClrMapping/>
-  </p:clrMapOvr>
-</p:sld>
-</file>
-
-<file path=ppt/slides/slide8.xml><?xml version="1.0" encoding="utf-8"?>
-<p:sld xmlns:a="http://schemas.openxmlformats.org/drawingml/2006/main" xmlns:r="http://schemas.openxmlformats.org/officeDocument/2006/relationships" xmlns:mc="http://schemas.openxmlformats.org/markup-compatibility/2006" xmlns:mv="urn:schemas-microsoft-com:mac:vml" xmlns:p="http://schemas.openxmlformats.org/presentationml/2006/main" xmlns:c="http://schemas.openxmlformats.org/drawingml/2006/chart" xmlns:dgm="http://schemas.openxmlformats.org/drawingml/2006/diagram" xmlns:o="urn:schemas-microsoft-com:office:office" xmlns:v="urn:schemas-microsoft-com:vml" xmlns:pvml="urn:schemas-microsoft-com:office:powerpoint" xmlns:com="http://schemas.openxmlformats.org/drawingml/2006/compatibility" xmlns:p14="http://schemas.microsoft.com/office/powerpoint/2010/main" xmlns:p15="http://schemas.microsoft.com/office/powerpoint/2012/main" xmlns:ahyp="http://schemas.microsoft.com/office/drawing/2018/hyperlinkcolor">
-  <p:cSld>
-    <p:spTree>
-      <p:nvGrpSpPr>
-        <p:cNvPr id="179" name="Shape 179"/>
-        <p:cNvGrpSpPr/>
-        <p:nvPr/>
-      </p:nvGrpSpPr>
-      <p:grpSpPr>
-        <a:xfrm>
-          <a:off x="0" y="0"/>
-          <a:ext cx="0" cy="0"/>
-          <a:chOff x="0" y="0"/>
-          <a:chExt cx="0" cy="0"/>
-        </a:xfrm>
-      </p:grpSpPr>
-      <p:sp>
-        <p:nvSpPr>
-          <p:cNvPr id="180" name="Google Shape;180;p20"/>
-          <p:cNvSpPr txBox="1"/>
-          <p:nvPr>
-            <p:ph type="title"/>
-          </p:nvPr>
-        </p:nvSpPr>
-        <p:spPr>
-          <a:xfrm>
-            <a:off x="1297500" y="393750"/>
-            <a:ext cx="7038900" cy="914100"/>
-          </a:xfrm>
-          <a:prstGeom prst="rect">
-            <a:avLst/>
-          </a:prstGeom>
-        </p:spPr>
-        <p:txBody>
-          <a:bodyPr anchorCtr="0" anchor="t" bIns="91425" lIns="91425" spcFirstLastPara="1" rIns="91425" wrap="square" tIns="91425">
-            <a:normAutofit/>
-          </a:bodyPr>
-          <a:lstStyle/>
-          <a:p>
-            <a:pPr indent="0" lvl="0" marL="0" rtl="0" algn="l">
-              <a:spcBef>
-                <a:spcPts val="0"/>
-              </a:spcBef>
-              <a:spcAft>
-                <a:spcPts val="0"/>
-              </a:spcAft>
-              <a:buNone/>
-            </a:pPr>
-            <a:r>
-              <a:rPr b="1" i="1" lang="en" u="sng"/>
               <a:t>Errors Encountered</a:t>
             </a:r>
             <a:endParaRPr b="1" i="1" u="sng"/>
@@ -11576,7 +11840,7 @@
       </p:sp>
       <p:sp>
         <p:nvSpPr>
-          <p:cNvPr id="181" name="Google Shape;181;p20"/>
+          <p:cNvPr id="182" name="Google Shape;182;p20"/>
           <p:cNvSpPr txBox="1"/>
           <p:nvPr>
             <p:ph idx="1" type="body"/>
@@ -11584,8 +11848,8 @@
         </p:nvSpPr>
         <p:spPr>
           <a:xfrm>
-            <a:off x="1297500" y="1567550"/>
-            <a:ext cx="7038900" cy="2911200"/>
+            <a:off x="1297500" y="925825"/>
+            <a:ext cx="7038900" cy="3710700"/>
           </a:xfrm>
           <a:prstGeom prst="rect">
             <a:avLst/>
@@ -11593,7 +11857,7 @@
         </p:spPr>
         <p:txBody>
           <a:bodyPr anchorCtr="0" anchor="t" bIns="91425" lIns="91425" spcFirstLastPara="1" rIns="91425" wrap="square" tIns="91425">
-            <a:normAutofit/>
+            <a:normAutofit lnSpcReduction="10000"/>
           </a:bodyPr>
           <a:lstStyle/>
           <a:p>
@@ -11609,7 +11873,23 @@
             </a:pPr>
             <a:r>
               <a:rPr lang="en"/>
-              <a:t>React</a:t>
+              <a:t>Server would not work! </a:t>
+            </a:r>
+            <a:r>
+              <a:rPr b="1" lang="en"/>
+              <a:t>Fix:</a:t>
+            </a:r>
+            <a:r>
+              <a:rPr lang="en"/>
+              <a:t> API key gets </a:t>
+            </a:r>
+            <a:r>
+              <a:rPr lang="en"/>
+              <a:t>auto deleted</a:t>
+            </a:r>
+            <a:r>
+              <a:rPr lang="en"/>
+              <a:t> by open ai if uploaded to git = new key required</a:t>
             </a:r>
             <a:endParaRPr/>
           </a:p>
@@ -11626,7 +11906,147 @@
             </a:pPr>
             <a:r>
               <a:rPr lang="en"/>
-              <a:t>JavaScript</a:t>
+              <a:t>Login button stuck inside logo! </a:t>
+            </a:r>
+            <a:r>
+              <a:rPr b="1" lang="en"/>
+              <a:t>Fix:</a:t>
+            </a:r>
+            <a:r>
+              <a:rPr lang="en"/>
+              <a:t> Absolute position to top right of html</a:t>
+            </a:r>
+            <a:endParaRPr/>
+          </a:p>
+          <a:p>
+            <a:pPr indent="-311150" lvl="0" marL="457200" rtl="0" algn="l">
+              <a:spcBef>
+                <a:spcPts val="0"/>
+              </a:spcBef>
+              <a:spcAft>
+                <a:spcPts val="0"/>
+              </a:spcAft>
+              <a:buSzPts val="1300"/>
+              <a:buChar char="●"/>
+            </a:pPr>
+            <a:r>
+              <a:rPr lang="en"/>
+              <a:t>Login image in correct spot but actual button extends across banner width! </a:t>
+            </a:r>
+            <a:r>
+              <a:rPr b="1" lang="en"/>
+              <a:t>Fix:</a:t>
+            </a:r>
+            <a:r>
+              <a:rPr lang="en"/>
+              <a:t> </a:t>
+            </a:r>
+            <a:r>
+              <a:rPr lang="en"/>
+              <a:t>restrain</a:t>
+            </a:r>
+            <a:r>
+              <a:rPr lang="en"/>
+              <a:t> it to the same pixel width and height as image.</a:t>
+            </a:r>
+            <a:endParaRPr/>
+          </a:p>
+          <a:p>
+            <a:pPr indent="-311150" lvl="0" marL="457200" rtl="0" algn="l">
+              <a:spcBef>
+                <a:spcPts val="0"/>
+              </a:spcBef>
+              <a:spcAft>
+                <a:spcPts val="0"/>
+              </a:spcAft>
+              <a:buSzPts val="1300"/>
+              <a:buChar char="●"/>
+            </a:pPr>
+            <a:r>
+              <a:rPr lang="en"/>
+              <a:t>Login error:   </a:t>
+            </a:r>
+            <a:r>
+              <a:rPr b="1" lang="en" u="sng"/>
+              <a:t>net::ERR_BLOCKED_BY_CLIENT.</a:t>
+            </a:r>
+            <a:r>
+              <a:rPr lang="en"/>
+              <a:t>  The request to validate the account was blocked by a browser extension (e.g., ad blocker or privacy tool). </a:t>
+            </a:r>
+            <a:r>
+              <a:rPr b="1" lang="en"/>
+              <a:t>Solution:</a:t>
+            </a:r>
+            <a:r>
+              <a:rPr lang="en"/>
+              <a:t> Disabled ad blocker</a:t>
+            </a:r>
+            <a:endParaRPr/>
+          </a:p>
+          <a:p>
+            <a:pPr indent="-311150" lvl="0" marL="457200" rtl="0" algn="l">
+              <a:spcBef>
+                <a:spcPts val="0"/>
+              </a:spcBef>
+              <a:spcAft>
+                <a:spcPts val="0"/>
+              </a:spcAft>
+              <a:buSzPts val="1300"/>
+              <a:buChar char="●"/>
+            </a:pPr>
+            <a:r>
+              <a:rPr lang="en"/>
+              <a:t>Login error: </a:t>
+            </a:r>
+            <a:r>
+              <a:rPr b="1" lang="en" u="sng"/>
+              <a:t>Error 400: redirect_uri_mismatch. </a:t>
+            </a:r>
+            <a:r>
+              <a:rPr lang="en"/>
+              <a:t>The login_url set in the JavaScript did not exactly match any URL listed under Authorized redirect URLs in Google Cloud Console. </a:t>
+            </a:r>
+            <a:r>
+              <a:rPr b="1" lang="en"/>
+              <a:t>Solution:</a:t>
+            </a:r>
+            <a:r>
+              <a:rPr lang="en"/>
+              <a:t> Added the correct full path URL to the Google Cloud Console.</a:t>
+            </a:r>
+            <a:endParaRPr/>
+          </a:p>
+          <a:p>
+            <a:pPr indent="-311150" lvl="0" marL="457200" rtl="0" algn="l">
+              <a:spcBef>
+                <a:spcPts val="0"/>
+              </a:spcBef>
+              <a:spcAft>
+                <a:spcPts val="0"/>
+              </a:spcAft>
+              <a:buSzPts val="1300"/>
+              <a:buChar char="●"/>
+            </a:pPr>
+            <a:r>
+              <a:rPr lang="en"/>
+              <a:t>Login error: </a:t>
+            </a:r>
+            <a:r>
+              <a:rPr b="1" lang="en" u="sng"/>
+              <a:t>HTTP ERROR 405.</a:t>
+            </a:r>
+            <a:r>
+              <a:rPr lang="en"/>
+              <a:t>  Google uses a POST request when we use redirect mode, but the local server (Five Server) only supports simple GET requests (like loading pages, not submitting data). </a:t>
+            </a:r>
+            <a:r>
+              <a:rPr b="1" lang="en"/>
+              <a:t>Solution: </a:t>
+            </a:r>
+            <a:r>
+              <a:rPr lang="en"/>
+              <a:t>We made sure the Google redirect goes to a page that only expects to be loaded normally — no form submissions or POST handling.</a:t>
             </a:r>
             <a:endParaRPr/>
           </a:p>
@@ -11660,7 +12080,7 @@
   <p:cSld>
     <p:spTree>
       <p:nvGrpSpPr>
-        <p:cNvPr id="185" name="Shape 185"/>
+        <p:cNvPr id="186" name="Shape 186"/>
         <p:cNvGrpSpPr/>
         <p:nvPr/>
       </p:nvGrpSpPr>
@@ -11674,7 +12094,7 @@
       </p:grpSpPr>
       <p:sp>
         <p:nvSpPr>
-          <p:cNvPr id="186" name="Google Shape;186;p21"/>
+          <p:cNvPr id="187" name="Google Shape;187;p21"/>
           <p:cNvSpPr txBox="1"/>
           <p:nvPr>
             <p:ph type="title"/>
@@ -11682,7 +12102,7 @@
         </p:nvSpPr>
         <p:spPr>
           <a:xfrm>
-            <a:off x="1297500" y="393750"/>
+            <a:off x="1247250" y="393750"/>
             <a:ext cx="7038900" cy="914100"/>
           </a:xfrm>
           <a:prstGeom prst="rect">
@@ -11706,7 +12126,7 @@
             </a:pPr>
             <a:r>
               <a:rPr b="1" i="1" lang="en" u="sng"/>
-              <a:t>Statement Of Work</a:t>
+              <a:t>Knowledge Gained</a:t>
             </a:r>
             <a:endParaRPr b="1" i="1" u="sng"/>
           </a:p>
@@ -11714,7 +12134,7 @@
       </p:sp>
       <p:sp>
         <p:nvSpPr>
-          <p:cNvPr id="187" name="Google Shape;187;p21"/>
+          <p:cNvPr id="188" name="Google Shape;188;p21"/>
           <p:cNvSpPr txBox="1"/>
           <p:nvPr>
             <p:ph idx="1" type="body"/>
@@ -11722,8 +12142,8 @@
         </p:nvSpPr>
         <p:spPr>
           <a:xfrm>
-            <a:off x="5902325" y="711525"/>
-            <a:ext cx="2434200" cy="2911200"/>
+            <a:off x="1297500" y="999300"/>
+            <a:ext cx="5937300" cy="3630000"/>
           </a:xfrm>
           <a:prstGeom prst="rect">
             <a:avLst/>
@@ -11746,179 +12166,105 @@
             </a:pPr>
             <a:r>
               <a:rPr lang="en"/>
-              <a:t>Project Manager : Adam Shipp</a:t>
+              <a:t>Technical Lessons:</a:t>
             </a:r>
             <a:endParaRPr/>
           </a:p>
           <a:p>
-            <a:pPr indent="0" lvl="0" marL="0" rtl="0" algn="l">
+            <a:pPr indent="-311150" lvl="0" marL="457200" rtl="0" algn="l">
               <a:spcBef>
                 <a:spcPts val="1200"/>
               </a:spcBef>
               <a:spcAft>
                 <a:spcPts val="0"/>
               </a:spcAft>
-              <a:buNone/>
+              <a:buSzPts val="1300"/>
+              <a:buChar char="●"/>
             </a:pPr>
             <a:r>
+              <a:rPr b="1" lang="en"/>
+              <a:t>Working with external APIs required strong planning.</a:t>
+            </a:r>
+            <a:br>
               <a:rPr lang="en"/>
-              <a:t>Developer : Dakota Bass</a:t>
+            </a:br>
+            <a:r>
+              <a:rPr lang="en"/>
+              <a:t>We learned to read API documentation carefully and manage errors, rate limits, and different response formats</a:t>
             </a:r>
             <a:endParaRPr/>
           </a:p>
           <a:p>
-            <a:pPr indent="0" lvl="0" marL="0" rtl="0" algn="l">
-              <a:spcBef>
-                <a:spcPts val="1200"/>
-              </a:spcBef>
-              <a:spcAft>
-                <a:spcPts val="0"/>
-              </a:spcAft>
-              <a:buNone/>
+            <a:pPr indent="-311150" lvl="0" marL="457200" rtl="0" algn="l">
+              <a:spcBef>
+                <a:spcPts val="0"/>
+              </a:spcBef>
+              <a:spcAft>
+                <a:spcPts val="0"/>
+              </a:spcAft>
+              <a:buSzPts val="1300"/>
+              <a:buChar char="●"/>
             </a:pPr>
             <a:r>
+              <a:rPr b="1" lang="en"/>
+              <a:t>Dynamic DOM manipulation in JavaScript can get messy.</a:t>
+            </a:r>
+            <a:br>
               <a:rPr lang="en"/>
-              <a:t>Developer : Jesus Gutierrez</a:t>
+            </a:br>
+            <a:r>
+              <a:rPr lang="en"/>
+              <a:t>We realized the importance of clean, modular JS when updating the UI based on user actions.</a:t>
             </a:r>
             <a:endParaRPr/>
           </a:p>
           <a:p>
-            <a:pPr indent="0" lvl="0" marL="0" rtl="0" algn="l">
-              <a:spcBef>
-                <a:spcPts val="1200"/>
-              </a:spcBef>
-              <a:spcAft>
-                <a:spcPts val="1200"/>
-              </a:spcAft>
-              <a:buNone/>
+            <a:pPr indent="-311150" lvl="0" marL="457200" rtl="0" algn="l">
+              <a:spcBef>
+                <a:spcPts val="0"/>
+              </a:spcBef>
+              <a:spcAft>
+                <a:spcPts val="0"/>
+              </a:spcAft>
+              <a:buSzPts val="1300"/>
+              <a:buChar char="●"/>
             </a:pPr>
             <a:r>
+              <a:rPr b="1" lang="en"/>
+              <a:t>CSS layout and responsiveness takes patience.</a:t>
+            </a:r>
+            <a:br>
               <a:rPr lang="en"/>
-              <a:t>Developer : </a:t>
-            </a:r>
+            </a:br>
             <a:r>
               <a:rPr lang="en"/>
-              <a:t>Joseph Frey</a:t>
+              <a:t>Building a layout that looks good on all devices took multiple iterations and teamwork.</a:t>
             </a:r>
             <a:endParaRPr/>
           </a:p>
-        </p:txBody>
-      </p:sp>
-      <p:sp>
-        <p:nvSpPr>
-          <p:cNvPr id="188" name="Google Shape;188;p21"/>
-          <p:cNvSpPr txBox="1"/>
-          <p:nvPr/>
-        </p:nvSpPr>
-        <p:spPr>
-          <a:xfrm>
-            <a:off x="1297500" y="1307850"/>
-            <a:ext cx="4444500" cy="3220800"/>
-          </a:xfrm>
-          <a:prstGeom prst="rect">
-            <a:avLst/>
-          </a:prstGeom>
-          <a:noFill/>
-          <a:ln>
-            <a:noFill/>
-          </a:ln>
-        </p:spPr>
-        <p:txBody>
-          <a:bodyPr anchorCtr="0" anchor="t" bIns="91425" lIns="91425" spcFirstLastPara="1" rIns="91425" wrap="square" tIns="91425">
-            <a:noAutofit/>
-          </a:bodyPr>
-          <a:lstStyle/>
           <a:p>
-            <a:pPr indent="0" lvl="0" marL="0" rtl="0" algn="l">
-              <a:lnSpc>
-                <a:spcPct val="115000"/>
-              </a:lnSpc>
-              <a:spcBef>
-                <a:spcPts val="1200"/>
-              </a:spcBef>
-              <a:spcAft>
-                <a:spcPts val="0"/>
-              </a:spcAft>
-              <a:buNone/>
+            <a:pPr indent="-311150" lvl="0" marL="457200" rtl="0" algn="l">
+              <a:spcBef>
+                <a:spcPts val="0"/>
+              </a:spcBef>
+              <a:spcAft>
+                <a:spcPts val="0"/>
+              </a:spcAft>
+              <a:buSzPts val="1300"/>
+              <a:buChar char="●"/>
             </a:pPr>
             <a:r>
-              <a:rPr lang="en" sz="1300">
-                <a:solidFill>
-                  <a:srgbClr val="41973E"/>
-                </a:solidFill>
-                <a:latin typeface="Lato"/>
-                <a:ea typeface="Lato"/>
-                <a:cs typeface="Lato"/>
-                <a:sym typeface="Lato"/>
-              </a:rPr>
-              <a:t>The Project Manager will oversee the planning, coordination, and progress tracking of the MealMind project to ensure timely delivery of features and clear communication among team members. In addition to managing team workflows, setting milestones, and leading meetings.  Will also assist with light coding tasks, particularly in front-end development and feature testing.</a:t>
+              <a:rPr b="1" lang="en"/>
+              <a:t>Debugging is part of the journey.</a:t>
             </a:r>
             <a:br>
-              <a:rPr lang="en" sz="1300">
-                <a:solidFill>
-                  <a:srgbClr val="41973E"/>
-                </a:solidFill>
-                <a:latin typeface="Lato"/>
-                <a:ea typeface="Lato"/>
-                <a:cs typeface="Lato"/>
-                <a:sym typeface="Lato"/>
-              </a:rPr>
-            </a:br>
-            <a:br>
-              <a:rPr lang="en" sz="1300">
-                <a:solidFill>
-                  <a:srgbClr val="41973E"/>
-                </a:solidFill>
-                <a:latin typeface="Lato"/>
-                <a:ea typeface="Lato"/>
-                <a:cs typeface="Lato"/>
-                <a:sym typeface="Lato"/>
-              </a:rPr>
+              <a:rPr lang="en"/>
             </a:br>
             <a:r>
-              <a:rPr lang="en" sz="1300">
-                <a:solidFill>
-                  <a:srgbClr val="41973E"/>
-                </a:solidFill>
-                <a:latin typeface="Lato"/>
-                <a:ea typeface="Lato"/>
-                <a:cs typeface="Lato"/>
-                <a:sym typeface="Lato"/>
-              </a:rPr>
-              <a:t>The developers will help design and implement core features such as the ingredient input interface, recipe suggestion logic, and smart grocery list generation. They  also assist with API integration to enhance recipe variety and accuracy.</a:t>
+              <a:rPr lang="en"/>
+              <a:t>From broken API calls to layout issues, each bug helped us learn more about how the web stack works.</a:t>
             </a:r>
-            <a:endParaRPr sz="1300">
-              <a:solidFill>
-                <a:srgbClr val="41973E"/>
-              </a:solidFill>
-              <a:latin typeface="Lato"/>
-              <a:ea typeface="Lato"/>
-              <a:cs typeface="Lato"/>
-              <a:sym typeface="Lato"/>
-            </a:endParaRPr>
-          </a:p>
-          <a:p>
-            <a:pPr indent="0" lvl="0" marL="0" rtl="0" algn="l">
-              <a:spcBef>
-                <a:spcPts val="1200"/>
-              </a:spcBef>
-              <a:spcAft>
-                <a:spcPts val="0"/>
-              </a:spcAft>
-              <a:buNone/>
-            </a:pPr>
-            <a:r>
-              <a:t/>
-            </a:r>
-            <a:endParaRPr sz="1300">
-              <a:solidFill>
-                <a:schemeClr val="lt1"/>
-              </a:solidFill>
-              <a:latin typeface="Lato"/>
-              <a:ea typeface="Lato"/>
-              <a:cs typeface="Lato"/>
-              <a:sym typeface="Lato"/>
-            </a:endParaRPr>
+            <a:endParaRPr/>
           </a:p>
         </p:txBody>
       </p:sp>
@@ -11931,6 +12277,285 @@
 </file>
 
 <file path=ppt/theme/theme1.xml><?xml version="1.0" encoding="utf-8"?>
+<a:theme xmlns:a="http://schemas.openxmlformats.org/drawingml/2006/main" xmlns:r="http://schemas.openxmlformats.org/officeDocument/2006/relationships" name="Focus">
+  <a:themeElements>
+    <a:clrScheme name="Focus">
+      <a:dk1>
+        <a:srgbClr val="1B212C"/>
+      </a:dk1>
+      <a:lt1>
+        <a:srgbClr val="FFFFFF"/>
+      </a:lt1>
+      <a:dk2>
+        <a:srgbClr val="D9D9D9"/>
+      </a:dk2>
+      <a:lt2>
+        <a:srgbClr val="82C7A5"/>
+      </a:lt2>
+      <a:accent1>
+        <a:srgbClr val="0145AC"/>
+      </a:accent1>
+      <a:accent2>
+        <a:srgbClr val="EECE1A"/>
+      </a:accent2>
+      <a:accent3>
+        <a:srgbClr val="4E5567"/>
+      </a:accent3>
+      <a:accent4>
+        <a:srgbClr val="F4D6AD"/>
+      </a:accent4>
+      <a:accent5>
+        <a:srgbClr val="7890CD"/>
+      </a:accent5>
+      <a:accent6>
+        <a:srgbClr val="F15E22"/>
+      </a:accent6>
+      <a:hlink>
+        <a:srgbClr val="7890CD"/>
+      </a:hlink>
+      <a:folHlink>
+        <a:srgbClr val="7890CD"/>
+      </a:folHlink>
+    </a:clrScheme>
+    <a:fontScheme name="Office">
+      <a:majorFont>
+        <a:latin typeface="Arial"/>
+        <a:ea typeface=""/>
+        <a:cs typeface=""/>
+        <a:font script="Jpan" typeface="ＭＳ Ｐゴシック"/>
+        <a:font script="Hang" typeface="맑은 고딕"/>
+        <a:font script="Hans" typeface="宋体"/>
+        <a:font script="Hant" typeface="新細明體"/>
+        <a:font script="Arab" typeface="Times New Roman"/>
+        <a:font script="Hebr" typeface="Times New Roman"/>
+        <a:font script="Thai" typeface="Angsana New"/>
+        <a:font script="Ethi" typeface="Nyala"/>
+        <a:font script="Beng" typeface="Vrinda"/>
+        <a:font script="Gujr" typeface="Shruti"/>
+        <a:font script="Khmr" typeface="MoolBoran"/>
+        <a:font script="Knda" typeface="Tunga"/>
+        <a:font script="Guru" typeface="Raavi"/>
+        <a:font script="Cans" typeface="Euphemia"/>
+        <a:font script="Cher" typeface="Plantagenet Cherokee"/>
+        <a:font script="Yiii" typeface="Microsoft Yi Baiti"/>
+        <a:font script="Tibt" typeface="Microsoft Himalaya"/>
+        <a:font script="Thaa" typeface="MV Boli"/>
+        <a:font script="Deva" typeface="Mangal"/>
+        <a:font script="Telu" typeface="Gautami"/>
+        <a:font script="Taml" typeface="Latha"/>
+        <a:font script="Syrc" typeface="Estrangelo Edessa"/>
+        <a:font script="Orya" typeface="Kalinga"/>
+        <a:font script="Mlym" typeface="Kartika"/>
+        <a:font script="Laoo" typeface="DokChampa"/>
+        <a:font script="Sinh" typeface="Iskoola Pota"/>
+        <a:font script="Mong" typeface="Mongolian Baiti"/>
+        <a:font script="Viet" typeface="Times New Roman"/>
+        <a:font script="Uigh" typeface="Microsoft Uighur"/>
+        <a:font script="Geor" typeface="Sylfaen"/>
+      </a:majorFont>
+      <a:minorFont>
+        <a:latin typeface="Arial"/>
+        <a:ea typeface=""/>
+        <a:cs typeface=""/>
+        <a:font script="Jpan" typeface="ＭＳ Ｐゴシック"/>
+        <a:font script="Hang" typeface="맑은 고딕"/>
+        <a:font script="Hans" typeface="宋体"/>
+        <a:font script="Hant" typeface="新細明體"/>
+        <a:font script="Arab" typeface="Arial"/>
+        <a:font script="Hebr" typeface="Arial"/>
+        <a:font script="Thai" typeface="Cordia New"/>
+        <a:font script="Ethi" typeface="Nyala"/>
+        <a:font script="Beng" typeface="Vrinda"/>
+        <a:font script="Gujr" typeface="Shruti"/>
+        <a:font script="Khmr" typeface="DaunPenh"/>
+        <a:font script="Knda" typeface="Tunga"/>
+        <a:font script="Guru" typeface="Raavi"/>
+        <a:font script="Cans" typeface="Euphemia"/>
+        <a:font script="Cher" typeface="Plantagenet Cherokee"/>
+        <a:font script="Yiii" typeface="Microsoft Yi Baiti"/>
+        <a:font script="Tibt" typeface="Microsoft Himalaya"/>
+        <a:font script="Thaa" typeface="MV Boli"/>
+        <a:font script="Deva" typeface="Mangal"/>
+        <a:font script="Telu" typeface="Gautami"/>
+        <a:font script="Taml" typeface="Latha"/>
+        <a:font script="Syrc" typeface="Estrangelo Edessa"/>
+        <a:font script="Orya" typeface="Kalinga"/>
+        <a:font script="Mlym" typeface="Kartika"/>
+        <a:font script="Laoo" typeface="DokChampa"/>
+        <a:font script="Sinh" typeface="Iskoola Pota"/>
+        <a:font script="Mong" typeface="Mongolian Baiti"/>
+        <a:font script="Viet" typeface="Arial"/>
+        <a:font script="Uigh" typeface="Microsoft Uighur"/>
+        <a:font script="Geor" typeface="Sylfaen"/>
+      </a:minorFont>
+    </a:fontScheme>
+    <a:fmtScheme name="Office">
+      <a:fillStyleLst>
+        <a:solidFill>
+          <a:schemeClr val="phClr"/>
+        </a:solidFill>
+        <a:gradFill rotWithShape="1">
+          <a:gsLst>
+            <a:gs pos="0">
+              <a:schemeClr val="phClr">
+                <a:tint val="50000"/>
+                <a:satMod val="300000"/>
+              </a:schemeClr>
+            </a:gs>
+            <a:gs pos="35000">
+              <a:schemeClr val="phClr">
+                <a:tint val="37000"/>
+                <a:satMod val="300000"/>
+              </a:schemeClr>
+            </a:gs>
+            <a:gs pos="100000">
+              <a:schemeClr val="phClr">
+                <a:tint val="15000"/>
+                <a:satMod val="350000"/>
+              </a:schemeClr>
+            </a:gs>
+          </a:gsLst>
+          <a:lin ang="16200000" scaled="1"/>
+        </a:gradFill>
+        <a:gradFill rotWithShape="1">
+          <a:gsLst>
+            <a:gs pos="0">
+              <a:schemeClr val="phClr">
+                <a:tint val="100000"/>
+                <a:shade val="100000"/>
+                <a:satMod val="130000"/>
+              </a:schemeClr>
+            </a:gs>
+            <a:gs pos="100000">
+              <a:schemeClr val="phClr">
+                <a:tint val="50000"/>
+                <a:shade val="100000"/>
+                <a:satMod val="350000"/>
+              </a:schemeClr>
+            </a:gs>
+          </a:gsLst>
+          <a:lin ang="16200000" scaled="0"/>
+        </a:gradFill>
+      </a:fillStyleLst>
+      <a:lnStyleLst>
+        <a:ln w="9525" cap="flat" cmpd="sng" algn="ctr">
+          <a:solidFill>
+            <a:schemeClr val="phClr">
+              <a:shade val="95000"/>
+              <a:satMod val="105000"/>
+            </a:schemeClr>
+          </a:solidFill>
+          <a:prstDash val="solid"/>
+        </a:ln>
+        <a:ln w="25400" cap="flat" cmpd="sng" algn="ctr">
+          <a:solidFill>
+            <a:schemeClr val="phClr"/>
+          </a:solidFill>
+          <a:prstDash val="solid"/>
+        </a:ln>
+        <a:ln w="38100" cap="flat" cmpd="sng" algn="ctr">
+          <a:solidFill>
+            <a:schemeClr val="phClr"/>
+          </a:solidFill>
+          <a:prstDash val="solid"/>
+        </a:ln>
+      </a:lnStyleLst>
+      <a:effectStyleLst>
+        <a:effectStyle>
+          <a:effectLst>
+            <a:outerShdw blurRad="40000" dist="20000" dir="5400000" rotWithShape="0">
+              <a:srgbClr val="000000">
+                <a:alpha val="38000"/>
+              </a:srgbClr>
+            </a:outerShdw>
+          </a:effectLst>
+        </a:effectStyle>
+        <a:effectStyle>
+          <a:effectLst>
+            <a:outerShdw blurRad="40000" dist="23000" dir="5400000" rotWithShape="0">
+              <a:srgbClr val="000000">
+                <a:alpha val="35000"/>
+              </a:srgbClr>
+            </a:outerShdw>
+          </a:effectLst>
+        </a:effectStyle>
+        <a:effectStyle>
+          <a:effectLst>
+            <a:outerShdw blurRad="40000" dist="23000" dir="5400000" rotWithShape="0">
+              <a:srgbClr val="000000">
+                <a:alpha val="35000"/>
+              </a:srgbClr>
+            </a:outerShdw>
+          </a:effectLst>
+          <a:scene3d>
+            <a:camera prst="orthographicFront">
+              <a:rot lat="0" lon="0" rev="0"/>
+            </a:camera>
+            <a:lightRig rig="threePt" dir="t">
+              <a:rot lat="0" lon="0" rev="1200000"/>
+            </a:lightRig>
+          </a:scene3d>
+          <a:sp3d>
+            <a:bevelT w="63500" h="25400"/>
+          </a:sp3d>
+        </a:effectStyle>
+      </a:effectStyleLst>
+      <a:bgFillStyleLst>
+        <a:solidFill>
+          <a:schemeClr val="phClr"/>
+        </a:solidFill>
+        <a:gradFill rotWithShape="1">
+          <a:gsLst>
+            <a:gs pos="0">
+              <a:schemeClr val="phClr">
+                <a:tint val="40000"/>
+                <a:satMod val="350000"/>
+              </a:schemeClr>
+            </a:gs>
+            <a:gs pos="40000">
+              <a:schemeClr val="phClr">
+                <a:tint val="45000"/>
+                <a:shade val="99000"/>
+                <a:satMod val="350000"/>
+              </a:schemeClr>
+            </a:gs>
+            <a:gs pos="100000">
+              <a:schemeClr val="phClr">
+                <a:shade val="20000"/>
+                <a:satMod val="255000"/>
+              </a:schemeClr>
+            </a:gs>
+          </a:gsLst>
+          <a:path path="circle">
+            <a:fillToRect l="50000" t="-80000" r="50000" b="180000"/>
+          </a:path>
+        </a:gradFill>
+        <a:gradFill rotWithShape="1">
+          <a:gsLst>
+            <a:gs pos="0">
+              <a:schemeClr val="phClr">
+                <a:tint val="80000"/>
+                <a:satMod val="300000"/>
+              </a:schemeClr>
+            </a:gs>
+            <a:gs pos="100000">
+              <a:schemeClr val="phClr">
+                <a:shade val="30000"/>
+                <a:satMod val="200000"/>
+              </a:schemeClr>
+            </a:gs>
+          </a:gsLst>
+          <a:path path="circle">
+            <a:fillToRect l="50000" t="50000" r="50000" b="50000"/>
+          </a:path>
+        </a:gradFill>
+      </a:bgFillStyleLst>
+    </a:fmtScheme>
+  </a:themeElements>
+</a:theme>
+</file>
+
+<file path=ppt/theme/theme2.xml><?xml version="1.0" encoding="utf-8"?>
 <a:theme xmlns:a="http://schemas.openxmlformats.org/drawingml/2006/main" xmlns:r="http://schemas.openxmlformats.org/officeDocument/2006/relationships">
   <a:themeElements>
     <a:clrScheme name="Default">
@@ -12207,283 +12832,4 @@
     </a:fmtScheme>
   </a:themeElements>
 </a:theme>
-</file>
-
-<file path=ppt/theme/theme2.xml><?xml version="1.0" encoding="utf-8"?>
-<a:theme xmlns:a="http://schemas.openxmlformats.org/drawingml/2006/main" xmlns:r="http://schemas.openxmlformats.org/officeDocument/2006/relationships" name="Focus">
-  <a:themeElements>
-    <a:clrScheme name="Focus">
-      <a:dk1>
-        <a:srgbClr val="1B212C"/>
-      </a:dk1>
-      <a:lt1>
-        <a:srgbClr val="FFFFFF"/>
-      </a:lt1>
-      <a:dk2>
-        <a:srgbClr val="D9D9D9"/>
-      </a:dk2>
-      <a:lt2>
-        <a:srgbClr val="82C7A5"/>
-      </a:lt2>
-      <a:accent1>
-        <a:srgbClr val="0145AC"/>
-      </a:accent1>
-      <a:accent2>
-        <a:srgbClr val="EECE1A"/>
-      </a:accent2>
-      <a:accent3>
-        <a:srgbClr val="4E5567"/>
-      </a:accent3>
-      <a:accent4>
-        <a:srgbClr val="F4D6AD"/>
-      </a:accent4>
-      <a:accent5>
-        <a:srgbClr val="7890CD"/>
-      </a:accent5>
-      <a:accent6>
-        <a:srgbClr val="F15E22"/>
-      </a:accent6>
-      <a:hlink>
-        <a:srgbClr val="7890CD"/>
-      </a:hlink>
-      <a:folHlink>
-        <a:srgbClr val="7890CD"/>
-      </a:folHlink>
-    </a:clrScheme>
-    <a:fontScheme name="Office">
-      <a:majorFont>
-        <a:latin typeface="Arial"/>
-        <a:ea typeface=""/>
-        <a:cs typeface=""/>
-        <a:font script="Jpan" typeface="ＭＳ Ｐゴシック"/>
-        <a:font script="Hang" typeface="맑은 고딕"/>
-        <a:font script="Hans" typeface="宋体"/>
-        <a:font script="Hant" typeface="新細明體"/>
-        <a:font script="Arab" typeface="Times New Roman"/>
-        <a:font script="Hebr" typeface="Times New Roman"/>
-        <a:font script="Thai" typeface="Angsana New"/>
-        <a:font script="Ethi" typeface="Nyala"/>
-        <a:font script="Beng" typeface="Vrinda"/>
-        <a:font script="Gujr" typeface="Shruti"/>
-        <a:font script="Khmr" typeface="MoolBoran"/>
-        <a:font script="Knda" typeface="Tunga"/>
-        <a:font script="Guru" typeface="Raavi"/>
-        <a:font script="Cans" typeface="Euphemia"/>
-        <a:font script="Cher" typeface="Plantagenet Cherokee"/>
-        <a:font script="Yiii" typeface="Microsoft Yi Baiti"/>
-        <a:font script="Tibt" typeface="Microsoft Himalaya"/>
-        <a:font script="Thaa" typeface="MV Boli"/>
-        <a:font script="Deva" typeface="Mangal"/>
-        <a:font script="Telu" typeface="Gautami"/>
-        <a:font script="Taml" typeface="Latha"/>
-        <a:font script="Syrc" typeface="Estrangelo Edessa"/>
-        <a:font script="Orya" typeface="Kalinga"/>
-        <a:font script="Mlym" typeface="Kartika"/>
-        <a:font script="Laoo" typeface="DokChampa"/>
-        <a:font script="Sinh" typeface="Iskoola Pota"/>
-        <a:font script="Mong" typeface="Mongolian Baiti"/>
-        <a:font script="Viet" typeface="Times New Roman"/>
-        <a:font script="Uigh" typeface="Microsoft Uighur"/>
-        <a:font script="Geor" typeface="Sylfaen"/>
-      </a:majorFont>
-      <a:minorFont>
-        <a:latin typeface="Arial"/>
-        <a:ea typeface=""/>
-        <a:cs typeface=""/>
-        <a:font script="Jpan" typeface="ＭＳ Ｐゴシック"/>
-        <a:font script="Hang" typeface="맑은 고딕"/>
-        <a:font script="Hans" typeface="宋体"/>
-        <a:font script="Hant" typeface="新細明體"/>
-        <a:font script="Arab" typeface="Arial"/>
-        <a:font script="Hebr" typeface="Arial"/>
-        <a:font script="Thai" typeface="Cordia New"/>
-        <a:font script="Ethi" typeface="Nyala"/>
-        <a:font script="Beng" typeface="Vrinda"/>
-        <a:font script="Gujr" typeface="Shruti"/>
-        <a:font script="Khmr" typeface="DaunPenh"/>
-        <a:font script="Knda" typeface="Tunga"/>
-        <a:font script="Guru" typeface="Raavi"/>
-        <a:font script="Cans" typeface="Euphemia"/>
-        <a:font script="Cher" typeface="Plantagenet Cherokee"/>
-        <a:font script="Yiii" typeface="Microsoft Yi Baiti"/>
-        <a:font script="Tibt" typeface="Microsoft Himalaya"/>
-        <a:font script="Thaa" typeface="MV Boli"/>
-        <a:font script="Deva" typeface="Mangal"/>
-        <a:font script="Telu" typeface="Gautami"/>
-        <a:font script="Taml" typeface="Latha"/>
-        <a:font script="Syrc" typeface="Estrangelo Edessa"/>
-        <a:font script="Orya" typeface="Kalinga"/>
-        <a:font script="Mlym" typeface="Kartika"/>
-        <a:font script="Laoo" typeface="DokChampa"/>
-        <a:font script="Sinh" typeface="Iskoola Pota"/>
-        <a:font script="Mong" typeface="Mongolian Baiti"/>
-        <a:font script="Viet" typeface="Arial"/>
-        <a:font script="Uigh" typeface="Microsoft Uighur"/>
-        <a:font script="Geor" typeface="Sylfaen"/>
-      </a:minorFont>
-    </a:fontScheme>
-    <a:fmtScheme name="Office">
-      <a:fillStyleLst>
-        <a:solidFill>
-          <a:schemeClr val="phClr"/>
-        </a:solidFill>
-        <a:gradFill rotWithShape="1">
-          <a:gsLst>
-            <a:gs pos="0">
-              <a:schemeClr val="phClr">
-                <a:tint val="50000"/>
-                <a:satMod val="300000"/>
-              </a:schemeClr>
-            </a:gs>
-            <a:gs pos="35000">
-              <a:schemeClr val="phClr">
-                <a:tint val="37000"/>
-                <a:satMod val="300000"/>
-              </a:schemeClr>
-            </a:gs>
-            <a:gs pos="100000">
-              <a:schemeClr val="phClr">
-                <a:tint val="15000"/>
-                <a:satMod val="350000"/>
-              </a:schemeClr>
-            </a:gs>
-          </a:gsLst>
-          <a:lin ang="16200000" scaled="1"/>
-        </a:gradFill>
-        <a:gradFill rotWithShape="1">
-          <a:gsLst>
-            <a:gs pos="0">
-              <a:schemeClr val="phClr">
-                <a:tint val="100000"/>
-                <a:shade val="100000"/>
-                <a:satMod val="130000"/>
-              </a:schemeClr>
-            </a:gs>
-            <a:gs pos="100000">
-              <a:schemeClr val="phClr">
-                <a:tint val="50000"/>
-                <a:shade val="100000"/>
-                <a:satMod val="350000"/>
-              </a:schemeClr>
-            </a:gs>
-          </a:gsLst>
-          <a:lin ang="16200000" scaled="0"/>
-        </a:gradFill>
-      </a:fillStyleLst>
-      <a:lnStyleLst>
-        <a:ln w="9525" cap="flat" cmpd="sng" algn="ctr">
-          <a:solidFill>
-            <a:schemeClr val="phClr">
-              <a:shade val="95000"/>
-              <a:satMod val="105000"/>
-            </a:schemeClr>
-          </a:solidFill>
-          <a:prstDash val="solid"/>
-        </a:ln>
-        <a:ln w="25400" cap="flat" cmpd="sng" algn="ctr">
-          <a:solidFill>
-            <a:schemeClr val="phClr"/>
-          </a:solidFill>
-          <a:prstDash val="solid"/>
-        </a:ln>
-        <a:ln w="38100" cap="flat" cmpd="sng" algn="ctr">
-          <a:solidFill>
-            <a:schemeClr val="phClr"/>
-          </a:solidFill>
-          <a:prstDash val="solid"/>
-        </a:ln>
-      </a:lnStyleLst>
-      <a:effectStyleLst>
-        <a:effectStyle>
-          <a:effectLst>
-            <a:outerShdw blurRad="40000" dist="20000" dir="5400000" rotWithShape="0">
-              <a:srgbClr val="000000">
-                <a:alpha val="38000"/>
-              </a:srgbClr>
-            </a:outerShdw>
-          </a:effectLst>
-        </a:effectStyle>
-        <a:effectStyle>
-          <a:effectLst>
-            <a:outerShdw blurRad="40000" dist="23000" dir="5400000" rotWithShape="0">
-              <a:srgbClr val="000000">
-                <a:alpha val="35000"/>
-              </a:srgbClr>
-            </a:outerShdw>
-          </a:effectLst>
-        </a:effectStyle>
-        <a:effectStyle>
-          <a:effectLst>
-            <a:outerShdw blurRad="40000" dist="23000" dir="5400000" rotWithShape="0">
-              <a:srgbClr val="000000">
-                <a:alpha val="35000"/>
-              </a:srgbClr>
-            </a:outerShdw>
-          </a:effectLst>
-          <a:scene3d>
-            <a:camera prst="orthographicFront">
-              <a:rot lat="0" lon="0" rev="0"/>
-            </a:camera>
-            <a:lightRig rig="threePt" dir="t">
-              <a:rot lat="0" lon="0" rev="1200000"/>
-            </a:lightRig>
-          </a:scene3d>
-          <a:sp3d>
-            <a:bevelT w="63500" h="25400"/>
-          </a:sp3d>
-        </a:effectStyle>
-      </a:effectStyleLst>
-      <a:bgFillStyleLst>
-        <a:solidFill>
-          <a:schemeClr val="phClr"/>
-        </a:solidFill>
-        <a:gradFill rotWithShape="1">
-          <a:gsLst>
-            <a:gs pos="0">
-              <a:schemeClr val="phClr">
-                <a:tint val="40000"/>
-                <a:satMod val="350000"/>
-              </a:schemeClr>
-            </a:gs>
-            <a:gs pos="40000">
-              <a:schemeClr val="phClr">
-                <a:tint val="45000"/>
-                <a:shade val="99000"/>
-                <a:satMod val="350000"/>
-              </a:schemeClr>
-            </a:gs>
-            <a:gs pos="100000">
-              <a:schemeClr val="phClr">
-                <a:shade val="20000"/>
-                <a:satMod val="255000"/>
-              </a:schemeClr>
-            </a:gs>
-          </a:gsLst>
-          <a:path path="circle">
-            <a:fillToRect l="50000" t="-80000" r="50000" b="180000"/>
-          </a:path>
-        </a:gradFill>
-        <a:gradFill rotWithShape="1">
-          <a:gsLst>
-            <a:gs pos="0">
-              <a:schemeClr val="phClr">
-                <a:tint val="80000"/>
-                <a:satMod val="300000"/>
-              </a:schemeClr>
-            </a:gs>
-            <a:gs pos="100000">
-              <a:schemeClr val="phClr">
-                <a:shade val="30000"/>
-                <a:satMod val="200000"/>
-              </a:schemeClr>
-            </a:gs>
-          </a:gsLst>
-          <a:path path="circle">
-            <a:fillToRect l="50000" t="50000" r="50000" b="50000"/>
-          </a:path>
-        </a:gradFill>
-      </a:bgFillStyleLst>
-    </a:fmtScheme>
-  </a:themeElements>
-</a:theme>
 </file>